--- a/1차 프로젝트(머신러닝)/1. 기획서.pptx
+++ b/1차 프로젝트(머신러닝)/1. 기획서.pptx
@@ -555,7 +555,7 @@
           <a:p>
             <a:fld id="{5FF1FBC4-7606-4365-936D-FA197F527325}" type="datetimeFigureOut">
               <a:rPr lang="ko-KR" altLang="en-US" smtClean="0"/>
-              <a:t>2026-03-19</a:t>
+              <a:t>2026-03-24</a:t>
             </a:fld>
             <a:endParaRPr lang="ko-KR" altLang="en-US"/>
           </a:p>
@@ -753,7 +753,7 @@
           <a:p>
             <a:fld id="{5FF1FBC4-7606-4365-936D-FA197F527325}" type="datetimeFigureOut">
               <a:rPr lang="ko-KR" altLang="en-US" smtClean="0"/>
-              <a:t>2026-03-19</a:t>
+              <a:t>2026-03-24</a:t>
             </a:fld>
             <a:endParaRPr lang="ko-KR" altLang="en-US"/>
           </a:p>
@@ -961,7 +961,7 @@
           <a:p>
             <a:fld id="{5FF1FBC4-7606-4365-936D-FA197F527325}" type="datetimeFigureOut">
               <a:rPr lang="ko-KR" altLang="en-US" smtClean="0"/>
-              <a:t>2026-03-19</a:t>
+              <a:t>2026-03-24</a:t>
             </a:fld>
             <a:endParaRPr lang="ko-KR" altLang="en-US"/>
           </a:p>
@@ -1392,7 +1392,7 @@
           <a:p>
             <a:fld id="{5FF1FBC4-7606-4365-936D-FA197F527325}" type="datetimeFigureOut">
               <a:rPr lang="ko-KR" altLang="en-US" smtClean="0"/>
-              <a:t>2026-03-19</a:t>
+              <a:t>2026-03-24</a:t>
             </a:fld>
             <a:endParaRPr lang="ko-KR" altLang="en-US"/>
           </a:p>
@@ -1657,7 +1657,7 @@
           <a:p>
             <a:fld id="{5FF1FBC4-7606-4365-936D-FA197F527325}" type="datetimeFigureOut">
               <a:rPr lang="ko-KR" altLang="en-US" smtClean="0"/>
-              <a:t>2026-03-19</a:t>
+              <a:t>2026-03-24</a:t>
             </a:fld>
             <a:endParaRPr lang="ko-KR" altLang="en-US"/>
           </a:p>
@@ -2069,7 +2069,7 @@
           <a:p>
             <a:fld id="{5FF1FBC4-7606-4365-936D-FA197F527325}" type="datetimeFigureOut">
               <a:rPr lang="ko-KR" altLang="en-US" smtClean="0"/>
-              <a:t>2026-03-19</a:t>
+              <a:t>2026-03-24</a:t>
             </a:fld>
             <a:endParaRPr lang="ko-KR" altLang="en-US"/>
           </a:p>
@@ -2210,7 +2210,7 @@
           <a:p>
             <a:fld id="{5FF1FBC4-7606-4365-936D-FA197F527325}" type="datetimeFigureOut">
               <a:rPr lang="ko-KR" altLang="en-US" smtClean="0"/>
-              <a:t>2026-03-19</a:t>
+              <a:t>2026-03-24</a:t>
             </a:fld>
             <a:endParaRPr lang="ko-KR" altLang="en-US"/>
           </a:p>
@@ -2323,7 +2323,7 @@
           <a:p>
             <a:fld id="{5FF1FBC4-7606-4365-936D-FA197F527325}" type="datetimeFigureOut">
               <a:rPr lang="ko-KR" altLang="en-US" smtClean="0"/>
-              <a:t>2026-03-19</a:t>
+              <a:t>2026-03-24</a:t>
             </a:fld>
             <a:endParaRPr lang="ko-KR" altLang="en-US"/>
           </a:p>
@@ -2634,7 +2634,7 @@
           <a:p>
             <a:fld id="{5FF1FBC4-7606-4365-936D-FA197F527325}" type="datetimeFigureOut">
               <a:rPr lang="ko-KR" altLang="en-US" smtClean="0"/>
-              <a:t>2026-03-19</a:t>
+              <a:t>2026-03-24</a:t>
             </a:fld>
             <a:endParaRPr lang="ko-KR" altLang="en-US"/>
           </a:p>
@@ -2875,7 +2875,7 @@
           <a:p>
             <a:fld id="{5FF1FBC4-7606-4365-936D-FA197F527325}" type="datetimeFigureOut">
               <a:rPr lang="ko-KR" altLang="en-US" smtClean="0"/>
-              <a:t>2026-03-19</a:t>
+              <a:t>2026-03-24</a:t>
             </a:fld>
             <a:endParaRPr lang="ko-KR" altLang="en-US"/>
           </a:p>
@@ -3504,7 +3504,7 @@
                 <a:latin typeface="a시월구일3" panose="02020600000000000000" pitchFamily="18" charset="-127"/>
                 <a:ea typeface="a시월구일3" panose="02020600000000000000" pitchFamily="18" charset="-127"/>
               </a:rPr>
-              <a:t>서울시 자치구별 보건 취약 유형 분석 및 정책 지원 시스템 개발</a:t>
+              <a:t>서울시 자치구 보건 취약 유형 분석 및 정책 지원 시스템 개발</a:t>
             </a:r>
           </a:p>
         </p:txBody>
@@ -5800,27 +5800,6 @@
                 <a:buChar char="•"/>
               </a:pPr>
               <a:r>
-                <a:rPr kumimoji="1" lang="en-US" altLang="ko-KR" sz="1400" dirty="0">
-                  <a:ln w="12700">
-                    <a:solidFill>
-                      <a:schemeClr val="tx1">
-                        <a:alpha val="5000"/>
-                      </a:schemeClr>
-                    </a:solidFill>
-                  </a:ln>
-                  <a:solidFill>
-                    <a:schemeClr val="tx1">
-                      <a:lumMod val="85000"/>
-                      <a:lumOff val="15000"/>
-                    </a:schemeClr>
-                  </a:solidFill>
-                  <a:latin typeface="a시월구일3" panose="02020600000000000000" pitchFamily="18" charset="-127"/>
-                  <a:ea typeface="a시월구일3" panose="02020600000000000000" pitchFamily="18" charset="-127"/>
-                  <a:cs typeface="Pretendard" panose="02000503000000020004" pitchFamily="2" charset="-127"/>
-                </a:rPr>
-                <a:t>SHAP</a:t>
-              </a:r>
-              <a:r>
                 <a:rPr kumimoji="1" lang="ko-KR" altLang="en-US" sz="1400" dirty="0">
                   <a:ln w="12700">
                     <a:solidFill>
@@ -5839,7 +5818,7 @@
                   <a:ea typeface="a시월구일3" panose="02020600000000000000" pitchFamily="18" charset="-127"/>
                   <a:cs typeface="Pretendard" panose="02000503000000020004" pitchFamily="2" charset="-127"/>
                 </a:rPr>
-                <a:t>을 활용</a:t>
+                <a:t>군집별 주요 변수 평균값을 비교</a:t>
               </a:r>
               <a:r>
                 <a:rPr kumimoji="1" lang="ko-KR" altLang="en-US" sz="1400" dirty="0">
@@ -5860,7 +5839,7 @@
                   <a:ea typeface="a시월구일1" panose="02020600000000000000" pitchFamily="18" charset="-127"/>
                   <a:cs typeface="Pretendard" panose="02000503000000020004" pitchFamily="2" charset="-127"/>
                 </a:rPr>
-                <a:t>하여 유형 분류 결과에 대한 영향 요인 분석</a:t>
+                <a:t>하여 각 유형의 특징을 해석</a:t>
               </a:r>
               <a:endParaRPr kumimoji="1" lang="en-US" altLang="ko-KR" sz="1400" dirty="0">
                 <a:ln w="12700">
@@ -6258,11 +6237,32 @@
                       <a:lumOff val="15000"/>
                     </a:schemeClr>
                   </a:solidFill>
+                  <a:latin typeface="a시월구일3" panose="02020600000000000000" pitchFamily="18" charset="-127"/>
+                  <a:ea typeface="a시월구일3" panose="02020600000000000000" pitchFamily="18" charset="-127"/>
+                  <a:cs typeface="Pretendard" panose="02000503000000020004" pitchFamily="2" charset="-127"/>
+                </a:rPr>
+                <a:t>지역별 상세 분석 및 유형별 특성 정보</a:t>
+              </a:r>
+              <a:r>
+                <a:rPr kumimoji="1" lang="ko-KR" altLang="en-US" sz="1400" dirty="0">
+                  <a:ln w="12700">
+                    <a:solidFill>
+                      <a:schemeClr val="tx1">
+                        <a:alpha val="5000"/>
+                      </a:schemeClr>
+                    </a:solidFill>
+                  </a:ln>
+                  <a:solidFill>
+                    <a:schemeClr val="tx1">
+                      <a:lumMod val="85000"/>
+                      <a:lumOff val="15000"/>
+                    </a:schemeClr>
+                  </a:solidFill>
                   <a:latin typeface="a시월구일1" panose="02020600000000000000" pitchFamily="18" charset="-127"/>
                   <a:ea typeface="a시월구일1" panose="02020600000000000000" pitchFamily="18" charset="-127"/>
                   <a:cs typeface="Pretendard" panose="02000503000000020004" pitchFamily="2" charset="-127"/>
                 </a:rPr>
-                <a:t>지역별 상세 분석 및 원인 정보를 사용자가 쉽게 탐색할 수 있는 </a:t>
+                <a:t>를 사용자가 쉽게 탐색할 수 있는 </a:t>
               </a:r>
               <a:r>
                 <a:rPr kumimoji="1" lang="en-US" altLang="ko-KR" sz="1400" dirty="0">

--- a/1차 프로젝트(머신러닝)/1. 기획서.pptx
+++ b/1차 프로젝트(머신러닝)/1. 기획서.pptx
@@ -120,7 +120,7 @@
             <a:srgbClr val="A4A3A4"/>
           </p15:clr>
         </p15:guide>
-        <p15:guide id="3" orient="horz" pos="618" userDrawn="1">
+        <p15:guide id="3" orient="horz" pos="640" userDrawn="1">
           <p15:clr>
             <a:srgbClr val="A4A3A4"/>
           </p15:clr>
@@ -129,142 +129,6 @@
     </p:ext>
   </p:extLst>
 </p:presentation>
-</file>
-
-<file path=ppt/changesInfos/changesInfo1.xml><?xml version="1.0" encoding="utf-8"?>
-<pc:chgInfo xmlns:a="http://schemas.openxmlformats.org/drawingml/2006/main" xmlns:r="http://schemas.openxmlformats.org/officeDocument/2006/relationships" xmlns:ac="http://schemas.microsoft.com/office/drawing/2013/main/command" xmlns:pc="http://schemas.microsoft.com/office/powerpoint/2013/main/command">
-  <pc:docChgLst>
-    <pc:chgData name="성욱 진" userId="f47a80d7871cb125" providerId="LiveId" clId="{FDCBA572-350E-4C39-BF59-3626AC33FF79}"/>
-    <pc:docChg chg="custSel delSld modSld">
-      <pc:chgData name="성욱 진" userId="f47a80d7871cb125" providerId="LiveId" clId="{FDCBA572-350E-4C39-BF59-3626AC33FF79}" dt="2026-03-19T06:11:21.834" v="14" actId="1076"/>
-      <pc:docMkLst>
-        <pc:docMk/>
-      </pc:docMkLst>
-      <pc:sldChg chg="delSp modSp mod">
-        <pc:chgData name="성욱 진" userId="f47a80d7871cb125" providerId="LiveId" clId="{FDCBA572-350E-4C39-BF59-3626AC33FF79}" dt="2026-03-19T05:51:26.562" v="5" actId="478"/>
-        <pc:sldMkLst>
-          <pc:docMk/>
-          <pc:sldMk cId="687017097" sldId="256"/>
-        </pc:sldMkLst>
-        <pc:spChg chg="del mod">
-          <ac:chgData name="성욱 진" userId="f47a80d7871cb125" providerId="LiveId" clId="{FDCBA572-350E-4C39-BF59-3626AC33FF79}" dt="2026-03-19T05:50:44.358" v="2" actId="478"/>
-          <ac:spMkLst>
-            <pc:docMk/>
-            <pc:sldMk cId="687017097" sldId="256"/>
-            <ac:spMk id="8" creationId="{2C2E5547-8B93-4929-A4AD-0D273BF17DC5}"/>
-          </ac:spMkLst>
-        </pc:spChg>
-        <pc:spChg chg="del">
-          <ac:chgData name="성욱 진" userId="f47a80d7871cb125" providerId="LiveId" clId="{FDCBA572-350E-4C39-BF59-3626AC33FF79}" dt="2026-03-19T05:51:22.789" v="4" actId="478"/>
-          <ac:spMkLst>
-            <pc:docMk/>
-            <pc:sldMk cId="687017097" sldId="256"/>
-            <ac:spMk id="10" creationId="{5963AA9B-179B-4820-BEDE-45A0E81B1DD5}"/>
-          </ac:spMkLst>
-        </pc:spChg>
-        <pc:spChg chg="del topLvl">
-          <ac:chgData name="성욱 진" userId="f47a80d7871cb125" providerId="LiveId" clId="{FDCBA572-350E-4C39-BF59-3626AC33FF79}" dt="2026-03-19T05:51:26.562" v="5" actId="478"/>
-          <ac:spMkLst>
-            <pc:docMk/>
-            <pc:sldMk cId="687017097" sldId="256"/>
-            <ac:spMk id="12" creationId="{558FE02F-E547-4FCD-AD02-0B8DB31EDA64}"/>
-          </ac:spMkLst>
-        </pc:spChg>
-        <pc:spChg chg="del">
-          <ac:chgData name="성욱 진" userId="f47a80d7871cb125" providerId="LiveId" clId="{FDCBA572-350E-4C39-BF59-3626AC33FF79}" dt="2026-03-19T05:51:17.673" v="3" actId="478"/>
-          <ac:spMkLst>
-            <pc:docMk/>
-            <pc:sldMk cId="687017097" sldId="256"/>
-            <ac:spMk id="13" creationId="{6DCD28C2-F01E-47E4-9A35-385BE5944A69}"/>
-          </ac:spMkLst>
-        </pc:spChg>
-        <pc:spChg chg="topLvl">
-          <ac:chgData name="성욱 진" userId="f47a80d7871cb125" providerId="LiveId" clId="{FDCBA572-350E-4C39-BF59-3626AC33FF79}" dt="2026-03-19T05:51:26.562" v="5" actId="478"/>
-          <ac:spMkLst>
-            <pc:docMk/>
-            <pc:sldMk cId="687017097" sldId="256"/>
-            <ac:spMk id="14" creationId="{05BCAF62-D4BF-460D-8135-96EB901E9318}"/>
-          </ac:spMkLst>
-        </pc:spChg>
-        <pc:grpChg chg="del">
-          <ac:chgData name="성욱 진" userId="f47a80d7871cb125" providerId="LiveId" clId="{FDCBA572-350E-4C39-BF59-3626AC33FF79}" dt="2026-03-19T05:51:26.562" v="5" actId="478"/>
-          <ac:grpSpMkLst>
-            <pc:docMk/>
-            <pc:sldMk cId="687017097" sldId="256"/>
-            <ac:grpSpMk id="15" creationId="{7ED67502-7674-4AEC-9490-BE720DDDB019}"/>
-          </ac:grpSpMkLst>
-        </pc:grpChg>
-      </pc:sldChg>
-      <pc:sldChg chg="del">
-        <pc:chgData name="성욱 진" userId="f47a80d7871cb125" providerId="LiveId" clId="{FDCBA572-350E-4C39-BF59-3626AC33FF79}" dt="2026-03-19T05:51:37.410" v="6" actId="47"/>
-        <pc:sldMkLst>
-          <pc:docMk/>
-          <pc:sldMk cId="368021184" sldId="257"/>
-        </pc:sldMkLst>
-      </pc:sldChg>
-      <pc:sldChg chg="del">
-        <pc:chgData name="성욱 진" userId="f47a80d7871cb125" providerId="LiveId" clId="{FDCBA572-350E-4C39-BF59-3626AC33FF79}" dt="2026-03-19T05:56:01.480" v="7" actId="47"/>
-        <pc:sldMkLst>
-          <pc:docMk/>
-          <pc:sldMk cId="3501440110" sldId="260"/>
-        </pc:sldMkLst>
-      </pc:sldChg>
-      <pc:sldChg chg="del">
-        <pc:chgData name="성욱 진" userId="f47a80d7871cb125" providerId="LiveId" clId="{FDCBA572-350E-4C39-BF59-3626AC33FF79}" dt="2026-03-19T05:56:01.480" v="7" actId="47"/>
-        <pc:sldMkLst>
-          <pc:docMk/>
-          <pc:sldMk cId="2388758371" sldId="261"/>
-        </pc:sldMkLst>
-      </pc:sldChg>
-      <pc:sldChg chg="modSp mod">
-        <pc:chgData name="성욱 진" userId="f47a80d7871cb125" providerId="LiveId" clId="{FDCBA572-350E-4C39-BF59-3626AC33FF79}" dt="2026-03-19T06:11:21.834" v="14" actId="1076"/>
-        <pc:sldMkLst>
-          <pc:docMk/>
-          <pc:sldMk cId="3375138932" sldId="263"/>
-        </pc:sldMkLst>
-        <pc:spChg chg="mod">
-          <ac:chgData name="성욱 진" userId="f47a80d7871cb125" providerId="LiveId" clId="{FDCBA572-350E-4C39-BF59-3626AC33FF79}" dt="2026-03-19T06:11:18.017" v="13" actId="1076"/>
-          <ac:spMkLst>
-            <pc:docMk/>
-            <pc:sldMk cId="3375138932" sldId="263"/>
-            <ac:spMk id="27" creationId="{63224FB8-B737-D457-16C7-5E3F5EA31015}"/>
-          </ac:spMkLst>
-        </pc:spChg>
-        <pc:spChg chg="mod">
-          <ac:chgData name="성욱 진" userId="f47a80d7871cb125" providerId="LiveId" clId="{FDCBA572-350E-4C39-BF59-3626AC33FF79}" dt="2026-03-19T06:11:10.769" v="12" actId="1076"/>
-          <ac:spMkLst>
-            <pc:docMk/>
-            <pc:sldMk cId="3375138932" sldId="263"/>
-            <ac:spMk id="28" creationId="{AA880690-1BC0-75FB-D97C-DC20EAD83AB4}"/>
-          </ac:spMkLst>
-        </pc:spChg>
-        <pc:spChg chg="mod">
-          <ac:chgData name="성욱 진" userId="f47a80d7871cb125" providerId="LiveId" clId="{FDCBA572-350E-4C39-BF59-3626AC33FF79}" dt="2026-03-19T06:11:21.834" v="14" actId="1076"/>
-          <ac:spMkLst>
-            <pc:docMk/>
-            <pc:sldMk cId="3375138932" sldId="263"/>
-            <ac:spMk id="36" creationId="{41FC2CE6-0C48-AA3D-4ACC-D73CC76E3FEB}"/>
-          </ac:spMkLst>
-        </pc:spChg>
-        <pc:spChg chg="mod">
-          <ac:chgData name="성욱 진" userId="f47a80d7871cb125" providerId="LiveId" clId="{FDCBA572-350E-4C39-BF59-3626AC33FF79}" dt="2026-03-19T06:10:58.659" v="11" actId="1076"/>
-          <ac:spMkLst>
-            <pc:docMk/>
-            <pc:sldMk cId="3375138932" sldId="263"/>
-            <ac:spMk id="39" creationId="{520B2A62-ABC5-C062-1DE5-7021749E2F18}"/>
-          </ac:spMkLst>
-        </pc:spChg>
-      </pc:sldChg>
-      <pc:sldChg chg="del mod modShow">
-        <pc:chgData name="성욱 진" userId="f47a80d7871cb125" providerId="LiveId" clId="{FDCBA572-350E-4C39-BF59-3626AC33FF79}" dt="2026-03-19T05:56:01.480" v="7" actId="47"/>
-        <pc:sldMkLst>
-          <pc:docMk/>
-          <pc:sldMk cId="2289482787" sldId="267"/>
-        </pc:sldMkLst>
-      </pc:sldChg>
-    </pc:docChg>
-  </pc:docChgLst>
-</pc:chgInfo>
 </file>
 
 <file path=ppt/slideLayouts/slideLayout1.xml><?xml version="1.0" encoding="utf-8"?>
@@ -3295,10 +3159,10 @@
       </p:grpSpPr>
       <p:sp>
         <p:nvSpPr>
-          <p:cNvPr id="9" name="제목 1">
-            <a:extLst>
-              <a:ext uri="{FF2B5EF4-FFF2-40B4-BE49-F238E27FC236}">
-                <a16:creationId xmlns:a16="http://schemas.microsoft.com/office/drawing/2014/main" id="{615DEF0C-95EF-467E-B7EF-6245093BD5CB}"/>
+          <p:cNvPr id="14" name="제목 1">
+            <a:extLst>
+              <a:ext uri="{FF2B5EF4-FFF2-40B4-BE49-F238E27FC236}">
+                <a16:creationId xmlns:a16="http://schemas.microsoft.com/office/drawing/2014/main" id="{05BCAF62-D4BF-460D-8135-96EB901E9318}"/>
               </a:ext>
             </a:extLst>
           </p:cNvPr>
@@ -3309,8 +3173,174 @@
         </p:nvSpPr>
         <p:spPr>
           <a:xfrm>
-            <a:off x="3596342" y="3429000"/>
-            <a:ext cx="4999315" cy="413931"/>
+            <a:off x="3517179" y="4890134"/>
+            <a:ext cx="5157642" cy="1133269"/>
+          </a:xfrm>
+          <a:prstGeom prst="rect">
+            <a:avLst/>
+          </a:prstGeom>
+        </p:spPr>
+        <p:txBody>
+          <a:bodyPr vert="horz" lIns="91440" tIns="45720" rIns="91440" bIns="45720" rtlCol="0" anchor="ctr">
+            <a:noAutofit/>
+          </a:bodyPr>
+          <a:lstStyle>
+            <a:lvl1pPr algn="l" defTabSz="914400" rtl="0" eaLnBrk="1" latinLnBrk="1" hangingPunct="1">
+              <a:lnSpc>
+                <a:spcPct val="90000"/>
+              </a:lnSpc>
+              <a:spcBef>
+                <a:spcPct val="0"/>
+              </a:spcBef>
+              <a:buNone/>
+              <a:defRPr sz="4400" kern="1200">
+                <a:solidFill>
+                  <a:schemeClr val="tx1"/>
+                </a:solidFill>
+                <a:latin typeface="+mj-lt"/>
+                <a:ea typeface="+mj-ea"/>
+                <a:cs typeface="+mj-cs"/>
+              </a:defRPr>
+            </a:lvl1pPr>
+          </a:lstStyle>
+          <a:p>
+            <a:pPr algn="ctr"/>
+            <a:r>
+              <a:rPr lang="ko-KR" altLang="en-US" sz="2400" dirty="0">
+                <a:latin typeface="a시월구일3" panose="02020600000000000000" pitchFamily="18" charset="-127"/>
+                <a:ea typeface="a시월구일3" panose="02020600000000000000" pitchFamily="18" charset="-127"/>
+              </a:rPr>
+              <a:t>생성형 </a:t>
+            </a:r>
+            <a:r>
+              <a:rPr lang="en-US" altLang="ko-KR" sz="2400" dirty="0">
+                <a:latin typeface="a시월구일3" panose="02020600000000000000" pitchFamily="18" charset="-127"/>
+                <a:ea typeface="a시월구일3" panose="02020600000000000000" pitchFamily="18" charset="-127"/>
+              </a:rPr>
+              <a:t>AI </a:t>
+            </a:r>
+            <a:r>
+              <a:rPr lang="ko-KR" altLang="en-US" sz="2400" dirty="0">
+                <a:latin typeface="a시월구일3" panose="02020600000000000000" pitchFamily="18" charset="-127"/>
+                <a:ea typeface="a시월구일3" panose="02020600000000000000" pitchFamily="18" charset="-127"/>
+              </a:rPr>
+              <a:t>개발자 양성과정 </a:t>
+            </a:r>
+            <a:r>
+              <a:rPr lang="en-US" altLang="ko-KR" sz="2400" dirty="0">
+                <a:latin typeface="a시월구일3" panose="02020600000000000000" pitchFamily="18" charset="-127"/>
+                <a:ea typeface="a시월구일3" panose="02020600000000000000" pitchFamily="18" charset="-127"/>
+              </a:rPr>
+              <a:t>| </a:t>
+            </a:r>
+            <a:r>
+              <a:rPr lang="ko-KR" altLang="en-US" sz="2400" dirty="0" err="1">
+                <a:latin typeface="a시월구일3" panose="02020600000000000000" pitchFamily="18" charset="-127"/>
+                <a:ea typeface="a시월구일3" panose="02020600000000000000" pitchFamily="18" charset="-127"/>
+              </a:rPr>
+              <a:t>진성욱</a:t>
+            </a:r>
+            <a:endParaRPr lang="ko-KR" altLang="en-US" sz="2400" dirty="0">
+              <a:latin typeface="a시월구일3" panose="02020600000000000000" pitchFamily="18" charset="-127"/>
+              <a:ea typeface="a시월구일3" panose="02020600000000000000" pitchFamily="18" charset="-127"/>
+            </a:endParaRPr>
+          </a:p>
+        </p:txBody>
+      </p:sp>
+      <p:sp>
+        <p:nvSpPr>
+          <p:cNvPr id="2" name="제목 1">
+            <a:extLst>
+              <a:ext uri="{FF2B5EF4-FFF2-40B4-BE49-F238E27FC236}">
+                <a16:creationId xmlns:a16="http://schemas.microsoft.com/office/drawing/2014/main" id="{D9342C96-386D-9C78-6D4B-C876C6E36523}"/>
+              </a:ext>
+            </a:extLst>
+          </p:cNvPr>
+          <p:cNvSpPr txBox="1">
+            <a:spLocks/>
+          </p:cNvSpPr>
+          <p:nvPr/>
+        </p:nvSpPr>
+        <p:spPr>
+          <a:xfrm>
+            <a:off x="816208" y="834597"/>
+            <a:ext cx="10559584" cy="1717828"/>
+          </a:xfrm>
+          <a:prstGeom prst="rect">
+            <a:avLst/>
+          </a:prstGeom>
+        </p:spPr>
+        <p:txBody>
+          <a:bodyPr vert="horz" lIns="91440" tIns="45720" rIns="91440" bIns="45720" rtlCol="0" anchor="b">
+            <a:noAutofit/>
+          </a:bodyPr>
+          <a:lstStyle>
+            <a:lvl1pPr algn="ctr" defTabSz="914400" rtl="0" eaLnBrk="1" latinLnBrk="1" hangingPunct="1">
+              <a:lnSpc>
+                <a:spcPct val="90000"/>
+              </a:lnSpc>
+              <a:spcBef>
+                <a:spcPct val="0"/>
+              </a:spcBef>
+              <a:buNone/>
+              <a:defRPr sz="6000" kern="1200">
+                <a:solidFill>
+                  <a:schemeClr val="tx1"/>
+                </a:solidFill>
+                <a:latin typeface="+mj-lt"/>
+                <a:ea typeface="+mj-ea"/>
+                <a:cs typeface="+mj-cs"/>
+              </a:defRPr>
+            </a:lvl1pPr>
+          </a:lstStyle>
+          <a:p>
+            <a:pPr>
+              <a:lnSpc>
+                <a:spcPct val="150000"/>
+              </a:lnSpc>
+            </a:pPr>
+            <a:r>
+              <a:rPr lang="ko-KR" altLang="en-US" sz="3600" spc="300" dirty="0">
+                <a:latin typeface="a시월구일4" panose="02020600000000000000" pitchFamily="18" charset="-127"/>
+                <a:ea typeface="a시월구일4" panose="02020600000000000000" pitchFamily="18" charset="-127"/>
+              </a:rPr>
+              <a:t>생성형 </a:t>
+            </a:r>
+            <a:r>
+              <a:rPr lang="en-US" altLang="ko-KR" sz="3600" spc="300" dirty="0">
+                <a:latin typeface="a시월구일4" panose="02020600000000000000" pitchFamily="18" charset="-127"/>
+                <a:ea typeface="a시월구일4" panose="02020600000000000000" pitchFamily="18" charset="-127"/>
+              </a:rPr>
+              <a:t>AI </a:t>
+            </a:r>
+            <a:r>
+              <a:rPr lang="ko-KR" altLang="en-US" sz="3600" spc="300" dirty="0">
+                <a:latin typeface="a시월구일4" panose="02020600000000000000" pitchFamily="18" charset="-127"/>
+                <a:ea typeface="a시월구일4" panose="02020600000000000000" pitchFamily="18" charset="-127"/>
+              </a:rPr>
+              <a:t>기반 자치구별 보건 취약 유형 분석 및 정책 지원 서비스</a:t>
+            </a:r>
+          </a:p>
+        </p:txBody>
+      </p:sp>
+      <p:sp>
+        <p:nvSpPr>
+          <p:cNvPr id="3" name="제목 1">
+            <a:extLst>
+              <a:ext uri="{FF2B5EF4-FFF2-40B4-BE49-F238E27FC236}">
+                <a16:creationId xmlns:a16="http://schemas.microsoft.com/office/drawing/2014/main" id="{F9EBE895-42F4-09C4-9D7A-062FBA1DE154}"/>
+              </a:ext>
+            </a:extLst>
+          </p:cNvPr>
+          <p:cNvSpPr txBox="1">
+            <a:spLocks/>
+          </p:cNvSpPr>
+          <p:nvPr/>
+        </p:nvSpPr>
+        <p:spPr>
+          <a:xfrm>
+            <a:off x="3517179" y="4460836"/>
+            <a:ext cx="5157642" cy="566635"/>
           </a:xfrm>
           <a:prstGeom prst="rect">
             <a:avLst/>
@@ -3340,233 +3370,17 @@
             </a:lvl1pPr>
           </a:lstStyle>
           <a:p>
-            <a:r>
-              <a:rPr lang="ko-KR" altLang="en-US" sz="2000" dirty="0" err="1">
-                <a:latin typeface="a시월구일1" panose="02020600000000000000" pitchFamily="18" charset="-127"/>
-                <a:ea typeface="a시월구일1" panose="02020600000000000000" pitchFamily="18" charset="-127"/>
-              </a:rPr>
-              <a:t>머신러닝</a:t>
-            </a:r>
-            <a:r>
-              <a:rPr lang="ko-KR" altLang="en-US" sz="2000" dirty="0">
-                <a:latin typeface="a시월구일1" panose="02020600000000000000" pitchFamily="18" charset="-127"/>
-                <a:ea typeface="a시월구일1" panose="02020600000000000000" pitchFamily="18" charset="-127"/>
-              </a:rPr>
-              <a:t> 기반 데이터 분석 및 군집화 모델</a:t>
-            </a:r>
-          </a:p>
-        </p:txBody>
-      </p:sp>
-      <p:sp>
-        <p:nvSpPr>
-          <p:cNvPr id="14" name="제목 1">
-            <a:extLst>
-              <a:ext uri="{FF2B5EF4-FFF2-40B4-BE49-F238E27FC236}">
-                <a16:creationId xmlns:a16="http://schemas.microsoft.com/office/drawing/2014/main" id="{05BCAF62-D4BF-460D-8135-96EB901E9318}"/>
-              </a:ext>
-            </a:extLst>
-          </p:cNvPr>
-          <p:cNvSpPr txBox="1">
-            <a:spLocks/>
-          </p:cNvSpPr>
-          <p:nvPr/>
-        </p:nvSpPr>
-        <p:spPr>
-          <a:xfrm>
-            <a:off x="4205142" y="4890134"/>
-            <a:ext cx="3924300" cy="413931"/>
-          </a:xfrm>
-          <a:prstGeom prst="rect">
-            <a:avLst/>
-          </a:prstGeom>
-        </p:spPr>
-        <p:txBody>
-          <a:bodyPr vert="horz" lIns="91440" tIns="45720" rIns="91440" bIns="45720" rtlCol="0" anchor="ctr">
-            <a:normAutofit/>
-          </a:bodyPr>
-          <a:lstStyle>
-            <a:lvl1pPr algn="l" defTabSz="914400" rtl="0" eaLnBrk="1" latinLnBrk="1" hangingPunct="1">
-              <a:lnSpc>
-                <a:spcPct val="90000"/>
-              </a:lnSpc>
-              <a:spcBef>
-                <a:spcPct val="0"/>
-              </a:spcBef>
-              <a:buNone/>
-              <a:defRPr sz="4400" kern="1200">
-                <a:solidFill>
-                  <a:schemeClr val="tx1"/>
-                </a:solidFill>
-                <a:latin typeface="+mj-lt"/>
-                <a:ea typeface="+mj-ea"/>
-                <a:cs typeface="+mj-cs"/>
-              </a:defRPr>
-            </a:lvl1pPr>
-          </a:lstStyle>
-          <a:p>
             <a:pPr algn="ctr"/>
             <a:r>
-              <a:rPr lang="ko-KR" altLang="en-US" sz="1600" dirty="0">
-                <a:latin typeface="a시월구일1" panose="02020600000000000000" pitchFamily="18" charset="-127"/>
-                <a:ea typeface="a시월구일1" panose="02020600000000000000" pitchFamily="18" charset="-127"/>
-              </a:rPr>
-              <a:t>생성형 </a:t>
-            </a:r>
-            <a:r>
-              <a:rPr lang="en-US" altLang="ko-KR" sz="1600" dirty="0">
-                <a:latin typeface="a시월구일1" panose="02020600000000000000" pitchFamily="18" charset="-127"/>
-                <a:ea typeface="a시월구일1" panose="02020600000000000000" pitchFamily="18" charset="-127"/>
-              </a:rPr>
-              <a:t>AI </a:t>
-            </a:r>
-            <a:r>
-              <a:rPr lang="ko-KR" altLang="en-US" sz="1600" dirty="0">
-                <a:latin typeface="a시월구일1" panose="02020600000000000000" pitchFamily="18" charset="-127"/>
-                <a:ea typeface="a시월구일1" panose="02020600000000000000" pitchFamily="18" charset="-127"/>
-              </a:rPr>
-              <a:t>개발자 양성과정 </a:t>
-            </a:r>
-            <a:r>
-              <a:rPr lang="en-US" altLang="ko-KR" sz="1600" dirty="0">
-                <a:latin typeface="a시월구일1" panose="02020600000000000000" pitchFamily="18" charset="-127"/>
-                <a:ea typeface="a시월구일1" panose="02020600000000000000" pitchFamily="18" charset="-127"/>
-              </a:rPr>
-              <a:t>| </a:t>
-            </a:r>
-            <a:r>
-              <a:rPr lang="ko-KR" altLang="en-US" sz="1600" dirty="0" err="1">
-                <a:latin typeface="a시월구일1" panose="02020600000000000000" pitchFamily="18" charset="-127"/>
-                <a:ea typeface="a시월구일1" panose="02020600000000000000" pitchFamily="18" charset="-127"/>
-              </a:rPr>
-              <a:t>진성욱</a:t>
-            </a:r>
-            <a:endParaRPr lang="ko-KR" altLang="en-US" sz="1600" dirty="0">
-              <a:latin typeface="a시월구일1" panose="02020600000000000000" pitchFamily="18" charset="-127"/>
-              <a:ea typeface="a시월구일1" panose="02020600000000000000" pitchFamily="18" charset="-127"/>
-            </a:endParaRPr>
-          </a:p>
-        </p:txBody>
-      </p:sp>
-      <p:sp>
-        <p:nvSpPr>
-          <p:cNvPr id="2" name="제목 1">
-            <a:extLst>
-              <a:ext uri="{FF2B5EF4-FFF2-40B4-BE49-F238E27FC236}">
-                <a16:creationId xmlns:a16="http://schemas.microsoft.com/office/drawing/2014/main" id="{D9342C96-386D-9C78-6D4B-C876C6E36523}"/>
-              </a:ext>
-            </a:extLst>
-          </p:cNvPr>
-          <p:cNvSpPr txBox="1">
-            <a:spLocks/>
-          </p:cNvSpPr>
-          <p:nvPr/>
-        </p:nvSpPr>
-        <p:spPr>
-          <a:xfrm>
-            <a:off x="1508090" y="1315861"/>
-            <a:ext cx="9175820" cy="1717828"/>
-          </a:xfrm>
-          <a:prstGeom prst="rect">
-            <a:avLst/>
-          </a:prstGeom>
-        </p:spPr>
-        <p:txBody>
-          <a:bodyPr vert="horz" lIns="91440" tIns="45720" rIns="91440" bIns="45720" rtlCol="0" anchor="b">
-            <a:noAutofit/>
-          </a:bodyPr>
-          <a:lstStyle>
-            <a:lvl1pPr algn="ctr" defTabSz="914400" rtl="0" eaLnBrk="1" latinLnBrk="1" hangingPunct="1">
-              <a:lnSpc>
-                <a:spcPct val="90000"/>
-              </a:lnSpc>
-              <a:spcBef>
-                <a:spcPct val="0"/>
-              </a:spcBef>
-              <a:buNone/>
-              <a:defRPr sz="6000" kern="1200">
-                <a:solidFill>
-                  <a:schemeClr val="tx1"/>
-                </a:solidFill>
-                <a:latin typeface="+mj-lt"/>
-                <a:ea typeface="+mj-ea"/>
-                <a:cs typeface="+mj-cs"/>
-              </a:defRPr>
-            </a:lvl1pPr>
-          </a:lstStyle>
-          <a:p>
-            <a:pPr>
-              <a:lnSpc>
-                <a:spcPct val="150000"/>
-              </a:lnSpc>
-            </a:pPr>
-            <a:r>
-              <a:rPr lang="ko-KR" altLang="en-US" sz="3600" spc="300" dirty="0">
+              <a:rPr lang="en-US" altLang="ko-KR" sz="2400" dirty="0">
                 <a:latin typeface="a시월구일3" panose="02020600000000000000" pitchFamily="18" charset="-127"/>
                 <a:ea typeface="a시월구일3" panose="02020600000000000000" pitchFamily="18" charset="-127"/>
               </a:rPr>
-              <a:t>서울시 자치구 보건 취약 유형 분석 및 정책 지원 시스템 개발</a:t>
-            </a:r>
-          </a:p>
-        </p:txBody>
-      </p:sp>
-      <p:sp>
-        <p:nvSpPr>
-          <p:cNvPr id="3" name="제목 1">
-            <a:extLst>
-              <a:ext uri="{FF2B5EF4-FFF2-40B4-BE49-F238E27FC236}">
-                <a16:creationId xmlns:a16="http://schemas.microsoft.com/office/drawing/2014/main" id="{F9EBE895-42F4-09C4-9D7A-062FBA1DE154}"/>
-              </a:ext>
-            </a:extLst>
-          </p:cNvPr>
-          <p:cNvSpPr txBox="1">
-            <a:spLocks/>
-          </p:cNvSpPr>
-          <p:nvPr/>
-        </p:nvSpPr>
-        <p:spPr>
-          <a:xfrm>
-            <a:off x="4205142" y="4476203"/>
-            <a:ext cx="3924300" cy="413931"/>
-          </a:xfrm>
-          <a:prstGeom prst="rect">
-            <a:avLst/>
-          </a:prstGeom>
-        </p:spPr>
-        <p:txBody>
-          <a:bodyPr vert="horz" lIns="91440" tIns="45720" rIns="91440" bIns="45720" rtlCol="0" anchor="ctr">
-            <a:normAutofit/>
-          </a:bodyPr>
-          <a:lstStyle>
-            <a:lvl1pPr algn="l" defTabSz="914400" rtl="0" eaLnBrk="1" latinLnBrk="1" hangingPunct="1">
-              <a:lnSpc>
-                <a:spcPct val="90000"/>
-              </a:lnSpc>
-              <a:spcBef>
-                <a:spcPct val="0"/>
-              </a:spcBef>
-              <a:buNone/>
-              <a:defRPr sz="4400" kern="1200">
-                <a:solidFill>
-                  <a:schemeClr val="tx1"/>
-                </a:solidFill>
-                <a:latin typeface="+mj-lt"/>
-                <a:ea typeface="+mj-ea"/>
-                <a:cs typeface="+mj-cs"/>
-              </a:defRPr>
-            </a:lvl1pPr>
-          </a:lstStyle>
-          <a:p>
-            <a:pPr algn="ctr"/>
-            <a:r>
-              <a:rPr lang="en-US" altLang="ko-KR" sz="1600" b="1" dirty="0">
-                <a:latin typeface="a시월구일1" panose="02020600000000000000" pitchFamily="18" charset="-127"/>
-                <a:ea typeface="a시월구일1" panose="02020600000000000000" pitchFamily="18" charset="-127"/>
-              </a:rPr>
-              <a:t>2026.03.19</a:t>
-            </a:r>
-            <a:endParaRPr lang="ko-KR" altLang="en-US" sz="1600" b="1" dirty="0">
-              <a:latin typeface="a시월구일1" panose="02020600000000000000" pitchFamily="18" charset="-127"/>
-              <a:ea typeface="a시월구일1" panose="02020600000000000000" pitchFamily="18" charset="-127"/>
+              <a:t>2026.03.24</a:t>
+            </a:r>
+            <a:endParaRPr lang="ko-KR" altLang="en-US" sz="2400" dirty="0">
+              <a:latin typeface="a시월구일3" panose="02020600000000000000" pitchFamily="18" charset="-127"/>
+              <a:ea typeface="a시월구일3" panose="02020600000000000000" pitchFamily="18" charset="-127"/>
             </a:endParaRPr>
           </a:p>
         </p:txBody>
@@ -3622,7 +3436,7 @@
         <p:spPr>
           <a:xfrm>
             <a:off x="516749" y="379988"/>
-            <a:ext cx="2266646" cy="489365"/>
+            <a:ext cx="2192908" cy="489365"/>
           </a:xfrm>
           <a:prstGeom prst="rect">
             <a:avLst/>
@@ -3654,7 +3468,7 @@
                 <a:ea typeface="a시월구일3" panose="02020600000000000000" pitchFamily="18" charset="-127"/>
                 <a:cs typeface="+mj-cs"/>
               </a:rPr>
-              <a:t>개발 의도</a:t>
+              <a:t>기획 의도</a:t>
             </a:r>
             <a:r>
               <a:rPr lang="en-US" altLang="ko-KR" dirty="0">
@@ -4237,49 +4051,6 @@
           <a:chExt cx="0" cy="0"/>
         </a:xfrm>
       </p:grpSpPr>
-      <p:pic>
-        <p:nvPicPr>
-          <p:cNvPr id="18" name="그림 17">
-            <a:extLst>
-              <a:ext uri="{FF2B5EF4-FFF2-40B4-BE49-F238E27FC236}">
-                <a16:creationId xmlns:a16="http://schemas.microsoft.com/office/drawing/2014/main" id="{E90BC241-2770-08CD-B3EC-45915D980DBB}"/>
-              </a:ext>
-            </a:extLst>
-          </p:cNvPr>
-          <p:cNvPicPr>
-            <a:picLocks noChangeAspect="1"/>
-          </p:cNvPicPr>
-          <p:nvPr/>
-        </p:nvPicPr>
-        <p:blipFill>
-          <a:blip r:embed="rId2">
-            <a:duotone>
-              <a:prstClr val="black"/>
-              <a:schemeClr val="accent3">
-                <a:tint val="45000"/>
-                <a:satMod val="400000"/>
-              </a:schemeClr>
-            </a:duotone>
-            <a:extLst>
-              <a:ext uri="{28A0092B-C50C-407E-A947-70E740481C1C}">
-                <a14:useLocalDpi xmlns:a14="http://schemas.microsoft.com/office/drawing/2010/main" val="0"/>
-              </a:ext>
-            </a:extLst>
-          </a:blip>
-          <a:stretch>
-            <a:fillRect/>
-          </a:stretch>
-        </p:blipFill>
-        <p:spPr>
-          <a:xfrm rot="5400000">
-            <a:off x="3632644" y="3122747"/>
-            <a:ext cx="4336782" cy="1982879"/>
-          </a:xfrm>
-          <a:prstGeom prst="rect">
-            <a:avLst/>
-          </a:prstGeom>
-        </p:spPr>
-      </p:pic>
       <p:sp>
         <p:nvSpPr>
           <p:cNvPr id="33" name="TextBox 32">
@@ -4295,7 +4066,7 @@
         <p:spPr>
           <a:xfrm>
             <a:off x="516749" y="379988"/>
-            <a:ext cx="2205732" cy="489365"/>
+            <a:ext cx="2292294" cy="489365"/>
           </a:xfrm>
           <a:prstGeom prst="rect">
             <a:avLst/>
@@ -4327,7 +4098,7 @@
                 <a:ea typeface="a시월구일3" panose="02020600000000000000" pitchFamily="18" charset="-127"/>
                 <a:cs typeface="+mj-cs"/>
               </a:rPr>
-              <a:t>개발의도</a:t>
+              <a:t>기획 의도</a:t>
             </a:r>
             <a:r>
               <a:rPr lang="en-US" altLang="ko-KR" sz="2000" dirty="0">
@@ -4347,10 +4118,10 @@
       </p:sp>
       <p:sp>
         <p:nvSpPr>
-          <p:cNvPr id="46" name="순서도: 병합 45">
-            <a:extLst>
-              <a:ext uri="{FF2B5EF4-FFF2-40B4-BE49-F238E27FC236}">
-                <a16:creationId xmlns:a16="http://schemas.microsoft.com/office/drawing/2014/main" id="{5D765520-A078-89DB-D504-2018796C7F6D}"/>
+          <p:cNvPr id="92" name="사각형: 둥근 모서리 91">
+            <a:extLst>
+              <a:ext uri="{FF2B5EF4-FFF2-40B4-BE49-F238E27FC236}">
+                <a16:creationId xmlns:a16="http://schemas.microsoft.com/office/drawing/2014/main" id="{B9FA1556-5324-C635-0515-B3C06AA449F2}"/>
               </a:ext>
             </a:extLst>
           </p:cNvPr>
@@ -4359,18 +4130,15 @@
         </p:nvSpPr>
         <p:spPr>
           <a:xfrm>
-            <a:off x="2923772" y="4099806"/>
-            <a:ext cx="453600" cy="216000"/>
+            <a:off x="2000478" y="5405481"/>
+            <a:ext cx="8294989" cy="1204782"/>
           </a:xfrm>
-          <a:prstGeom prst="flowChartMerge">
-            <a:avLst/>
+          <a:prstGeom prst="roundRect">
+            <a:avLst>
+              <a:gd name="adj" fmla="val 9116"/>
+            </a:avLst>
           </a:prstGeom>
-          <a:solidFill>
-            <a:schemeClr val="tx1">
-              <a:lumMod val="50000"/>
-              <a:lumOff val="50000"/>
-            </a:schemeClr>
-          </a:solidFill>
+          <a:noFill/>
           <a:ln>
             <a:noFill/>
           </a:ln>
@@ -4395,64 +4163,6 @@
           <a:bodyPr rtlCol="0" anchor="ctr"/>
           <a:lstStyle/>
           <a:p>
-            <a:pPr algn="ctr"/>
-            <a:endParaRPr lang="ko-KR" altLang="en-US"/>
-          </a:p>
-        </p:txBody>
-      </p:sp>
-      <p:sp>
-        <p:nvSpPr>
-          <p:cNvPr id="92" name="사각형: 둥근 모서리 91">
-            <a:extLst>
-              <a:ext uri="{FF2B5EF4-FFF2-40B4-BE49-F238E27FC236}">
-                <a16:creationId xmlns:a16="http://schemas.microsoft.com/office/drawing/2014/main" id="{B9FA1556-5324-C635-0515-B3C06AA449F2}"/>
-              </a:ext>
-            </a:extLst>
-          </p:cNvPr>
-          <p:cNvSpPr/>
-          <p:nvPr/>
-        </p:nvSpPr>
-        <p:spPr>
-          <a:xfrm>
-            <a:off x="6865937" y="2666950"/>
-            <a:ext cx="5008077" cy="2865711"/>
-          </a:xfrm>
-          <a:prstGeom prst="roundRect">
-            <a:avLst>
-              <a:gd name="adj" fmla="val 9116"/>
-            </a:avLst>
-          </a:prstGeom>
-          <a:solidFill>
-            <a:schemeClr val="bg1"/>
-          </a:solidFill>
-          <a:ln>
-            <a:solidFill>
-              <a:schemeClr val="bg2">
-                <a:lumMod val="90000"/>
-              </a:schemeClr>
-            </a:solidFill>
-          </a:ln>
-        </p:spPr>
-        <p:style>
-          <a:lnRef idx="2">
-            <a:schemeClr val="accent1">
-              <a:shade val="15000"/>
-            </a:schemeClr>
-          </a:lnRef>
-          <a:fillRef idx="1">
-            <a:schemeClr val="accent1"/>
-          </a:fillRef>
-          <a:effectRef idx="0">
-            <a:schemeClr val="accent1"/>
-          </a:effectRef>
-          <a:fontRef idx="minor">
-            <a:schemeClr val="lt1"/>
-          </a:fontRef>
-        </p:style>
-        <p:txBody>
-          <a:bodyPr rtlCol="0" anchor="ctr"/>
-          <a:lstStyle/>
-          <a:p>
             <a:pPr algn="ctr">
               <a:lnSpc>
                 <a:spcPct val="150000"/>
@@ -4491,16 +4201,6 @@
               </a:rPr>
               <a:t> 및 </a:t>
             </a:r>
-            <a:br>
-              <a:rPr lang="ko-KR" altLang="en-US" sz="2400" dirty="0">
-                <a:solidFill>
-                  <a:schemeClr val="tx1"/>
-                </a:solidFill>
-                <a:latin typeface="a시월구일3" panose="02020600000000000000" pitchFamily="18" charset="-127"/>
-                <a:ea typeface="a시월구일3" panose="02020600000000000000" pitchFamily="18" charset="-127"/>
-                <a:cs typeface="+mj-cs"/>
-              </a:rPr>
-            </a:br>
             <a:r>
               <a:rPr lang="ko-KR" altLang="en-US" sz="2400" dirty="0">
                 <a:solidFill>
@@ -4510,107 +4210,17 @@
                 <a:ea typeface="a시월구일3" panose="02020600000000000000" pitchFamily="18" charset="-127"/>
                 <a:cs typeface="+mj-cs"/>
               </a:rPr>
-              <a:t>정책 의사결정 시스템 개발</a:t>
-            </a:r>
-          </a:p>
-        </p:txBody>
-      </p:sp>
-      <p:sp>
-        <p:nvSpPr>
-          <p:cNvPr id="3" name="TextBox 2">
-            <a:extLst>
-              <a:ext uri="{FF2B5EF4-FFF2-40B4-BE49-F238E27FC236}">
-                <a16:creationId xmlns:a16="http://schemas.microsoft.com/office/drawing/2014/main" id="{BFF83841-2299-B836-B60A-AB629BC5F828}"/>
-              </a:ext>
-            </a:extLst>
-          </p:cNvPr>
-          <p:cNvSpPr txBox="1"/>
-          <p:nvPr/>
-        </p:nvSpPr>
-        <p:spPr>
-          <a:xfrm>
-            <a:off x="1960491" y="1152685"/>
-            <a:ext cx="8271019" cy="433965"/>
-          </a:xfrm>
-          <a:prstGeom prst="rect">
-            <a:avLst/>
-          </a:prstGeom>
-          <a:noFill/>
-        </p:spPr>
-        <p:txBody>
-          <a:bodyPr wrap="square" lIns="0" tIns="0" rIns="0" bIns="0" rtlCol="0" anchor="t">
-            <a:spAutoFit/>
-          </a:bodyPr>
-          <a:lstStyle/>
-          <a:p>
-            <a:pPr>
-              <a:lnSpc>
-                <a:spcPct val="130000"/>
-              </a:lnSpc>
-            </a:pPr>
-            <a:r>
-              <a:rPr lang="en-US" altLang="ko-KR" dirty="0">
-                <a:latin typeface="a시월구일3" panose="02020600000000000000" pitchFamily="18" charset="-127"/>
-                <a:ea typeface="a시월구일3" panose="02020600000000000000" pitchFamily="18" charset="-127"/>
-                <a:cs typeface="+mj-cs"/>
-              </a:rPr>
-              <a:t>“</a:t>
-            </a:r>
-            <a:r>
-              <a:rPr lang="ko-KR" altLang="en-US" dirty="0">
-                <a:latin typeface="a시월구일3" panose="02020600000000000000" pitchFamily="18" charset="-127"/>
-                <a:ea typeface="a시월구일3" panose="02020600000000000000" pitchFamily="18" charset="-127"/>
-                <a:cs typeface="+mj-cs"/>
-              </a:rPr>
-              <a:t>미세먼지 농도 중심 정보는 </a:t>
-            </a:r>
-            <a:r>
-              <a:rPr lang="ko-KR" altLang="en-US" dirty="0">
-                <a:solidFill>
-                  <a:schemeClr val="accent1"/>
-                </a:solidFill>
-                <a:latin typeface="a시월구일3" panose="02020600000000000000" pitchFamily="18" charset="-127"/>
-                <a:ea typeface="a시월구일3" panose="02020600000000000000" pitchFamily="18" charset="-127"/>
-                <a:cs typeface="+mj-cs"/>
-              </a:rPr>
-              <a:t>실제 건강 위험도를 설명하기에</a:t>
-            </a:r>
-            <a:r>
-              <a:rPr lang="ko-KR" altLang="en-US" dirty="0">
-                <a:latin typeface="a시월구일3" panose="02020600000000000000" pitchFamily="18" charset="-127"/>
-                <a:ea typeface="a시월구일3" panose="02020600000000000000" pitchFamily="18" charset="-127"/>
-                <a:cs typeface="+mj-cs"/>
-              </a:rPr>
-              <a:t> </a:t>
-            </a:r>
-            <a:r>
-              <a:rPr lang="ko-KR" altLang="en-US" sz="2400" dirty="0">
-                <a:solidFill>
-                  <a:srgbClr val="FF0000"/>
-                </a:solidFill>
-                <a:latin typeface="a시월구일3" panose="02020600000000000000" pitchFamily="18" charset="-127"/>
-                <a:ea typeface="a시월구일3" panose="02020600000000000000" pitchFamily="18" charset="-127"/>
-                <a:cs typeface="+mj-cs"/>
-              </a:rPr>
-              <a:t>한계가 있음</a:t>
-            </a:r>
-            <a:r>
-              <a:rPr lang="en-US" altLang="ko-KR" dirty="0">
-                <a:latin typeface="a시월구일3" panose="02020600000000000000" pitchFamily="18" charset="-127"/>
-                <a:ea typeface="a시월구일3" panose="02020600000000000000" pitchFamily="18" charset="-127"/>
-                <a:cs typeface="+mj-cs"/>
-              </a:rPr>
-              <a:t>”</a:t>
+              <a:t>정책 지원 서비스 제공</a:t>
             </a:r>
           </a:p>
         </p:txBody>
       </p:sp>
       <p:grpSp>
         <p:nvGrpSpPr>
-          <p:cNvPr id="19" name="그룹 18">
-            <a:extLst>
-              <a:ext uri="{FF2B5EF4-FFF2-40B4-BE49-F238E27FC236}">
-                <a16:creationId xmlns:a16="http://schemas.microsoft.com/office/drawing/2014/main" id="{50D415C0-B408-AED7-BEB6-63F7F98B2DFC}"/>
+          <p:cNvPr id="37" name="그룹 36">
+            <a:extLst>
+              <a:ext uri="{FF2B5EF4-FFF2-40B4-BE49-F238E27FC236}">
+                <a16:creationId xmlns:a16="http://schemas.microsoft.com/office/drawing/2014/main" id="{A41B1EE0-F7E9-9CD2-A4CC-270043739B70}"/>
               </a:ext>
             </a:extLst>
           </p:cNvPr>
@@ -4619,18 +4229,163 @@
         </p:nvGrpSpPr>
         <p:grpSpPr>
           <a:xfrm>
-            <a:off x="317986" y="1796851"/>
-            <a:ext cx="5169527" cy="1396375"/>
-            <a:chOff x="317986" y="1667315"/>
-            <a:chExt cx="5169527" cy="1396375"/>
+            <a:off x="774256" y="1143290"/>
+            <a:ext cx="10643488" cy="1790927"/>
+            <a:chOff x="357021" y="1239884"/>
+            <a:chExt cx="10967281" cy="1845410"/>
           </a:xfrm>
         </p:grpSpPr>
+        <p:pic>
+          <p:nvPicPr>
+            <p:cNvPr id="27" name="그림 26">
+              <a:extLst>
+                <a:ext uri="{FF2B5EF4-FFF2-40B4-BE49-F238E27FC236}">
+                  <a16:creationId xmlns:a16="http://schemas.microsoft.com/office/drawing/2014/main" id="{EFAE2A4D-EA72-669B-E97F-C60BBDE44B52}"/>
+                </a:ext>
+              </a:extLst>
+            </p:cNvPr>
+            <p:cNvPicPr>
+              <a:picLocks noChangeAspect="1"/>
+            </p:cNvPicPr>
+            <p:nvPr/>
+          </p:nvPicPr>
+          <p:blipFill>
+            <a:blip r:embed="rId2">
+              <a:duotone>
+                <a:schemeClr val="bg2">
+                  <a:shade val="45000"/>
+                  <a:satMod val="135000"/>
+                </a:schemeClr>
+                <a:prstClr val="white"/>
+              </a:duotone>
+              <a:extLst>
+                <a:ext uri="{28A0092B-C50C-407E-A947-70E740481C1C}">
+                  <a14:useLocalDpi xmlns:a14="http://schemas.microsoft.com/office/drawing/2010/main" val="0"/>
+                </a:ext>
+              </a:extLst>
+            </a:blip>
+            <a:stretch>
+              <a:fillRect/>
+            </a:stretch>
+          </p:blipFill>
+          <p:spPr>
+            <a:xfrm rot="5400000">
+              <a:off x="4710489" y="1612908"/>
+              <a:ext cx="1845410" cy="1099362"/>
+            </a:xfrm>
+            <a:prstGeom prst="rect">
+              <a:avLst/>
+            </a:prstGeom>
+          </p:spPr>
+        </p:pic>
+        <p:sp>
+          <p:nvSpPr>
+            <p:cNvPr id="3" name="TextBox 2">
+              <a:extLst>
+                <a:ext uri="{FF2B5EF4-FFF2-40B4-BE49-F238E27FC236}">
+                  <a16:creationId xmlns:a16="http://schemas.microsoft.com/office/drawing/2014/main" id="{BFF83841-2299-B836-B60A-AB629BC5F828}"/>
+                </a:ext>
+              </a:extLst>
+            </p:cNvPr>
+            <p:cNvSpPr txBox="1"/>
+            <p:nvPr/>
+          </p:nvSpPr>
+          <p:spPr>
+            <a:xfrm>
+              <a:off x="6316225" y="1765557"/>
+              <a:ext cx="5008077" cy="794064"/>
+            </a:xfrm>
+            <a:prstGeom prst="rect">
+              <a:avLst/>
+            </a:prstGeom>
+            <a:noFill/>
+          </p:spPr>
+          <p:txBody>
+            <a:bodyPr wrap="square" lIns="0" tIns="0" rIns="0" bIns="0" rtlCol="0" anchor="t">
+              <a:spAutoFit/>
+            </a:bodyPr>
+            <a:lstStyle/>
+            <a:p>
+              <a:pPr algn="ctr">
+                <a:lnSpc>
+                  <a:spcPct val="130000"/>
+                </a:lnSpc>
+              </a:pPr>
+              <a:r>
+                <a:rPr lang="en-US" altLang="ko-KR" dirty="0">
+                  <a:latin typeface="a시월구일3" panose="02020600000000000000" pitchFamily="18" charset="-127"/>
+                  <a:ea typeface="a시월구일3" panose="02020600000000000000" pitchFamily="18" charset="-127"/>
+                  <a:cs typeface="+mj-cs"/>
+                </a:rPr>
+                <a:t>“</a:t>
+              </a:r>
+              <a:r>
+                <a:rPr lang="ko-KR" altLang="en-US" dirty="0">
+                  <a:latin typeface="a시월구일3" panose="02020600000000000000" pitchFamily="18" charset="-127"/>
+                  <a:ea typeface="a시월구일3" panose="02020600000000000000" pitchFamily="18" charset="-127"/>
+                  <a:cs typeface="+mj-cs"/>
+                </a:rPr>
+                <a:t>미세먼지 농도 중심 정보는 </a:t>
+              </a:r>
+              <a:endParaRPr lang="en-US" altLang="ko-KR" dirty="0">
+                <a:latin typeface="a시월구일3" panose="02020600000000000000" pitchFamily="18" charset="-127"/>
+                <a:ea typeface="a시월구일3" panose="02020600000000000000" pitchFamily="18" charset="-127"/>
+                <a:cs typeface="+mj-cs"/>
+              </a:endParaRPr>
+            </a:p>
+            <a:p>
+              <a:pPr algn="ctr">
+                <a:lnSpc>
+                  <a:spcPct val="130000"/>
+                </a:lnSpc>
+              </a:pPr>
+              <a:r>
+                <a:rPr lang="ko-KR" altLang="en-US" dirty="0">
+                  <a:solidFill>
+                    <a:schemeClr val="accent1"/>
+                  </a:solidFill>
+                  <a:latin typeface="a시월구일3" panose="02020600000000000000" pitchFamily="18" charset="-127"/>
+                  <a:ea typeface="a시월구일3" panose="02020600000000000000" pitchFamily="18" charset="-127"/>
+                  <a:cs typeface="+mj-cs"/>
+                </a:rPr>
+                <a:t>실제 건강 위험도를 설명하기에</a:t>
+              </a:r>
+              <a:r>
+                <a:rPr lang="ko-KR" altLang="en-US" dirty="0">
+                  <a:latin typeface="a시월구일3" panose="02020600000000000000" pitchFamily="18" charset="-127"/>
+                  <a:ea typeface="a시월구일3" panose="02020600000000000000" pitchFamily="18" charset="-127"/>
+                  <a:cs typeface="+mj-cs"/>
+                </a:rPr>
+                <a:t> </a:t>
+              </a:r>
+              <a:r>
+                <a:rPr lang="ko-KR" altLang="en-US" sz="2400" dirty="0">
+                  <a:solidFill>
+                    <a:srgbClr val="FF0000"/>
+                  </a:solidFill>
+                  <a:latin typeface="a시월구일3" panose="02020600000000000000" pitchFamily="18" charset="-127"/>
+                  <a:ea typeface="a시월구일3" panose="02020600000000000000" pitchFamily="18" charset="-127"/>
+                  <a:cs typeface="+mj-cs"/>
+                </a:rPr>
+                <a:t>한계가 있음</a:t>
+              </a:r>
+              <a:r>
+                <a:rPr lang="en-US" altLang="ko-KR" dirty="0">
+                  <a:latin typeface="a시월구일3" panose="02020600000000000000" pitchFamily="18" charset="-127"/>
+                  <a:ea typeface="a시월구일3" panose="02020600000000000000" pitchFamily="18" charset="-127"/>
+                  <a:cs typeface="+mj-cs"/>
+                </a:rPr>
+                <a:t>”</a:t>
+              </a:r>
+            </a:p>
+          </p:txBody>
+        </p:sp>
         <p:grpSp>
           <p:nvGrpSpPr>
-            <p:cNvPr id="101" name="그룹 100">
+            <p:cNvPr id="36" name="그룹 35">
               <a:extLst>
                 <a:ext uri="{FF2B5EF4-FFF2-40B4-BE49-F238E27FC236}">
-                  <a16:creationId xmlns:a16="http://schemas.microsoft.com/office/drawing/2014/main" id="{B41C2D7F-CFF2-5282-F154-745C5420F526}"/>
+                  <a16:creationId xmlns:a16="http://schemas.microsoft.com/office/drawing/2014/main" id="{2800D669-598B-AB0C-14B0-85A3BE5ADDD9}"/>
                 </a:ext>
               </a:extLst>
             </p:cNvPr>
@@ -4639,245 +4394,164 @@
           </p:nvGrpSpPr>
           <p:grpSpPr>
             <a:xfrm>
-              <a:off x="1485901" y="1905371"/>
-              <a:ext cx="4001612" cy="877693"/>
-              <a:chOff x="147086" y="4430143"/>
-              <a:chExt cx="1923374" cy="1496149"/>
+              <a:off x="357021" y="1249006"/>
+              <a:ext cx="5062878" cy="1827166"/>
+              <a:chOff x="357021" y="1239884"/>
+              <a:chExt cx="5062878" cy="1827166"/>
             </a:xfrm>
           </p:grpSpPr>
-          <p:sp>
-            <p:nvSpPr>
-              <p:cNvPr id="47" name="사각형: 둥근 모서리 46">
+          <p:grpSp>
+            <p:nvGrpSpPr>
+              <p:cNvPr id="28" name="그룹 27">
                 <a:extLst>
                   <a:ext uri="{FF2B5EF4-FFF2-40B4-BE49-F238E27FC236}">
-                    <a16:creationId xmlns:a16="http://schemas.microsoft.com/office/drawing/2014/main" id="{5CA56767-1367-B924-EE9E-AF11528540C8}"/>
+                    <a16:creationId xmlns:a16="http://schemas.microsoft.com/office/drawing/2014/main" id="{FBE71439-8579-F712-B81B-3D74A706CECA}"/>
                   </a:ext>
                 </a:extLst>
               </p:cNvPr>
-              <p:cNvSpPr/>
+              <p:cNvGrpSpPr/>
               <p:nvPr/>
-            </p:nvSpPr>
+            </p:nvGrpSpPr>
+            <p:grpSpPr>
+              <a:xfrm>
+                <a:off x="357021" y="1239884"/>
+                <a:ext cx="5062878" cy="1827166"/>
+                <a:chOff x="439047" y="1265803"/>
+                <a:chExt cx="5587103" cy="2062211"/>
+              </a:xfrm>
+            </p:grpSpPr>
+            <p:pic>
+              <p:nvPicPr>
+                <p:cNvPr id="26" name="그림 25">
+                  <a:extLst>
+                    <a:ext uri="{FF2B5EF4-FFF2-40B4-BE49-F238E27FC236}">
+                      <a16:creationId xmlns:a16="http://schemas.microsoft.com/office/drawing/2014/main" id="{82FC5BDB-2B3A-9351-83C8-E213D1911590}"/>
+                    </a:ext>
+                  </a:extLst>
+                </p:cNvPr>
+                <p:cNvPicPr>
+                  <a:picLocks noChangeAspect="1"/>
+                </p:cNvPicPr>
+                <p:nvPr/>
+              </p:nvPicPr>
+              <p:blipFill>
+                <a:blip r:embed="rId3"/>
+                <a:stretch>
+                  <a:fillRect/>
+                </a:stretch>
+              </p:blipFill>
+              <p:spPr>
+                <a:xfrm>
+                  <a:off x="439047" y="1265803"/>
+                  <a:ext cx="5587103" cy="1335426"/>
+                </a:xfrm>
+                <a:prstGeom prst="rect">
+                  <a:avLst/>
+                </a:prstGeom>
+                <a:ln>
+                  <a:noFill/>
+                </a:ln>
+                <a:effectLst>
+                  <a:outerShdw blurRad="292100" dist="139700" dir="2700000" algn="tl" rotWithShape="0">
+                    <a:srgbClr val="333333">
+                      <a:alpha val="65000"/>
+                    </a:srgbClr>
+                  </a:outerShdw>
+                </a:effectLst>
+              </p:spPr>
+            </p:pic>
+            <p:pic>
+              <p:nvPicPr>
+                <p:cNvPr id="22" name="그림 21">
+                  <a:extLst>
+                    <a:ext uri="{FF2B5EF4-FFF2-40B4-BE49-F238E27FC236}">
+                      <a16:creationId xmlns:a16="http://schemas.microsoft.com/office/drawing/2014/main" id="{097320AA-71CE-186C-CF90-02C48F7281C0}"/>
+                    </a:ext>
+                  </a:extLst>
+                </p:cNvPr>
+                <p:cNvPicPr>
+                  <a:picLocks noChangeAspect="1"/>
+                </p:cNvPicPr>
+                <p:nvPr/>
+              </p:nvPicPr>
+              <p:blipFill>
+                <a:blip r:embed="rId4"/>
+                <a:stretch>
+                  <a:fillRect/>
+                </a:stretch>
+              </p:blipFill>
+              <p:spPr>
+                <a:xfrm>
+                  <a:off x="439047" y="2593925"/>
+                  <a:ext cx="5587103" cy="734089"/>
+                </a:xfrm>
+                <a:prstGeom prst="rect">
+                  <a:avLst/>
+                </a:prstGeom>
+                <a:ln>
+                  <a:noFill/>
+                </a:ln>
+                <a:effectLst>
+                  <a:outerShdw blurRad="292100" dist="139700" dir="2700000" algn="tl" rotWithShape="0">
+                    <a:srgbClr val="333333">
+                      <a:alpha val="65000"/>
+                    </a:srgbClr>
+                  </a:outerShdw>
+                </a:effectLst>
+              </p:spPr>
+            </p:pic>
+          </p:grpSp>
+          <p:cxnSp>
+            <p:nvCxnSpPr>
+              <p:cNvPr id="34" name="직선 연결선 33">
+                <a:extLst>
+                  <a:ext uri="{FF2B5EF4-FFF2-40B4-BE49-F238E27FC236}">
+                    <a16:creationId xmlns:a16="http://schemas.microsoft.com/office/drawing/2014/main" id="{905B7E18-B6E4-4879-F9FB-63C62CF1E84D}"/>
+                  </a:ext>
+                </a:extLst>
+              </p:cNvPr>
+              <p:cNvCxnSpPr>
+                <a:cxnSpLocks/>
+              </p:cNvCxnSpPr>
+              <p:nvPr/>
+            </p:nvCxnSpPr>
             <p:spPr>
               <a:xfrm>
-                <a:off x="147086" y="4430143"/>
-                <a:ext cx="1890875" cy="1496149"/>
+                <a:off x="444500" y="1755775"/>
+                <a:ext cx="3313198" cy="0"/>
               </a:xfrm>
-              <a:prstGeom prst="roundRect">
-                <a:avLst>
-                  <a:gd name="adj" fmla="val 9116"/>
-                </a:avLst>
+              <a:prstGeom prst="line">
+                <a:avLst/>
               </a:prstGeom>
-              <a:solidFill>
-                <a:schemeClr val="bg1"/>
-              </a:solidFill>
-              <a:ln>
+              <a:ln w="28575">
                 <a:solidFill>
-                  <a:schemeClr val="bg2">
-                    <a:lumMod val="90000"/>
-                  </a:schemeClr>
+                  <a:srgbClr val="FF0000"/>
                 </a:solidFill>
               </a:ln>
             </p:spPr>
             <p:style>
-              <a:lnRef idx="2">
-                <a:schemeClr val="accent1">
-                  <a:shade val="15000"/>
-                </a:schemeClr>
+              <a:lnRef idx="1">
+                <a:schemeClr val="accent1"/>
               </a:lnRef>
-              <a:fillRef idx="1">
+              <a:fillRef idx="0">
                 <a:schemeClr val="accent1"/>
               </a:fillRef>
               <a:effectRef idx="0">
                 <a:schemeClr val="accent1"/>
               </a:effectRef>
               <a:fontRef idx="minor">
-                <a:schemeClr val="lt1"/>
+                <a:schemeClr val="tx1"/>
               </a:fontRef>
             </p:style>
-            <p:txBody>
-              <a:bodyPr rtlCol="0" anchor="ctr"/>
-              <a:lstStyle/>
-              <a:p>
-                <a:pPr algn="ctr"/>
-                <a:endParaRPr lang="ko-KR" altLang="en-US" dirty="0"/>
-              </a:p>
-            </p:txBody>
-          </p:sp>
-          <p:sp>
-            <p:nvSpPr>
-              <p:cNvPr id="93" name="TextBox 92">
-                <a:extLst>
-                  <a:ext uri="{FF2B5EF4-FFF2-40B4-BE49-F238E27FC236}">
-                    <a16:creationId xmlns:a16="http://schemas.microsoft.com/office/drawing/2014/main" id="{10FFAE1C-350D-B34F-FD78-1FB5150EFF3F}"/>
-                  </a:ext>
-                </a:extLst>
-              </p:cNvPr>
-              <p:cNvSpPr txBox="1"/>
-              <p:nvPr/>
-            </p:nvSpPr>
-            <p:spPr>
-              <a:xfrm>
-                <a:off x="407590" y="4882898"/>
-                <a:ext cx="1662870" cy="493169"/>
-              </a:xfrm>
-              <a:prstGeom prst="rect">
-                <a:avLst/>
-              </a:prstGeom>
-              <a:noFill/>
-            </p:spPr>
-            <p:txBody>
-              <a:bodyPr wrap="square" lIns="0" tIns="0" rIns="0" bIns="0" rtlCol="0" anchor="t">
-                <a:spAutoFit/>
-              </a:bodyPr>
-              <a:lstStyle/>
-              <a:p>
-                <a:pPr>
-                  <a:lnSpc>
-                    <a:spcPct val="130000"/>
-                  </a:lnSpc>
-                </a:pPr>
-                <a:r>
-                  <a:rPr lang="ko-KR" altLang="en-US" sz="1600" dirty="0">
-                    <a:latin typeface="a시월구일1" panose="02020600000000000000" pitchFamily="18" charset="-127"/>
-                    <a:ea typeface="a시월구일1" panose="02020600000000000000" pitchFamily="18" charset="-127"/>
-                    <a:cs typeface="Noto Sans Disp ExtBd" panose="020B0902040504020204" pitchFamily="34"/>
-                  </a:rPr>
-                  <a:t>환경 </a:t>
-                </a:r>
-                <a:r>
-                  <a:rPr lang="en-US" altLang="ko-KR" sz="1600" dirty="0">
-                    <a:latin typeface="a시월구일1" panose="02020600000000000000" pitchFamily="18" charset="-127"/>
-                    <a:ea typeface="a시월구일1" panose="02020600000000000000" pitchFamily="18" charset="-127"/>
-                    <a:cs typeface="Noto Sans Disp ExtBd" panose="020B0902040504020204" pitchFamily="34"/>
-                  </a:rPr>
-                  <a:t>+ </a:t>
-                </a:r>
-                <a:r>
-                  <a:rPr lang="ko-KR" altLang="en-US" sz="1600" dirty="0">
-                    <a:latin typeface="a시월구일1" panose="02020600000000000000" pitchFamily="18" charset="-127"/>
-                    <a:ea typeface="a시월구일1" panose="02020600000000000000" pitchFamily="18" charset="-127"/>
-                    <a:cs typeface="Noto Sans Disp ExtBd" panose="020B0902040504020204" pitchFamily="34"/>
-                  </a:rPr>
-                  <a:t>보건 </a:t>
-                </a:r>
-                <a:r>
-                  <a:rPr lang="en-US" altLang="ko-KR" sz="1600" dirty="0">
-                    <a:latin typeface="a시월구일1" panose="02020600000000000000" pitchFamily="18" charset="-127"/>
-                    <a:ea typeface="a시월구일1" panose="02020600000000000000" pitchFamily="18" charset="-127"/>
-                    <a:cs typeface="Noto Sans Disp ExtBd" panose="020B0902040504020204" pitchFamily="34"/>
-                  </a:rPr>
-                  <a:t>+ </a:t>
-                </a:r>
-                <a:r>
-                  <a:rPr lang="ko-KR" altLang="en-US" sz="1600" dirty="0">
-                    <a:latin typeface="a시월구일1" panose="02020600000000000000" pitchFamily="18" charset="-127"/>
-                    <a:ea typeface="a시월구일1" panose="02020600000000000000" pitchFamily="18" charset="-127"/>
-                    <a:cs typeface="Noto Sans Disp ExtBd" panose="020B0902040504020204" pitchFamily="34"/>
-                  </a:rPr>
-                  <a:t>인구 데이터 결합</a:t>
-                </a:r>
-                <a:endParaRPr lang="en-US" altLang="ko-KR" sz="1600" dirty="0">
-                  <a:latin typeface="a시월구일1" panose="02020600000000000000" pitchFamily="18" charset="-127"/>
-                  <a:ea typeface="a시월구일1" panose="02020600000000000000" pitchFamily="18" charset="-127"/>
-                  <a:cs typeface="Noto Sans Disp ExtBd" panose="020B0902040504020204" pitchFamily="34"/>
-                </a:endParaRPr>
-              </a:p>
-            </p:txBody>
-          </p:sp>
+          </p:cxnSp>
         </p:grpSp>
-        <p:sp>
-          <p:nvSpPr>
-            <p:cNvPr id="2" name="타원 1">
-              <a:extLst>
-                <a:ext uri="{FF2B5EF4-FFF2-40B4-BE49-F238E27FC236}">
-                  <a16:creationId xmlns:a16="http://schemas.microsoft.com/office/drawing/2014/main" id="{E3347BF0-2DE7-F5C6-8AF0-CE0CF0786303}"/>
-                </a:ext>
-              </a:extLst>
-            </p:cNvPr>
-            <p:cNvSpPr/>
-            <p:nvPr/>
-          </p:nvSpPr>
-          <p:spPr>
-            <a:xfrm>
-              <a:off x="317986" y="1667315"/>
-              <a:ext cx="1396375" cy="1396375"/>
-            </a:xfrm>
-            <a:prstGeom prst="ellipse">
-              <a:avLst/>
-            </a:prstGeom>
-            <a:solidFill>
-              <a:schemeClr val="bg1"/>
-            </a:solidFill>
-            <a:ln>
-              <a:solidFill>
-                <a:schemeClr val="tx1"/>
-              </a:solidFill>
-            </a:ln>
-          </p:spPr>
-          <p:style>
-            <a:lnRef idx="2">
-              <a:schemeClr val="accent1">
-                <a:shade val="15000"/>
-              </a:schemeClr>
-            </a:lnRef>
-            <a:fillRef idx="1">
-              <a:schemeClr val="accent1"/>
-            </a:fillRef>
-            <a:effectRef idx="0">
-              <a:schemeClr val="accent1"/>
-            </a:effectRef>
-            <a:fontRef idx="minor">
-              <a:schemeClr val="lt1"/>
-            </a:fontRef>
-          </p:style>
-          <p:txBody>
-            <a:bodyPr rtlCol="0" anchor="ctr"/>
-            <a:lstStyle/>
-            <a:p>
-              <a:pPr algn="ctr"/>
-              <a:r>
-                <a:rPr lang="ko-KR" altLang="en-US" sz="2000" dirty="0">
-                  <a:solidFill>
-                    <a:schemeClr val="tx1"/>
-                  </a:solidFill>
-                  <a:latin typeface="a시월구일3" panose="02020600000000000000" pitchFamily="18" charset="-127"/>
-                  <a:ea typeface="a시월구일3" panose="02020600000000000000" pitchFamily="18" charset="-127"/>
-                  <a:cs typeface="Noto Sans Disp ExtBd" panose="020B0902040504020204" pitchFamily="34"/>
-                </a:rPr>
-                <a:t>데이터</a:t>
-              </a:r>
-              <a:endParaRPr lang="en-US" altLang="ko-KR" sz="2000" dirty="0">
-                <a:solidFill>
-                  <a:schemeClr val="tx1"/>
-                </a:solidFill>
-                <a:latin typeface="a시월구일3" panose="02020600000000000000" pitchFamily="18" charset="-127"/>
-                <a:ea typeface="a시월구일3" panose="02020600000000000000" pitchFamily="18" charset="-127"/>
-                <a:cs typeface="Noto Sans Disp ExtBd" panose="020B0902040504020204" pitchFamily="34"/>
-              </a:endParaRPr>
-            </a:p>
-            <a:p>
-              <a:pPr algn="ctr"/>
-              <a:r>
-                <a:rPr lang="ko-KR" altLang="en-US" sz="2000" dirty="0">
-                  <a:solidFill>
-                    <a:schemeClr val="tx1"/>
-                  </a:solidFill>
-                  <a:latin typeface="a시월구일3" panose="02020600000000000000" pitchFamily="18" charset="-127"/>
-                  <a:ea typeface="a시월구일3" panose="02020600000000000000" pitchFamily="18" charset="-127"/>
-                  <a:cs typeface="Noto Sans Disp ExtBd" panose="020B0902040504020204" pitchFamily="34"/>
-                </a:rPr>
-                <a:t>통합</a:t>
-              </a:r>
-            </a:p>
-          </p:txBody>
-        </p:sp>
       </p:grpSp>
       <p:grpSp>
         <p:nvGrpSpPr>
-          <p:cNvPr id="20" name="그룹 19">
-            <a:extLst>
-              <a:ext uri="{FF2B5EF4-FFF2-40B4-BE49-F238E27FC236}">
-                <a16:creationId xmlns:a16="http://schemas.microsoft.com/office/drawing/2014/main" id="{88BEAAD5-0A4E-6E34-7D71-DD5E9280F885}"/>
+          <p:cNvPr id="60" name="그룹 59">
+            <a:extLst>
+              <a:ext uri="{FF2B5EF4-FFF2-40B4-BE49-F238E27FC236}">
+                <a16:creationId xmlns:a16="http://schemas.microsoft.com/office/drawing/2014/main" id="{CA68AEFE-275D-674D-6C5D-16BB7AC9E5E8}"/>
               </a:ext>
             </a:extLst>
           </p:cNvPr>
@@ -4886,18 +4560,61 @@
         </p:nvGrpSpPr>
         <p:grpSpPr>
           <a:xfrm>
-            <a:off x="317986" y="3383573"/>
-            <a:ext cx="5169527" cy="1396375"/>
-            <a:chOff x="317986" y="3419527"/>
-            <a:chExt cx="5169527" cy="1396375"/>
+            <a:off x="2167175" y="3157945"/>
+            <a:ext cx="7961595" cy="2294134"/>
+            <a:chOff x="2000478" y="3274808"/>
+            <a:chExt cx="7961595" cy="2294134"/>
           </a:xfrm>
         </p:grpSpPr>
+        <p:pic>
+          <p:nvPicPr>
+            <p:cNvPr id="18" name="그림 17">
+              <a:extLst>
+                <a:ext uri="{FF2B5EF4-FFF2-40B4-BE49-F238E27FC236}">
+                  <a16:creationId xmlns:a16="http://schemas.microsoft.com/office/drawing/2014/main" id="{E90BC241-2770-08CD-B3EC-45915D980DBB}"/>
+                </a:ext>
+              </a:extLst>
+            </p:cNvPr>
+            <p:cNvPicPr>
+              <a:picLocks noChangeAspect="1"/>
+            </p:cNvPicPr>
+            <p:nvPr/>
+          </p:nvPicPr>
+          <p:blipFill>
+            <a:blip r:embed="rId2">
+              <a:duotone>
+                <a:schemeClr val="bg2">
+                  <a:shade val="45000"/>
+                  <a:satMod val="135000"/>
+                </a:schemeClr>
+                <a:prstClr val="white"/>
+              </a:duotone>
+              <a:extLst>
+                <a:ext uri="{28A0092B-C50C-407E-A947-70E740481C1C}">
+                  <a14:useLocalDpi xmlns:a14="http://schemas.microsoft.com/office/drawing/2010/main" val="0"/>
+                </a:ext>
+              </a:extLst>
+            </a:blip>
+            <a:stretch>
+              <a:fillRect/>
+            </a:stretch>
+          </p:blipFill>
+          <p:spPr>
+            <a:xfrm rot="10800000">
+              <a:off x="3477237" y="4112452"/>
+              <a:ext cx="5008076" cy="1456490"/>
+            </a:xfrm>
+            <a:prstGeom prst="rect">
+              <a:avLst/>
+            </a:prstGeom>
+          </p:spPr>
+        </p:pic>
         <p:grpSp>
           <p:nvGrpSpPr>
-            <p:cNvPr id="12" name="그룹 11">
+            <p:cNvPr id="59" name="그룹 58">
               <a:extLst>
                 <a:ext uri="{FF2B5EF4-FFF2-40B4-BE49-F238E27FC236}">
-                  <a16:creationId xmlns:a16="http://schemas.microsoft.com/office/drawing/2014/main" id="{FB574C56-7C2A-C2A4-4034-F0141CED65E9}"/>
+                  <a16:creationId xmlns:a16="http://schemas.microsoft.com/office/drawing/2014/main" id="{8B6BE83D-2554-5475-6A7B-CE0AD8F2B87C}"/>
                 </a:ext>
               </a:extLst>
             </p:cNvPr>
@@ -4906,441 +4623,598 @@
           </p:nvGrpSpPr>
           <p:grpSpPr>
             <a:xfrm>
-              <a:off x="1485901" y="3675340"/>
-              <a:ext cx="4001612" cy="877693"/>
-              <a:chOff x="147086" y="4430143"/>
-              <a:chExt cx="1923374" cy="1496149"/>
+              <a:off x="2000478" y="3274808"/>
+              <a:ext cx="7961595" cy="1574856"/>
+              <a:chOff x="2000478" y="3274808"/>
+              <a:chExt cx="7961595" cy="1574856"/>
             </a:xfrm>
           </p:grpSpPr>
-          <p:sp>
-            <p:nvSpPr>
-              <p:cNvPr id="13" name="사각형: 둥근 모서리 12">
+          <p:grpSp>
+            <p:nvGrpSpPr>
+              <p:cNvPr id="56" name="그룹 55">
                 <a:extLst>
                   <a:ext uri="{FF2B5EF4-FFF2-40B4-BE49-F238E27FC236}">
-                    <a16:creationId xmlns:a16="http://schemas.microsoft.com/office/drawing/2014/main" id="{8DF188DD-95E2-8BEB-0B39-31B5FCCBF7D7}"/>
+                    <a16:creationId xmlns:a16="http://schemas.microsoft.com/office/drawing/2014/main" id="{40BC1789-84DD-2607-A2E9-771D96F06F51}"/>
                   </a:ext>
                 </a:extLst>
               </p:cNvPr>
-              <p:cNvSpPr/>
+              <p:cNvGrpSpPr/>
               <p:nvPr/>
-            </p:nvSpPr>
-            <p:spPr>
+            </p:nvGrpSpPr>
+            <p:grpSpPr>
               <a:xfrm>
-                <a:off x="147086" y="4430143"/>
-                <a:ext cx="1890875" cy="1496149"/>
+                <a:off x="2000478" y="3274808"/>
+                <a:ext cx="2374157" cy="1574856"/>
+                <a:chOff x="714565" y="3665569"/>
+                <a:chExt cx="2374157" cy="1574856"/>
               </a:xfrm>
-              <a:prstGeom prst="roundRect">
-                <a:avLst>
-                  <a:gd name="adj" fmla="val 9116"/>
-                </a:avLst>
-              </a:prstGeom>
-              <a:solidFill>
-                <a:schemeClr val="bg1"/>
-              </a:solidFill>
-              <a:ln>
+            </p:grpSpPr>
+            <p:sp>
+              <p:nvSpPr>
+                <p:cNvPr id="40" name="사각형: 둥근 모서리 39">
+                  <a:extLst>
+                    <a:ext uri="{FF2B5EF4-FFF2-40B4-BE49-F238E27FC236}">
+                      <a16:creationId xmlns:a16="http://schemas.microsoft.com/office/drawing/2014/main" id="{A205D2FD-058B-25C0-D69B-89D41D54EA5E}"/>
+                    </a:ext>
+                  </a:extLst>
+                </p:cNvPr>
+                <p:cNvSpPr/>
+                <p:nvPr/>
+              </p:nvSpPr>
+              <p:spPr>
+                <a:xfrm>
+                  <a:off x="714565" y="3665569"/>
+                  <a:ext cx="2374157" cy="1574856"/>
+                </a:xfrm>
+                <a:prstGeom prst="roundRect">
+                  <a:avLst/>
+                </a:prstGeom>
                 <a:solidFill>
-                  <a:schemeClr val="bg2">
-                    <a:lumMod val="90000"/>
+                  <a:schemeClr val="bg1"/>
+                </a:solidFill>
+                <a:ln>
+                  <a:solidFill>
+                    <a:schemeClr val="tx1"/>
+                  </a:solidFill>
+                </a:ln>
+              </p:spPr>
+              <p:style>
+                <a:lnRef idx="2">
+                  <a:schemeClr val="accent1">
+                    <a:shade val="15000"/>
                   </a:schemeClr>
-                </a:solidFill>
-              </a:ln>
-            </p:spPr>
-            <p:style>
-              <a:lnRef idx="2">
-                <a:schemeClr val="accent1">
-                  <a:shade val="15000"/>
-                </a:schemeClr>
-              </a:lnRef>
-              <a:fillRef idx="1">
-                <a:schemeClr val="accent1"/>
-              </a:fillRef>
-              <a:effectRef idx="0">
-                <a:schemeClr val="accent1"/>
-              </a:effectRef>
-              <a:fontRef idx="minor">
-                <a:schemeClr val="lt1"/>
-              </a:fontRef>
-            </p:style>
-            <p:txBody>
-              <a:bodyPr rtlCol="0" anchor="ctr"/>
-              <a:lstStyle/>
-              <a:p>
-                <a:pPr algn="ctr"/>
-                <a:endParaRPr lang="ko-KR" altLang="en-US" dirty="0"/>
-              </a:p>
-            </p:txBody>
-          </p:sp>
-          <p:sp>
-            <p:nvSpPr>
-              <p:cNvPr id="14" name="TextBox 13">
+                </a:lnRef>
+                <a:fillRef idx="1">
+                  <a:schemeClr val="accent1"/>
+                </a:fillRef>
+                <a:effectRef idx="0">
+                  <a:schemeClr val="accent1"/>
+                </a:effectRef>
+                <a:fontRef idx="minor">
+                  <a:schemeClr val="lt1"/>
+                </a:fontRef>
+              </p:style>
+              <p:txBody>
+                <a:bodyPr rtlCol="0" anchor="ctr"/>
+                <a:lstStyle/>
+                <a:p>
+                  <a:pPr algn="ctr"/>
+                  <a:endParaRPr lang="ko-KR" altLang="en-US" b="1" dirty="0">
+                    <a:solidFill>
+                      <a:schemeClr val="tx1"/>
+                    </a:solidFill>
+                    <a:latin typeface="a시월구일3" panose="02020600000000000000" pitchFamily="18" charset="-127"/>
+                    <a:ea typeface="a시월구일3" panose="02020600000000000000" pitchFamily="18" charset="-127"/>
+                    <a:cs typeface="Noto Sans Disp ExtBd" panose="020B0902040504020204" pitchFamily="34"/>
+                  </a:endParaRPr>
+                </a:p>
+              </p:txBody>
+            </p:sp>
+            <p:sp>
+              <p:nvSpPr>
+                <p:cNvPr id="49" name="TextBox 48">
+                  <a:extLst>
+                    <a:ext uri="{FF2B5EF4-FFF2-40B4-BE49-F238E27FC236}">
+                      <a16:creationId xmlns:a16="http://schemas.microsoft.com/office/drawing/2014/main" id="{D4D710EA-2717-316D-F0C3-DFC3EE7E8651}"/>
+                    </a:ext>
+                  </a:extLst>
+                </p:cNvPr>
+                <p:cNvSpPr txBox="1"/>
+                <p:nvPr/>
+              </p:nvSpPr>
+              <p:spPr>
+                <a:xfrm>
+                  <a:off x="1184644" y="3858190"/>
+                  <a:ext cx="1433999" cy="276999"/>
+                </a:xfrm>
+                <a:prstGeom prst="rect">
+                  <a:avLst/>
+                </a:prstGeom>
+                <a:noFill/>
+              </p:spPr>
+              <p:txBody>
+                <a:bodyPr wrap="square" lIns="0" tIns="0" rIns="0" bIns="0" rtlCol="0" anchor="t">
+                  <a:spAutoFit/>
+                </a:bodyPr>
+                <a:lstStyle/>
+                <a:p>
+                  <a:pPr algn="ctr"/>
+                  <a:r>
+                    <a:rPr lang="ko-KR" altLang="en-US" b="1" dirty="0">
+                      <a:latin typeface="a시월구일3" panose="02020600000000000000" pitchFamily="18" charset="-127"/>
+                      <a:ea typeface="a시월구일3" panose="02020600000000000000" pitchFamily="18" charset="-127"/>
+                      <a:cs typeface="Noto Sans Disp ExtBd" panose="020B0902040504020204" pitchFamily="34"/>
+                    </a:rPr>
+                    <a:t>데이터 통합</a:t>
+                  </a:r>
+                </a:p>
+              </p:txBody>
+            </p:sp>
+            <p:sp>
+              <p:nvSpPr>
+                <p:cNvPr id="93" name="TextBox 92">
+                  <a:extLst>
+                    <a:ext uri="{FF2B5EF4-FFF2-40B4-BE49-F238E27FC236}">
+                      <a16:creationId xmlns:a16="http://schemas.microsoft.com/office/drawing/2014/main" id="{10FFAE1C-350D-B34F-FD78-1FB5150EFF3F}"/>
+                    </a:ext>
+                  </a:extLst>
+                </p:cNvPr>
+                <p:cNvSpPr txBox="1"/>
+                <p:nvPr/>
+              </p:nvSpPr>
+              <p:spPr>
+                <a:xfrm>
+                  <a:off x="1055679" y="4349199"/>
+                  <a:ext cx="1691928" cy="609398"/>
+                </a:xfrm>
+                <a:prstGeom prst="rect">
+                  <a:avLst/>
+                </a:prstGeom>
+                <a:noFill/>
+              </p:spPr>
+              <p:txBody>
+                <a:bodyPr wrap="square" lIns="0" tIns="0" rIns="0" bIns="0" rtlCol="0" anchor="t">
+                  <a:spAutoFit/>
+                </a:bodyPr>
+                <a:lstStyle/>
+                <a:p>
+                  <a:pPr algn="ctr">
+                    <a:lnSpc>
+                      <a:spcPct val="130000"/>
+                    </a:lnSpc>
+                  </a:pPr>
+                  <a:r>
+                    <a:rPr lang="ko-KR" altLang="en-US" sz="1600" b="1" dirty="0">
+                      <a:latin typeface="a시월구일1" panose="02020600000000000000" pitchFamily="18" charset="-127"/>
+                      <a:ea typeface="a시월구일1" panose="02020600000000000000" pitchFamily="18" charset="-127"/>
+                      <a:cs typeface="Noto Sans Disp ExtBd" panose="020B0902040504020204" pitchFamily="34"/>
+                    </a:rPr>
+                    <a:t>환경 </a:t>
+                  </a:r>
+                  <a:r>
+                    <a:rPr lang="en-US" altLang="ko-KR" sz="1600" b="1" dirty="0">
+                      <a:latin typeface="a시월구일1" panose="02020600000000000000" pitchFamily="18" charset="-127"/>
+                      <a:ea typeface="a시월구일1" panose="02020600000000000000" pitchFamily="18" charset="-127"/>
+                      <a:cs typeface="Noto Sans Disp ExtBd" panose="020B0902040504020204" pitchFamily="34"/>
+                    </a:rPr>
+                    <a:t>+ </a:t>
+                  </a:r>
+                  <a:r>
+                    <a:rPr lang="ko-KR" altLang="en-US" sz="1600" b="1" dirty="0">
+                      <a:latin typeface="a시월구일1" panose="02020600000000000000" pitchFamily="18" charset="-127"/>
+                      <a:ea typeface="a시월구일1" panose="02020600000000000000" pitchFamily="18" charset="-127"/>
+                      <a:cs typeface="Noto Sans Disp ExtBd" panose="020B0902040504020204" pitchFamily="34"/>
+                    </a:rPr>
+                    <a:t>보건 </a:t>
+                  </a:r>
+                  <a:r>
+                    <a:rPr lang="en-US" altLang="ko-KR" sz="1600" b="1" dirty="0">
+                      <a:latin typeface="a시월구일1" panose="02020600000000000000" pitchFamily="18" charset="-127"/>
+                      <a:ea typeface="a시월구일1" panose="02020600000000000000" pitchFamily="18" charset="-127"/>
+                      <a:cs typeface="Noto Sans Disp ExtBd" panose="020B0902040504020204" pitchFamily="34"/>
+                    </a:rPr>
+                    <a:t>+ </a:t>
+                  </a:r>
+                  <a:r>
+                    <a:rPr lang="ko-KR" altLang="en-US" sz="1600" b="1" dirty="0">
+                      <a:latin typeface="a시월구일1" panose="02020600000000000000" pitchFamily="18" charset="-127"/>
+                      <a:ea typeface="a시월구일1" panose="02020600000000000000" pitchFamily="18" charset="-127"/>
+                      <a:cs typeface="Noto Sans Disp ExtBd" panose="020B0902040504020204" pitchFamily="34"/>
+                    </a:rPr>
+                    <a:t>인구 </a:t>
+                  </a:r>
+                  <a:endParaRPr lang="en-US" altLang="ko-KR" sz="1600" b="1" dirty="0">
+                    <a:latin typeface="a시월구일1" panose="02020600000000000000" pitchFamily="18" charset="-127"/>
+                    <a:ea typeface="a시월구일1" panose="02020600000000000000" pitchFamily="18" charset="-127"/>
+                    <a:cs typeface="Noto Sans Disp ExtBd" panose="020B0902040504020204" pitchFamily="34"/>
+                  </a:endParaRPr>
+                </a:p>
+                <a:p>
+                  <a:pPr algn="ctr">
+                    <a:lnSpc>
+                      <a:spcPct val="130000"/>
+                    </a:lnSpc>
+                  </a:pPr>
+                  <a:r>
+                    <a:rPr lang="ko-KR" altLang="en-US" sz="1600" b="1" dirty="0">
+                      <a:latin typeface="a시월구일1" panose="02020600000000000000" pitchFamily="18" charset="-127"/>
+                      <a:ea typeface="a시월구일1" panose="02020600000000000000" pitchFamily="18" charset="-127"/>
+                      <a:cs typeface="Noto Sans Disp ExtBd" panose="020B0902040504020204" pitchFamily="34"/>
+                    </a:rPr>
+                    <a:t>데이터 결합</a:t>
+                  </a:r>
+                  <a:endParaRPr lang="en-US" altLang="ko-KR" sz="1600" b="1" dirty="0">
+                    <a:latin typeface="a시월구일1" panose="02020600000000000000" pitchFamily="18" charset="-127"/>
+                    <a:ea typeface="a시월구일1" panose="02020600000000000000" pitchFamily="18" charset="-127"/>
+                    <a:cs typeface="Noto Sans Disp ExtBd" panose="020B0902040504020204" pitchFamily="34"/>
+                  </a:endParaRPr>
+                </a:p>
+              </p:txBody>
+            </p:sp>
+          </p:grpSp>
+          <p:grpSp>
+            <p:nvGrpSpPr>
+              <p:cNvPr id="57" name="그룹 56">
                 <a:extLst>
                   <a:ext uri="{FF2B5EF4-FFF2-40B4-BE49-F238E27FC236}">
-                    <a16:creationId xmlns:a16="http://schemas.microsoft.com/office/drawing/2014/main" id="{843D6432-E8B4-47F8-BB7D-C24499D8DE6D}"/>
+                    <a16:creationId xmlns:a16="http://schemas.microsoft.com/office/drawing/2014/main" id="{1413A556-4684-F6BC-61AD-2AD509F77D53}"/>
                   </a:ext>
                 </a:extLst>
               </p:cNvPr>
-              <p:cNvSpPr txBox="1"/>
+              <p:cNvGrpSpPr/>
               <p:nvPr/>
-            </p:nvSpPr>
-            <p:spPr>
+            </p:nvGrpSpPr>
+            <p:grpSpPr>
               <a:xfrm>
-                <a:off x="407590" y="4882898"/>
-                <a:ext cx="1662870" cy="493169"/>
+                <a:off x="4808082" y="3274808"/>
+                <a:ext cx="2374157" cy="1574856"/>
+                <a:chOff x="4174126" y="3665569"/>
+                <a:chExt cx="2374157" cy="1574856"/>
               </a:xfrm>
-              <a:prstGeom prst="rect">
-                <a:avLst/>
-              </a:prstGeom>
-              <a:noFill/>
-            </p:spPr>
-            <p:txBody>
-              <a:bodyPr wrap="square" lIns="0" tIns="0" rIns="0" bIns="0" rtlCol="0" anchor="t">
-                <a:spAutoFit/>
-              </a:bodyPr>
-              <a:lstStyle/>
-              <a:p>
-                <a:pPr>
-                  <a:lnSpc>
-                    <a:spcPct val="130000"/>
-                  </a:lnSpc>
-                </a:pPr>
-                <a:r>
-                  <a:rPr lang="ko-KR" altLang="en-US" sz="1600" dirty="0">
+            </p:grpSpPr>
+            <p:sp>
+              <p:nvSpPr>
+                <p:cNvPr id="50" name="사각형: 둥근 모서리 49">
+                  <a:extLst>
+                    <a:ext uri="{FF2B5EF4-FFF2-40B4-BE49-F238E27FC236}">
+                      <a16:creationId xmlns:a16="http://schemas.microsoft.com/office/drawing/2014/main" id="{47DC521F-1B07-3446-DE1F-62D404BFB41B}"/>
+                    </a:ext>
+                  </a:extLst>
+                </p:cNvPr>
+                <p:cNvSpPr/>
+                <p:nvPr/>
+              </p:nvSpPr>
+              <p:spPr>
+                <a:xfrm>
+                  <a:off x="4174126" y="3665569"/>
+                  <a:ext cx="2374157" cy="1574856"/>
+                </a:xfrm>
+                <a:prstGeom prst="roundRect">
+                  <a:avLst/>
+                </a:prstGeom>
+                <a:solidFill>
+                  <a:schemeClr val="bg1"/>
+                </a:solidFill>
+                <a:ln>
+                  <a:solidFill>
+                    <a:schemeClr val="tx1"/>
+                  </a:solidFill>
+                </a:ln>
+              </p:spPr>
+              <p:style>
+                <a:lnRef idx="2">
+                  <a:schemeClr val="accent1">
+                    <a:shade val="15000"/>
+                  </a:schemeClr>
+                </a:lnRef>
+                <a:fillRef idx="1">
+                  <a:schemeClr val="accent1"/>
+                </a:fillRef>
+                <a:effectRef idx="0">
+                  <a:schemeClr val="accent1"/>
+                </a:effectRef>
+                <a:fontRef idx="minor">
+                  <a:schemeClr val="lt1"/>
+                </a:fontRef>
+              </p:style>
+              <p:txBody>
+                <a:bodyPr rtlCol="0" anchor="ctr"/>
+                <a:lstStyle/>
+                <a:p>
+                  <a:pPr algn="ctr"/>
+                  <a:endParaRPr lang="ko-KR" altLang="en-US" dirty="0">
+                    <a:solidFill>
+                      <a:schemeClr val="tx1"/>
+                    </a:solidFill>
+                    <a:latin typeface="a시월구일3" panose="02020600000000000000" pitchFamily="18" charset="-127"/>
+                    <a:ea typeface="a시월구일3" panose="02020600000000000000" pitchFamily="18" charset="-127"/>
+                    <a:cs typeface="Noto Sans Disp ExtBd" panose="020B0902040504020204" pitchFamily="34"/>
+                  </a:endParaRPr>
+                </a:p>
+              </p:txBody>
+            </p:sp>
+            <p:sp>
+              <p:nvSpPr>
+                <p:cNvPr id="51" name="TextBox 50">
+                  <a:extLst>
+                    <a:ext uri="{FF2B5EF4-FFF2-40B4-BE49-F238E27FC236}">
+                      <a16:creationId xmlns:a16="http://schemas.microsoft.com/office/drawing/2014/main" id="{AAC2A739-1C7C-B59C-F1A8-98A18716CCEA}"/>
+                    </a:ext>
+                  </a:extLst>
+                </p:cNvPr>
+                <p:cNvSpPr txBox="1"/>
+                <p:nvPr/>
+              </p:nvSpPr>
+              <p:spPr>
+                <a:xfrm>
+                  <a:off x="4644205" y="3858190"/>
+                  <a:ext cx="1433999" cy="276999"/>
+                </a:xfrm>
+                <a:prstGeom prst="rect">
+                  <a:avLst/>
+                </a:prstGeom>
+                <a:noFill/>
+              </p:spPr>
+              <p:txBody>
+                <a:bodyPr wrap="square" lIns="0" tIns="0" rIns="0" bIns="0" rtlCol="0" anchor="t">
+                  <a:spAutoFit/>
+                </a:bodyPr>
+                <a:lstStyle/>
+                <a:p>
+                  <a:pPr algn="ctr"/>
+                  <a:r>
+                    <a:rPr lang="ko-KR" altLang="en-US" dirty="0">
+                      <a:latin typeface="a시월구일3" panose="02020600000000000000" pitchFamily="18" charset="-127"/>
+                      <a:ea typeface="a시월구일3" panose="02020600000000000000" pitchFamily="18" charset="-127"/>
+                      <a:cs typeface="Noto Sans Disp ExtBd" panose="020B0902040504020204" pitchFamily="34"/>
+                    </a:rPr>
+                    <a:t>지역 분석</a:t>
+                  </a:r>
+                </a:p>
+              </p:txBody>
+            </p:sp>
+            <p:sp>
+              <p:nvSpPr>
+                <p:cNvPr id="52" name="TextBox 51">
+                  <a:extLst>
+                    <a:ext uri="{FF2B5EF4-FFF2-40B4-BE49-F238E27FC236}">
+                      <a16:creationId xmlns:a16="http://schemas.microsoft.com/office/drawing/2014/main" id="{A2EBD648-449B-DCBD-AF4C-C35A3A0C09FB}"/>
+                    </a:ext>
+                  </a:extLst>
+                </p:cNvPr>
+                <p:cNvSpPr txBox="1"/>
+                <p:nvPr/>
+              </p:nvSpPr>
+              <p:spPr>
+                <a:xfrm>
+                  <a:off x="4515240" y="4349199"/>
+                  <a:ext cx="1691928" cy="609398"/>
+                </a:xfrm>
+                <a:prstGeom prst="rect">
+                  <a:avLst/>
+                </a:prstGeom>
+                <a:noFill/>
+              </p:spPr>
+              <p:txBody>
+                <a:bodyPr wrap="square" lIns="0" tIns="0" rIns="0" bIns="0" rtlCol="0" anchor="t">
+                  <a:spAutoFit/>
+                </a:bodyPr>
+                <a:lstStyle/>
+                <a:p>
+                  <a:pPr algn="ctr">
+                    <a:lnSpc>
+                      <a:spcPct val="130000"/>
+                    </a:lnSpc>
+                  </a:pPr>
+                  <a:r>
+                    <a:rPr lang="ko-KR" altLang="en-US" sz="1600" dirty="0">
+                      <a:latin typeface="a시월구일1" panose="02020600000000000000" pitchFamily="18" charset="-127"/>
+                      <a:ea typeface="a시월구일1" panose="02020600000000000000" pitchFamily="18" charset="-127"/>
+                      <a:cs typeface="Noto Sans Disp ExtBd" panose="020B0902040504020204" pitchFamily="34"/>
+                    </a:rPr>
+                    <a:t>자치구별 </a:t>
+                  </a:r>
+                  <a:endParaRPr lang="en-US" altLang="ko-KR" sz="1600" dirty="0">
                     <a:latin typeface="a시월구일1" panose="02020600000000000000" pitchFamily="18" charset="-127"/>
                     <a:ea typeface="a시월구일1" panose="02020600000000000000" pitchFamily="18" charset="-127"/>
                     <a:cs typeface="Noto Sans Disp ExtBd" panose="020B0902040504020204" pitchFamily="34"/>
-                  </a:rPr>
-                  <a:t>자치구별 건강 특성 반영</a:t>
-                </a:r>
-                <a:endParaRPr lang="en-US" altLang="ko-KR" sz="1600" dirty="0">
-                  <a:latin typeface="a시월구일1" panose="02020600000000000000" pitchFamily="18" charset="-127"/>
-                  <a:ea typeface="a시월구일1" panose="02020600000000000000" pitchFamily="18" charset="-127"/>
-                  <a:cs typeface="Noto Sans Disp ExtBd" panose="020B0902040504020204" pitchFamily="34"/>
-                </a:endParaRPr>
-              </a:p>
-            </p:txBody>
-          </p:sp>
-        </p:grpSp>
-        <p:sp>
-          <p:nvSpPr>
-            <p:cNvPr id="10" name="타원 9">
-              <a:extLst>
-                <a:ext uri="{FF2B5EF4-FFF2-40B4-BE49-F238E27FC236}">
-                  <a16:creationId xmlns:a16="http://schemas.microsoft.com/office/drawing/2014/main" id="{A88985DA-620B-342E-7AE2-752E5E28BF79}"/>
-                </a:ext>
-              </a:extLst>
-            </p:cNvPr>
-            <p:cNvSpPr/>
-            <p:nvPr/>
-          </p:nvSpPr>
-          <p:spPr>
-            <a:xfrm>
-              <a:off x="317986" y="3419527"/>
-              <a:ext cx="1396375" cy="1396375"/>
-            </a:xfrm>
-            <a:prstGeom prst="ellipse">
-              <a:avLst/>
-            </a:prstGeom>
-            <a:solidFill>
-              <a:schemeClr val="bg1"/>
-            </a:solidFill>
-            <a:ln>
-              <a:solidFill>
-                <a:schemeClr val="tx1"/>
-              </a:solidFill>
-            </a:ln>
-          </p:spPr>
-          <p:style>
-            <a:lnRef idx="2">
-              <a:schemeClr val="accent1">
-                <a:shade val="15000"/>
-              </a:schemeClr>
-            </a:lnRef>
-            <a:fillRef idx="1">
-              <a:schemeClr val="accent1"/>
-            </a:fillRef>
-            <a:effectRef idx="0">
-              <a:schemeClr val="accent1"/>
-            </a:effectRef>
-            <a:fontRef idx="minor">
-              <a:schemeClr val="lt1"/>
-            </a:fontRef>
-          </p:style>
-          <p:txBody>
-            <a:bodyPr rtlCol="0" anchor="ctr"/>
-            <a:lstStyle/>
-            <a:p>
-              <a:pPr algn="ctr"/>
-              <a:r>
-                <a:rPr lang="ko-KR" altLang="en-US" sz="2000" dirty="0">
+                  </a:endParaRPr>
+                </a:p>
+                <a:p>
+                  <a:pPr algn="ctr">
+                    <a:lnSpc>
+                      <a:spcPct val="130000"/>
+                    </a:lnSpc>
+                  </a:pPr>
+                  <a:r>
+                    <a:rPr lang="ko-KR" altLang="en-US" sz="1600" dirty="0">
+                      <a:latin typeface="a시월구일1" panose="02020600000000000000" pitchFamily="18" charset="-127"/>
+                      <a:ea typeface="a시월구일1" panose="02020600000000000000" pitchFamily="18" charset="-127"/>
+                      <a:cs typeface="Noto Sans Disp ExtBd" panose="020B0902040504020204" pitchFamily="34"/>
+                    </a:rPr>
+                    <a:t>건강 특성 반영</a:t>
+                  </a:r>
+                  <a:endParaRPr lang="en-US" altLang="ko-KR" sz="1600" dirty="0">
+                    <a:latin typeface="a시월구일1" panose="02020600000000000000" pitchFamily="18" charset="-127"/>
+                    <a:ea typeface="a시월구일1" panose="02020600000000000000" pitchFamily="18" charset="-127"/>
+                    <a:cs typeface="Noto Sans Disp ExtBd" panose="020B0902040504020204" pitchFamily="34"/>
+                  </a:endParaRPr>
+                </a:p>
+              </p:txBody>
+            </p:sp>
+          </p:grpSp>
+          <p:grpSp>
+            <p:nvGrpSpPr>
+              <p:cNvPr id="58" name="그룹 57">
+                <a:extLst>
+                  <a:ext uri="{FF2B5EF4-FFF2-40B4-BE49-F238E27FC236}">
+                    <a16:creationId xmlns:a16="http://schemas.microsoft.com/office/drawing/2014/main" id="{8F520D37-128A-19B6-B554-8AF628DDC9E5}"/>
+                  </a:ext>
+                </a:extLst>
+              </p:cNvPr>
+              <p:cNvGrpSpPr/>
+              <p:nvPr/>
+            </p:nvGrpSpPr>
+            <p:grpSpPr>
+              <a:xfrm>
+                <a:off x="7587916" y="3274808"/>
+                <a:ext cx="2374157" cy="1574856"/>
+                <a:chOff x="7012481" y="3665569"/>
+                <a:chExt cx="2374157" cy="1574856"/>
+              </a:xfrm>
+            </p:grpSpPr>
+            <p:sp>
+              <p:nvSpPr>
+                <p:cNvPr id="53" name="사각형: 둥근 모서리 52">
+                  <a:extLst>
+                    <a:ext uri="{FF2B5EF4-FFF2-40B4-BE49-F238E27FC236}">
+                      <a16:creationId xmlns:a16="http://schemas.microsoft.com/office/drawing/2014/main" id="{A68440D5-1A01-E193-B3D4-5D1CCC0C31A9}"/>
+                    </a:ext>
+                  </a:extLst>
+                </p:cNvPr>
+                <p:cNvSpPr/>
+                <p:nvPr/>
+              </p:nvSpPr>
+              <p:spPr>
+                <a:xfrm>
+                  <a:off x="7012481" y="3665569"/>
+                  <a:ext cx="2374157" cy="1574856"/>
+                </a:xfrm>
+                <a:prstGeom prst="roundRect">
+                  <a:avLst/>
+                </a:prstGeom>
+                <a:solidFill>
+                  <a:schemeClr val="bg1"/>
+                </a:solidFill>
+                <a:ln>
                   <a:solidFill>
                     <a:schemeClr val="tx1"/>
                   </a:solidFill>
-                  <a:latin typeface="a시월구일3" panose="02020600000000000000" pitchFamily="18" charset="-127"/>
-                  <a:ea typeface="a시월구일3" panose="02020600000000000000" pitchFamily="18" charset="-127"/>
-                  <a:cs typeface="Noto Sans Disp ExtBd" panose="020B0902040504020204" pitchFamily="34"/>
-                </a:rPr>
-                <a:t>지역</a:t>
-              </a:r>
-              <a:endParaRPr lang="en-US" altLang="ko-KR" sz="2000" dirty="0">
-                <a:solidFill>
-                  <a:schemeClr val="tx1"/>
-                </a:solidFill>
-                <a:latin typeface="a시월구일3" panose="02020600000000000000" pitchFamily="18" charset="-127"/>
-                <a:ea typeface="a시월구일3" panose="02020600000000000000" pitchFamily="18" charset="-127"/>
-                <a:cs typeface="Noto Sans Disp ExtBd" panose="020B0902040504020204" pitchFamily="34"/>
-              </a:endParaRPr>
-            </a:p>
-            <a:p>
-              <a:pPr algn="ctr"/>
-              <a:r>
-                <a:rPr lang="ko-KR" altLang="en-US" sz="2000" dirty="0">
-                  <a:solidFill>
-                    <a:schemeClr val="tx1"/>
-                  </a:solidFill>
-                  <a:latin typeface="a시월구일3" panose="02020600000000000000" pitchFamily="18" charset="-127"/>
-                  <a:ea typeface="a시월구일3" panose="02020600000000000000" pitchFamily="18" charset="-127"/>
-                  <a:cs typeface="Noto Sans Disp ExtBd" panose="020B0902040504020204" pitchFamily="34"/>
-                </a:rPr>
-                <a:t>분석</a:t>
-              </a:r>
-            </a:p>
-          </p:txBody>
-        </p:sp>
-      </p:grpSp>
-      <p:grpSp>
-        <p:nvGrpSpPr>
-          <p:cNvPr id="21" name="그룹 20">
-            <a:extLst>
-              <a:ext uri="{FF2B5EF4-FFF2-40B4-BE49-F238E27FC236}">
-                <a16:creationId xmlns:a16="http://schemas.microsoft.com/office/drawing/2014/main" id="{B95F4C33-FF4C-AA7B-CDD5-2127BDF0F48D}"/>
-              </a:ext>
-            </a:extLst>
-          </p:cNvPr>
-          <p:cNvGrpSpPr/>
-          <p:nvPr/>
-        </p:nvGrpSpPr>
-        <p:grpSpPr>
-          <a:xfrm>
-            <a:off x="317986" y="4970296"/>
-            <a:ext cx="5169527" cy="1396375"/>
-            <a:chOff x="317986" y="5171739"/>
-            <a:chExt cx="5169527" cy="1396375"/>
-          </a:xfrm>
-        </p:grpSpPr>
-        <p:grpSp>
-          <p:nvGrpSpPr>
-            <p:cNvPr id="15" name="그룹 14">
-              <a:extLst>
-                <a:ext uri="{FF2B5EF4-FFF2-40B4-BE49-F238E27FC236}">
-                  <a16:creationId xmlns:a16="http://schemas.microsoft.com/office/drawing/2014/main" id="{038B5FD4-08A4-9EB6-079A-B8F1E916308C}"/>
-                </a:ext>
-              </a:extLst>
-            </p:cNvPr>
-            <p:cNvGrpSpPr/>
-            <p:nvPr/>
-          </p:nvGrpSpPr>
-          <p:grpSpPr>
-            <a:xfrm>
-              <a:off x="1485901" y="5457514"/>
-              <a:ext cx="4001612" cy="877693"/>
-              <a:chOff x="147086" y="4430143"/>
-              <a:chExt cx="1923374" cy="1496149"/>
-            </a:xfrm>
-          </p:grpSpPr>
-          <p:sp>
-            <p:nvSpPr>
-              <p:cNvPr id="16" name="사각형: 둥근 모서리 15">
-                <a:extLst>
-                  <a:ext uri="{FF2B5EF4-FFF2-40B4-BE49-F238E27FC236}">
-                    <a16:creationId xmlns:a16="http://schemas.microsoft.com/office/drawing/2014/main" id="{052C4777-FA42-CF81-313C-380F28DB5619}"/>
-                  </a:ext>
-                </a:extLst>
-              </p:cNvPr>
-              <p:cNvSpPr/>
-              <p:nvPr/>
-            </p:nvSpPr>
-            <p:spPr>
-              <a:xfrm>
-                <a:off x="147086" y="4430143"/>
-                <a:ext cx="1890875" cy="1496149"/>
-              </a:xfrm>
-              <a:prstGeom prst="roundRect">
-                <a:avLst>
-                  <a:gd name="adj" fmla="val 9116"/>
-                </a:avLst>
-              </a:prstGeom>
-              <a:solidFill>
-                <a:schemeClr val="bg1"/>
-              </a:solidFill>
-              <a:ln>
-                <a:solidFill>
-                  <a:schemeClr val="bg2">
-                    <a:lumMod val="90000"/>
+                </a:ln>
+              </p:spPr>
+              <p:style>
+                <a:lnRef idx="2">
+                  <a:schemeClr val="accent1">
+                    <a:shade val="15000"/>
                   </a:schemeClr>
-                </a:solidFill>
-              </a:ln>
-            </p:spPr>
-            <p:style>
-              <a:lnRef idx="2">
-                <a:schemeClr val="accent1">
-                  <a:shade val="15000"/>
-                </a:schemeClr>
-              </a:lnRef>
-              <a:fillRef idx="1">
-                <a:schemeClr val="accent1"/>
-              </a:fillRef>
-              <a:effectRef idx="0">
-                <a:schemeClr val="accent1"/>
-              </a:effectRef>
-              <a:fontRef idx="minor">
-                <a:schemeClr val="lt1"/>
-              </a:fontRef>
-            </p:style>
-            <p:txBody>
-              <a:bodyPr rtlCol="0" anchor="ctr"/>
-              <a:lstStyle/>
-              <a:p>
-                <a:pPr algn="ctr"/>
-                <a:endParaRPr lang="ko-KR" altLang="en-US" dirty="0"/>
-              </a:p>
-            </p:txBody>
-          </p:sp>
-          <p:sp>
-            <p:nvSpPr>
-              <p:cNvPr id="17" name="TextBox 16">
-                <a:extLst>
-                  <a:ext uri="{FF2B5EF4-FFF2-40B4-BE49-F238E27FC236}">
-                    <a16:creationId xmlns:a16="http://schemas.microsoft.com/office/drawing/2014/main" id="{BE4F8A0B-7AAB-0DBD-E8DB-E59B14DDCBBB}"/>
-                  </a:ext>
-                </a:extLst>
-              </p:cNvPr>
-              <p:cNvSpPr txBox="1"/>
-              <p:nvPr/>
-            </p:nvSpPr>
-            <p:spPr>
-              <a:xfrm>
-                <a:off x="407590" y="4882898"/>
-                <a:ext cx="1662870" cy="493169"/>
-              </a:xfrm>
-              <a:prstGeom prst="rect">
-                <a:avLst/>
-              </a:prstGeom>
-              <a:noFill/>
-            </p:spPr>
-            <p:txBody>
-              <a:bodyPr wrap="square" lIns="0" tIns="0" rIns="0" bIns="0" rtlCol="0" anchor="t">
-                <a:spAutoFit/>
-              </a:bodyPr>
-              <a:lstStyle/>
-              <a:p>
-                <a:pPr>
-                  <a:lnSpc>
-                    <a:spcPct val="130000"/>
-                  </a:lnSpc>
-                </a:pPr>
-                <a:r>
-                  <a:rPr lang="ko-KR" altLang="en-US" sz="1600" dirty="0">
+                </a:lnRef>
+                <a:fillRef idx="1">
+                  <a:schemeClr val="accent1"/>
+                </a:fillRef>
+                <a:effectRef idx="0">
+                  <a:schemeClr val="accent1"/>
+                </a:effectRef>
+                <a:fontRef idx="minor">
+                  <a:schemeClr val="lt1"/>
+                </a:fontRef>
+              </p:style>
+              <p:txBody>
+                <a:bodyPr rtlCol="0" anchor="ctr"/>
+                <a:lstStyle/>
+                <a:p>
+                  <a:pPr algn="ctr"/>
+                  <a:endParaRPr lang="ko-KR" altLang="en-US" dirty="0">
+                    <a:solidFill>
+                      <a:schemeClr val="tx1"/>
+                    </a:solidFill>
+                    <a:latin typeface="a시월구일3" panose="02020600000000000000" pitchFamily="18" charset="-127"/>
+                    <a:ea typeface="a시월구일3" panose="02020600000000000000" pitchFamily="18" charset="-127"/>
+                    <a:cs typeface="Noto Sans Disp ExtBd" panose="020B0902040504020204" pitchFamily="34"/>
+                  </a:endParaRPr>
+                </a:p>
+              </p:txBody>
+            </p:sp>
+            <p:sp>
+              <p:nvSpPr>
+                <p:cNvPr id="54" name="TextBox 53">
+                  <a:extLst>
+                    <a:ext uri="{FF2B5EF4-FFF2-40B4-BE49-F238E27FC236}">
+                      <a16:creationId xmlns:a16="http://schemas.microsoft.com/office/drawing/2014/main" id="{B8C58EB1-AD3F-069B-15FB-843CD456F85D}"/>
+                    </a:ext>
+                  </a:extLst>
+                </p:cNvPr>
+                <p:cNvSpPr txBox="1"/>
+                <p:nvPr/>
+              </p:nvSpPr>
+              <p:spPr>
+                <a:xfrm>
+                  <a:off x="7482560" y="3858190"/>
+                  <a:ext cx="1433999" cy="276999"/>
+                </a:xfrm>
+                <a:prstGeom prst="rect">
+                  <a:avLst/>
+                </a:prstGeom>
+                <a:noFill/>
+              </p:spPr>
+              <p:txBody>
+                <a:bodyPr wrap="square" lIns="0" tIns="0" rIns="0" bIns="0" rtlCol="0" anchor="t">
+                  <a:spAutoFit/>
+                </a:bodyPr>
+                <a:lstStyle/>
+                <a:p>
+                  <a:pPr algn="ctr"/>
+                  <a:r>
+                    <a:rPr lang="ko-KR" altLang="en-US" dirty="0">
+                      <a:latin typeface="a시월구일3" panose="02020600000000000000" pitchFamily="18" charset="-127"/>
+                      <a:ea typeface="a시월구일3" panose="02020600000000000000" pitchFamily="18" charset="-127"/>
+                      <a:cs typeface="Noto Sans Disp ExtBd" panose="020B0902040504020204" pitchFamily="34"/>
+                    </a:rPr>
+                    <a:t>위험도 분석</a:t>
+                  </a:r>
+                </a:p>
+              </p:txBody>
+            </p:sp>
+            <p:sp>
+              <p:nvSpPr>
+                <p:cNvPr id="55" name="TextBox 54">
+                  <a:extLst>
+                    <a:ext uri="{FF2B5EF4-FFF2-40B4-BE49-F238E27FC236}">
+                      <a16:creationId xmlns:a16="http://schemas.microsoft.com/office/drawing/2014/main" id="{FFA87F61-D0D4-C8D3-D62D-BF1A70BABCAA}"/>
+                    </a:ext>
+                  </a:extLst>
+                </p:cNvPr>
+                <p:cNvSpPr txBox="1"/>
+                <p:nvPr/>
+              </p:nvSpPr>
+              <p:spPr>
+                <a:xfrm>
+                  <a:off x="7278070" y="4349199"/>
+                  <a:ext cx="1842979" cy="609398"/>
+                </a:xfrm>
+                <a:prstGeom prst="rect">
+                  <a:avLst/>
+                </a:prstGeom>
+                <a:noFill/>
+              </p:spPr>
+              <p:txBody>
+                <a:bodyPr wrap="square" lIns="0" tIns="0" rIns="0" bIns="0" rtlCol="0" anchor="t">
+                  <a:spAutoFit/>
+                </a:bodyPr>
+                <a:lstStyle/>
+                <a:p>
+                  <a:pPr algn="ctr">
+                    <a:lnSpc>
+                      <a:spcPct val="130000"/>
+                    </a:lnSpc>
+                  </a:pPr>
+                  <a:r>
+                    <a:rPr lang="ko-KR" altLang="en-US" sz="1600" dirty="0">
+                      <a:latin typeface="a시월구일1" panose="02020600000000000000" pitchFamily="18" charset="-127"/>
+                      <a:ea typeface="a시월구일1" panose="02020600000000000000" pitchFamily="18" charset="-127"/>
+                      <a:cs typeface="Noto Sans Disp ExtBd" panose="020B0902040504020204" pitchFamily="34"/>
+                    </a:rPr>
+                    <a:t>실질적 건강 위험도 산출</a:t>
+                  </a:r>
+                  <a:endParaRPr lang="en-US" altLang="ko-KR" sz="1600" dirty="0">
                     <a:latin typeface="a시월구일1" panose="02020600000000000000" pitchFamily="18" charset="-127"/>
                     <a:ea typeface="a시월구일1" panose="02020600000000000000" pitchFamily="18" charset="-127"/>
                     <a:cs typeface="Noto Sans Disp ExtBd" panose="020B0902040504020204" pitchFamily="34"/>
-                  </a:rPr>
-                  <a:t>실질적 건강 위험도 산출</a:t>
-                </a:r>
-                <a:endParaRPr lang="en-US" altLang="ko-KR" sz="1600" dirty="0">
-                  <a:latin typeface="a시월구일1" panose="02020600000000000000" pitchFamily="18" charset="-127"/>
-                  <a:ea typeface="a시월구일1" panose="02020600000000000000" pitchFamily="18" charset="-127"/>
-                  <a:cs typeface="Noto Sans Disp ExtBd" panose="020B0902040504020204" pitchFamily="34"/>
-                </a:endParaRPr>
-              </a:p>
-            </p:txBody>
-          </p:sp>
+                  </a:endParaRPr>
+                </a:p>
+              </p:txBody>
+            </p:sp>
+          </p:grpSp>
         </p:grpSp>
-        <p:sp>
-          <p:nvSpPr>
-            <p:cNvPr id="11" name="타원 10">
-              <a:extLst>
-                <a:ext uri="{FF2B5EF4-FFF2-40B4-BE49-F238E27FC236}">
-                  <a16:creationId xmlns:a16="http://schemas.microsoft.com/office/drawing/2014/main" id="{940EF828-5644-03E3-0DF1-BB94F018A383}"/>
-                </a:ext>
-              </a:extLst>
-            </p:cNvPr>
-            <p:cNvSpPr/>
-            <p:nvPr/>
-          </p:nvSpPr>
-          <p:spPr>
-            <a:xfrm>
-              <a:off x="317986" y="5171739"/>
-              <a:ext cx="1396375" cy="1396375"/>
-            </a:xfrm>
-            <a:prstGeom prst="ellipse">
-              <a:avLst/>
-            </a:prstGeom>
-            <a:solidFill>
-              <a:schemeClr val="bg1"/>
-            </a:solidFill>
-            <a:ln>
-              <a:solidFill>
-                <a:schemeClr val="tx1"/>
-              </a:solidFill>
-            </a:ln>
-          </p:spPr>
-          <p:style>
-            <a:lnRef idx="2">
-              <a:schemeClr val="accent1">
-                <a:shade val="15000"/>
-              </a:schemeClr>
-            </a:lnRef>
-            <a:fillRef idx="1">
-              <a:schemeClr val="accent1"/>
-            </a:fillRef>
-            <a:effectRef idx="0">
-              <a:schemeClr val="accent1"/>
-            </a:effectRef>
-            <a:fontRef idx="minor">
-              <a:schemeClr val="lt1"/>
-            </a:fontRef>
-          </p:style>
-          <p:txBody>
-            <a:bodyPr rtlCol="0" anchor="ctr"/>
-            <a:lstStyle/>
-            <a:p>
-              <a:pPr algn="ctr"/>
-              <a:r>
-                <a:rPr lang="ko-KR" altLang="en-US" sz="2000" dirty="0">
-                  <a:solidFill>
-                    <a:schemeClr val="tx1"/>
-                  </a:solidFill>
-                  <a:latin typeface="a시월구일3" panose="02020600000000000000" pitchFamily="18" charset="-127"/>
-                  <a:ea typeface="a시월구일3" panose="02020600000000000000" pitchFamily="18" charset="-127"/>
-                  <a:cs typeface="Noto Sans Disp ExtBd" panose="020B0902040504020204" pitchFamily="34"/>
-                </a:rPr>
-                <a:t>위험도</a:t>
-              </a:r>
-              <a:endParaRPr lang="en-US" altLang="ko-KR" sz="2000" dirty="0">
-                <a:solidFill>
-                  <a:schemeClr val="tx1"/>
-                </a:solidFill>
-                <a:latin typeface="a시월구일3" panose="02020600000000000000" pitchFamily="18" charset="-127"/>
-                <a:ea typeface="a시월구일3" panose="02020600000000000000" pitchFamily="18" charset="-127"/>
-                <a:cs typeface="Noto Sans Disp ExtBd" panose="020B0902040504020204" pitchFamily="34"/>
-              </a:endParaRPr>
-            </a:p>
-            <a:p>
-              <a:pPr algn="ctr"/>
-              <a:r>
-                <a:rPr lang="ko-KR" altLang="en-US" sz="2000" dirty="0">
-                  <a:solidFill>
-                    <a:schemeClr val="tx1"/>
-                  </a:solidFill>
-                  <a:latin typeface="a시월구일3" panose="02020600000000000000" pitchFamily="18" charset="-127"/>
-                  <a:ea typeface="a시월구일3" panose="02020600000000000000" pitchFamily="18" charset="-127"/>
-                  <a:cs typeface="Noto Sans Disp ExtBd" panose="020B0902040504020204" pitchFamily="34"/>
-                </a:rPr>
-                <a:t>분석</a:t>
-              </a:r>
-            </a:p>
-          </p:txBody>
-        </p:sp>
       </p:grpSp>
     </p:spTree>
     <p:extLst>
@@ -5378,187 +5252,12 @@
           <a:chExt cx="0" cy="0"/>
         </a:xfrm>
       </p:grpSpPr>
-      <p:sp>
-        <p:nvSpPr>
-          <p:cNvPr id="33" name="TextBox 32">
-            <a:extLst>
-              <a:ext uri="{FF2B5EF4-FFF2-40B4-BE49-F238E27FC236}">
-                <a16:creationId xmlns:a16="http://schemas.microsoft.com/office/drawing/2014/main" id="{94C8AC2A-0665-706E-362A-04FB222F17C9}"/>
-              </a:ext>
-            </a:extLst>
-          </p:cNvPr>
-          <p:cNvSpPr txBox="1"/>
-          <p:nvPr/>
-        </p:nvSpPr>
-        <p:spPr>
-          <a:xfrm>
-            <a:off x="509769" y="411763"/>
-            <a:ext cx="1671933" cy="489365"/>
-          </a:xfrm>
-          <a:prstGeom prst="rect">
-            <a:avLst/>
-          </a:prstGeom>
-          <a:noFill/>
-        </p:spPr>
-        <p:txBody>
-          <a:bodyPr wrap="none" lIns="0" tIns="0" rIns="0" bIns="0" rtlCol="0" anchor="t">
-            <a:spAutoFit/>
-          </a:bodyPr>
-          <a:lstStyle/>
-          <a:p>
-            <a:pPr>
-              <a:lnSpc>
-                <a:spcPct val="150000"/>
-              </a:lnSpc>
-            </a:pPr>
-            <a:r>
-              <a:rPr lang="en-US" altLang="ko-KR" sz="2400" dirty="0">
-                <a:latin typeface="a시월구일3" panose="02020600000000000000" pitchFamily="18" charset="-127"/>
-                <a:ea typeface="a시월구일3" panose="02020600000000000000" pitchFamily="18" charset="-127"/>
-                <a:cs typeface="+mj-cs"/>
-              </a:rPr>
-              <a:t>3. </a:t>
-            </a:r>
-            <a:r>
-              <a:rPr lang="ko-KR" altLang="en-US" sz="2400" dirty="0">
-                <a:latin typeface="a시월구일3" panose="02020600000000000000" pitchFamily="18" charset="-127"/>
-                <a:ea typeface="a시월구일3" panose="02020600000000000000" pitchFamily="18" charset="-127"/>
-                <a:cs typeface="+mj-cs"/>
-              </a:rPr>
-              <a:t>개발 목표</a:t>
-            </a:r>
-            <a:endParaRPr lang="en-US" altLang="ko-KR" sz="2400" dirty="0">
-              <a:latin typeface="a시월구일3" panose="02020600000000000000" pitchFamily="18" charset="-127"/>
-              <a:ea typeface="a시월구일3" panose="02020600000000000000" pitchFamily="18" charset="-127"/>
-              <a:cs typeface="+mj-cs"/>
-            </a:endParaRPr>
-          </a:p>
-        </p:txBody>
-      </p:sp>
-      <p:sp>
-        <p:nvSpPr>
-          <p:cNvPr id="39" name="TextBox 38">
-            <a:extLst>
-              <a:ext uri="{FF2B5EF4-FFF2-40B4-BE49-F238E27FC236}">
-                <a16:creationId xmlns:a16="http://schemas.microsoft.com/office/drawing/2014/main" id="{520B2A62-ABC5-C062-1DE5-7021749E2F18}"/>
-              </a:ext>
-            </a:extLst>
-          </p:cNvPr>
-          <p:cNvSpPr txBox="1"/>
-          <p:nvPr/>
-        </p:nvSpPr>
-        <p:spPr>
-          <a:xfrm>
-            <a:off x="7391982" y="3219560"/>
-            <a:ext cx="4731659" cy="961802"/>
-          </a:xfrm>
-          <a:prstGeom prst="rect">
-            <a:avLst/>
-          </a:prstGeom>
-          <a:noFill/>
-        </p:spPr>
-        <p:txBody>
-          <a:bodyPr wrap="square">
-            <a:spAutoFit/>
-          </a:bodyPr>
-          <a:lstStyle/>
-          <a:p>
-            <a:pPr algn="ctr">
-              <a:lnSpc>
-                <a:spcPct val="150000"/>
-              </a:lnSpc>
-            </a:pPr>
-            <a:r>
-              <a:rPr lang="ko-KR" altLang="en-US" dirty="0">
-                <a:latin typeface="a시월구일4" panose="02020600000000000000" pitchFamily="18" charset="-127"/>
-                <a:ea typeface="a시월구일4" panose="02020600000000000000" pitchFamily="18" charset="-127"/>
-              </a:rPr>
-              <a:t>자치구별</a:t>
-            </a:r>
-            <a:r>
-              <a:rPr lang="ko-KR" altLang="en-US" sz="2000" dirty="0">
-                <a:latin typeface="a시월구일4" panose="02020600000000000000" pitchFamily="18" charset="-127"/>
-                <a:ea typeface="a시월구일4" panose="02020600000000000000" pitchFamily="18" charset="-127"/>
-              </a:rPr>
-              <a:t> </a:t>
-            </a:r>
-            <a:r>
-              <a:rPr lang="ko-KR" altLang="en-US" sz="2000" dirty="0">
-                <a:solidFill>
-                  <a:srgbClr val="0070C0"/>
-                </a:solidFill>
-                <a:latin typeface="a시월구일4" panose="02020600000000000000" pitchFamily="18" charset="-127"/>
-                <a:ea typeface="a시월구일4" panose="02020600000000000000" pitchFamily="18" charset="-127"/>
-              </a:rPr>
-              <a:t>보건 취약 유형을 도출</a:t>
-            </a:r>
-            <a:r>
-              <a:rPr lang="ko-KR" altLang="en-US" dirty="0">
-                <a:latin typeface="a시월구일1" panose="02020600000000000000" pitchFamily="18" charset="-127"/>
-                <a:ea typeface="a시월구일1" panose="02020600000000000000" pitchFamily="18" charset="-127"/>
-              </a:rPr>
-              <a:t>하고</a:t>
-            </a:r>
-            <a:r>
-              <a:rPr lang="en-US" altLang="ko-KR" dirty="0">
-                <a:latin typeface="a시월구일1" panose="02020600000000000000" pitchFamily="18" charset="-127"/>
-                <a:ea typeface="a시월구일1" panose="02020600000000000000" pitchFamily="18" charset="-127"/>
-              </a:rPr>
-              <a:t>,</a:t>
-            </a:r>
-          </a:p>
-          <a:p>
-            <a:pPr algn="ctr">
-              <a:lnSpc>
-                <a:spcPct val="150000"/>
-              </a:lnSpc>
-            </a:pPr>
-            <a:r>
-              <a:rPr lang="ko-KR" altLang="en-US" sz="2000" dirty="0">
-                <a:solidFill>
-                  <a:srgbClr val="0070C0"/>
-                </a:solidFill>
-                <a:latin typeface="a시월구일4" panose="02020600000000000000" pitchFamily="18" charset="-127"/>
-                <a:ea typeface="a시월구일4" panose="02020600000000000000" pitchFamily="18" charset="-127"/>
-              </a:rPr>
-              <a:t>정책 의사결정을 지원</a:t>
-            </a:r>
-            <a:r>
-              <a:rPr lang="ko-KR" altLang="en-US" dirty="0">
-                <a:solidFill>
-                  <a:srgbClr val="0070C0"/>
-                </a:solidFill>
-                <a:latin typeface="a시월구일4" panose="02020600000000000000" pitchFamily="18" charset="-127"/>
-                <a:ea typeface="a시월구일4" panose="02020600000000000000" pitchFamily="18" charset="-127"/>
-              </a:rPr>
-              <a:t>하는 시스템을 </a:t>
-            </a:r>
-            <a:r>
-              <a:rPr lang="ko-KR" altLang="en-US" sz="2000" dirty="0">
-                <a:solidFill>
-                  <a:srgbClr val="0070C0"/>
-                </a:solidFill>
-                <a:latin typeface="a시월구일4" panose="02020600000000000000" pitchFamily="18" charset="-127"/>
-                <a:ea typeface="a시월구일4" panose="02020600000000000000" pitchFamily="18" charset="-127"/>
-              </a:rPr>
-              <a:t>개발</a:t>
-            </a:r>
-            <a:endParaRPr lang="ko-KR" altLang="en-US" dirty="0">
-              <a:solidFill>
-                <a:srgbClr val="0070C0"/>
-              </a:solidFill>
-              <a:latin typeface="a시월구일4" panose="02020600000000000000" pitchFamily="18" charset="-127"/>
-              <a:ea typeface="a시월구일4" panose="02020600000000000000" pitchFamily="18" charset="-127"/>
-            </a:endParaRPr>
-          </a:p>
-        </p:txBody>
-      </p:sp>
       <p:pic>
         <p:nvPicPr>
-          <p:cNvPr id="19" name="그림 18">
-            <a:extLst>
-              <a:ext uri="{FF2B5EF4-FFF2-40B4-BE49-F238E27FC236}">
-                <a16:creationId xmlns:a16="http://schemas.microsoft.com/office/drawing/2014/main" id="{7EA68E1C-9E6C-C8E2-FDDA-E5A564AFECBF}"/>
+          <p:cNvPr id="42" name="그림 41">
+            <a:extLst>
+              <a:ext uri="{FF2B5EF4-FFF2-40B4-BE49-F238E27FC236}">
+                <a16:creationId xmlns:a16="http://schemas.microsoft.com/office/drawing/2014/main" id="{BBACB6E4-D523-02D8-9358-4DC4D26C3E60}"/>
               </a:ext>
             </a:extLst>
           </p:cNvPr>
@@ -5570,7 +5269,7 @@
         <p:blipFill>
           <a:blip r:embed="rId2">
             <a:duotone>
-              <a:schemeClr val="accent2">
+              <a:schemeClr val="bg2">
                 <a:shade val="45000"/>
                 <a:satMod val="135000"/>
               </a:schemeClr>
@@ -5587,9 +5286,9 @@
           </a:stretch>
         </p:blipFill>
         <p:spPr>
-          <a:xfrm rot="5400000">
-            <a:off x="4503141" y="3012257"/>
-            <a:ext cx="4336782" cy="1643401"/>
+          <a:xfrm rot="10800000">
+            <a:off x="3607111" y="3516380"/>
+            <a:ext cx="5008076" cy="1456490"/>
           </a:xfrm>
           <a:prstGeom prst="rect">
             <a:avLst/>
@@ -5598,10 +5297,10 @@
       </p:pic>
       <p:grpSp>
         <p:nvGrpSpPr>
-          <p:cNvPr id="13" name="그룹 12">
-            <a:extLst>
-              <a:ext uri="{FF2B5EF4-FFF2-40B4-BE49-F238E27FC236}">
-                <a16:creationId xmlns:a16="http://schemas.microsoft.com/office/drawing/2014/main" id="{7295F48A-07CA-1DD8-058D-31359C4008DD}"/>
+          <p:cNvPr id="19" name="그룹 18">
+            <a:extLst>
+              <a:ext uri="{FF2B5EF4-FFF2-40B4-BE49-F238E27FC236}">
+                <a16:creationId xmlns:a16="http://schemas.microsoft.com/office/drawing/2014/main" id="{6D676991-536F-16C6-7317-924B248399E3}"/>
               </a:ext>
             </a:extLst>
           </p:cNvPr>
@@ -5610,7 +5309,7 @@
         </p:nvGrpSpPr>
         <p:grpSpPr>
           <a:xfrm>
-            <a:off x="227984" y="1300025"/>
+            <a:off x="-6607749" y="1233365"/>
             <a:ext cx="6321157" cy="1371582"/>
             <a:chOff x="137242" y="1222829"/>
             <a:chExt cx="6321157" cy="1371582"/>
@@ -5618,10 +5317,10 @@
         </p:grpSpPr>
         <p:sp>
           <p:nvSpPr>
-            <p:cNvPr id="3" name="사각형: 둥근 모서리 2">
+            <p:cNvPr id="20" name="사각형: 둥근 모서리 19">
               <a:extLst>
                 <a:ext uri="{FF2B5EF4-FFF2-40B4-BE49-F238E27FC236}">
-                  <a16:creationId xmlns:a16="http://schemas.microsoft.com/office/drawing/2014/main" id="{FF12169B-7F53-5127-DAA9-F3A5635A213B}"/>
+                  <a16:creationId xmlns:a16="http://schemas.microsoft.com/office/drawing/2014/main" id="{6B1293FF-D960-94C3-47F5-93E102BE1766}"/>
                 </a:ext>
               </a:extLst>
             </p:cNvPr>
@@ -5676,10 +5375,10 @@
         </p:sp>
         <p:sp>
           <p:nvSpPr>
-            <p:cNvPr id="27" name="TextBox 26">
+            <p:cNvPr id="21" name="TextBox 20">
               <a:extLst>
                 <a:ext uri="{FF2B5EF4-FFF2-40B4-BE49-F238E27FC236}">
-                  <a16:creationId xmlns:a16="http://schemas.microsoft.com/office/drawing/2014/main" id="{63224FB8-B737-D457-16C7-5E3F5EA31015}"/>
+                  <a16:creationId xmlns:a16="http://schemas.microsoft.com/office/drawing/2014/main" id="{789A24E5-D3DD-3FB8-43D4-DB995F49C246}"/>
                 </a:ext>
               </a:extLst>
             </p:cNvPr>
@@ -5799,48 +5498,6 @@
                 <a:buFont typeface="Arial" panose="020B0604020202020204" pitchFamily="34" charset="0"/>
                 <a:buChar char="•"/>
               </a:pPr>
-              <a:r>
-                <a:rPr kumimoji="1" lang="ko-KR" altLang="en-US" sz="1400" dirty="0">
-                  <a:ln w="12700">
-                    <a:solidFill>
-                      <a:schemeClr val="tx1">
-                        <a:alpha val="5000"/>
-                      </a:schemeClr>
-                    </a:solidFill>
-                  </a:ln>
-                  <a:solidFill>
-                    <a:schemeClr val="tx1">
-                      <a:lumMod val="85000"/>
-                      <a:lumOff val="15000"/>
-                    </a:schemeClr>
-                  </a:solidFill>
-                  <a:latin typeface="a시월구일3" panose="02020600000000000000" pitchFamily="18" charset="-127"/>
-                  <a:ea typeface="a시월구일3" panose="02020600000000000000" pitchFamily="18" charset="-127"/>
-                  <a:cs typeface="Pretendard" panose="02000503000000020004" pitchFamily="2" charset="-127"/>
-                </a:rPr>
-                <a:t>군집별 주요 변수 평균값을 비교</a:t>
-              </a:r>
-              <a:r>
-                <a:rPr kumimoji="1" lang="ko-KR" altLang="en-US" sz="1400" dirty="0">
-                  <a:ln w="12700">
-                    <a:solidFill>
-                      <a:schemeClr val="tx1">
-                        <a:alpha val="5000"/>
-                      </a:schemeClr>
-                    </a:solidFill>
-                  </a:ln>
-                  <a:solidFill>
-                    <a:schemeClr val="tx1">
-                      <a:lumMod val="85000"/>
-                      <a:lumOff val="15000"/>
-                    </a:schemeClr>
-                  </a:solidFill>
-                  <a:latin typeface="a시월구일1" panose="02020600000000000000" pitchFamily="18" charset="-127"/>
-                  <a:ea typeface="a시월구일1" panose="02020600000000000000" pitchFamily="18" charset="-127"/>
-                  <a:cs typeface="Pretendard" panose="02000503000000020004" pitchFamily="2" charset="-127"/>
-                </a:rPr>
-                <a:t>하여 각 유형의 특징을 해석</a:t>
-              </a:r>
               <a:endParaRPr kumimoji="1" lang="en-US" altLang="ko-KR" sz="1400" dirty="0">
                 <a:ln w="12700">
                   <a:solidFill>
@@ -5864,10 +5521,10 @@
         </p:sp>
         <p:sp>
           <p:nvSpPr>
-            <p:cNvPr id="5" name="사각형: 둥근 모서리 4">
+            <p:cNvPr id="22" name="사각형: 둥근 모서리 21">
               <a:extLst>
                 <a:ext uri="{FF2B5EF4-FFF2-40B4-BE49-F238E27FC236}">
-                  <a16:creationId xmlns:a16="http://schemas.microsoft.com/office/drawing/2014/main" id="{A7A43165-4AC0-1264-B7B0-456BDA4F308F}"/>
+                  <a16:creationId xmlns:a16="http://schemas.microsoft.com/office/drawing/2014/main" id="{4172CA15-130D-3235-8782-EDAAC6A57288}"/>
                 </a:ext>
               </a:extLst>
             </p:cNvPr>
@@ -5876,8 +5533,8 @@
           </p:nvSpPr>
           <p:spPr>
             <a:xfrm>
-              <a:off x="137243" y="1222829"/>
-              <a:ext cx="1643400" cy="377331"/>
+              <a:off x="137242" y="1222829"/>
+              <a:ext cx="1953717" cy="377331"/>
             </a:xfrm>
             <a:prstGeom prst="roundRect">
               <a:avLst>
@@ -5919,7 +5576,7 @@
             <a:p>
               <a:pPr algn="ctr"/>
               <a:r>
-                <a:rPr lang="en-US" altLang="ko-KR" sz="2000" dirty="0">
+                <a:rPr lang="en-US" altLang="ko-KR" sz="2000">
                   <a:solidFill>
                     <a:schemeClr val="tx1"/>
                   </a:solidFill>
@@ -5927,7 +5584,7 @@
                   <a:ea typeface="a시월구일3" panose="02020600000000000000" pitchFamily="18" charset="-127"/>
                   <a:cs typeface="Noto Sans Disp ExtBd" panose="020B0902040504020204" pitchFamily="34"/>
                 </a:rPr>
-                <a:t>AI Model</a:t>
+                <a:t>Modeling(ML)</a:t>
               </a:r>
               <a:endParaRPr lang="ko-KR" altLang="en-US" sz="2000" dirty="0">
                 <a:solidFill>
@@ -5943,10 +5600,10 @@
       </p:grpSp>
       <p:grpSp>
         <p:nvGrpSpPr>
-          <p:cNvPr id="15" name="그룹 14">
-            <a:extLst>
-              <a:ext uri="{FF2B5EF4-FFF2-40B4-BE49-F238E27FC236}">
-                <a16:creationId xmlns:a16="http://schemas.microsoft.com/office/drawing/2014/main" id="{4B13B8AA-D53F-3B2A-6E36-1334BD0756FC}"/>
+          <p:cNvPr id="23" name="그룹 22">
+            <a:extLst>
+              <a:ext uri="{FF2B5EF4-FFF2-40B4-BE49-F238E27FC236}">
+                <a16:creationId xmlns:a16="http://schemas.microsoft.com/office/drawing/2014/main" id="{29C870CB-0BBC-8CB3-AF57-ECA34C0B41EC}"/>
               </a:ext>
             </a:extLst>
           </p:cNvPr>
@@ -5955,18 +5612,18 @@
         </p:nvGrpSpPr>
         <p:grpSpPr>
           <a:xfrm>
-            <a:off x="227984" y="2841042"/>
-            <a:ext cx="6443549" cy="1422441"/>
-            <a:chOff x="137242" y="2859223"/>
-            <a:chExt cx="6443549" cy="1422441"/>
+            <a:off x="-6607749" y="3013907"/>
+            <a:ext cx="6443549" cy="1215027"/>
+            <a:chOff x="137242" y="3098748"/>
+            <a:chExt cx="6443549" cy="1215027"/>
           </a:xfrm>
         </p:grpSpPr>
         <p:sp>
           <p:nvSpPr>
-            <p:cNvPr id="12" name="사각형: 둥근 모서리 11">
+            <p:cNvPr id="24" name="사각형: 둥근 모서리 23">
               <a:extLst>
                 <a:ext uri="{FF2B5EF4-FFF2-40B4-BE49-F238E27FC236}">
-                  <a16:creationId xmlns:a16="http://schemas.microsoft.com/office/drawing/2014/main" id="{26C86896-F921-C8BF-AF42-56188E4468A0}"/>
+                  <a16:creationId xmlns:a16="http://schemas.microsoft.com/office/drawing/2014/main" id="{4AB9B18C-B247-D507-AFED-D97FA0CE7357}"/>
                 </a:ext>
               </a:extLst>
             </p:cNvPr>
@@ -6021,88 +5678,10 @@
         </p:sp>
         <p:sp>
           <p:nvSpPr>
-            <p:cNvPr id="9" name="사각형: 둥근 모서리 8">
+            <p:cNvPr id="25" name="TextBox 24">
               <a:extLst>
                 <a:ext uri="{FF2B5EF4-FFF2-40B4-BE49-F238E27FC236}">
-                  <a16:creationId xmlns:a16="http://schemas.microsoft.com/office/drawing/2014/main" id="{AEAEB14B-B945-8535-1500-54E5E9827A23}"/>
-                </a:ext>
-              </a:extLst>
-            </p:cNvPr>
-            <p:cNvSpPr/>
-            <p:nvPr/>
-          </p:nvSpPr>
-          <p:spPr>
-            <a:xfrm>
-              <a:off x="137243" y="2859223"/>
-              <a:ext cx="1643400" cy="377331"/>
-            </a:xfrm>
-            <a:prstGeom prst="roundRect">
-              <a:avLst>
-                <a:gd name="adj" fmla="val 16564"/>
-              </a:avLst>
-            </a:prstGeom>
-            <a:solidFill>
-              <a:schemeClr val="bg1">
-                <a:lumMod val="95000"/>
-              </a:schemeClr>
-            </a:solidFill>
-            <a:ln>
-              <a:solidFill>
-                <a:schemeClr val="bg2">
-                  <a:lumMod val="90000"/>
-                </a:schemeClr>
-              </a:solidFill>
-            </a:ln>
-          </p:spPr>
-          <p:style>
-            <a:lnRef idx="2">
-              <a:schemeClr val="accent1">
-                <a:shade val="15000"/>
-              </a:schemeClr>
-            </a:lnRef>
-            <a:fillRef idx="1">
-              <a:schemeClr val="accent1"/>
-            </a:fillRef>
-            <a:effectRef idx="0">
-              <a:schemeClr val="accent1"/>
-            </a:effectRef>
-            <a:fontRef idx="minor">
-              <a:schemeClr val="lt1"/>
-            </a:fontRef>
-          </p:style>
-          <p:txBody>
-            <a:bodyPr rtlCol="0" anchor="ctr"/>
-            <a:lstStyle/>
-            <a:p>
-              <a:pPr algn="ctr"/>
-              <a:r>
-                <a:rPr lang="en-US" altLang="ko-KR" sz="2000" dirty="0">
-                  <a:solidFill>
-                    <a:schemeClr val="tx1"/>
-                  </a:solidFill>
-                  <a:latin typeface="a시월구일3" panose="02020600000000000000" pitchFamily="18" charset="-127"/>
-                  <a:ea typeface="a시월구일3" panose="02020600000000000000" pitchFamily="18" charset="-127"/>
-                  <a:cs typeface="Noto Sans Disp ExtBd" panose="020B0902040504020204" pitchFamily="34"/>
-                </a:rPr>
-                <a:t>UI</a:t>
-              </a:r>
-              <a:endParaRPr lang="ko-KR" altLang="en-US" sz="2000" dirty="0">
-                <a:solidFill>
-                  <a:schemeClr val="tx1"/>
-                </a:solidFill>
-                <a:latin typeface="a시월구일3" panose="02020600000000000000" pitchFamily="18" charset="-127"/>
-                <a:ea typeface="a시월구일3" panose="02020600000000000000" pitchFamily="18" charset="-127"/>
-                <a:cs typeface="Noto Sans Disp ExtBd" panose="020B0902040504020204" pitchFamily="34"/>
-              </a:endParaRPr>
-            </a:p>
-          </p:txBody>
-        </p:sp>
-        <p:sp>
-          <p:nvSpPr>
-            <p:cNvPr id="28" name="TextBox 27">
-              <a:extLst>
-                <a:ext uri="{FF2B5EF4-FFF2-40B4-BE49-F238E27FC236}">
-                  <a16:creationId xmlns:a16="http://schemas.microsoft.com/office/drawing/2014/main" id="{AA880690-1BC0-75FB-D97C-DC20EAD83AB4}"/>
+                  <a16:creationId xmlns:a16="http://schemas.microsoft.com/office/drawing/2014/main" id="{FFE5A52B-6487-837F-610E-9046AB6FB0AF}"/>
                 </a:ext>
               </a:extLst>
             </p:cNvPr>
@@ -6112,7 +5691,7 @@
           <p:spPr>
             <a:xfrm>
               <a:off x="259635" y="3385892"/>
-              <a:ext cx="6321156" cy="608628"/>
+              <a:ext cx="6321156" cy="927883"/>
             </a:xfrm>
             <a:prstGeom prst="rect">
               <a:avLst/>
@@ -6172,7 +5751,97 @@
                   <a:ea typeface="a시월구일3" panose="02020600000000000000" pitchFamily="18" charset="-127"/>
                   <a:cs typeface="Pretendard" panose="02000503000000020004" pitchFamily="2" charset="-127"/>
                 </a:rPr>
-                <a:t>취약 유형 및 위험도를 직관적으로 확인</a:t>
+                <a:t>취약 유형도</a:t>
+              </a:r>
+              <a:r>
+                <a:rPr kumimoji="1" lang="en-US" altLang="ko-KR" sz="1400" dirty="0">
+                  <a:ln w="12700">
+                    <a:solidFill>
+                      <a:schemeClr val="tx1">
+                        <a:alpha val="5000"/>
+                      </a:schemeClr>
+                    </a:solidFill>
+                  </a:ln>
+                  <a:solidFill>
+                    <a:schemeClr val="tx1">
+                      <a:lumMod val="85000"/>
+                      <a:lumOff val="15000"/>
+                    </a:schemeClr>
+                  </a:solidFill>
+                  <a:latin typeface="a시월구일3" panose="02020600000000000000" pitchFamily="18" charset="-127"/>
+                  <a:ea typeface="a시월구일3" panose="02020600000000000000" pitchFamily="18" charset="-127"/>
+                  <a:cs typeface="Pretendard" panose="02000503000000020004" pitchFamily="2" charset="-127"/>
+                </a:rPr>
+                <a:t> </a:t>
+              </a:r>
+              <a:r>
+                <a:rPr kumimoji="1" lang="ko-KR" altLang="en-US" sz="1400" dirty="0">
+                  <a:ln w="12700">
+                    <a:solidFill>
+                      <a:schemeClr val="tx1">
+                        <a:alpha val="5000"/>
+                      </a:schemeClr>
+                    </a:solidFill>
+                  </a:ln>
+                  <a:solidFill>
+                    <a:schemeClr val="tx1">
+                      <a:lumMod val="85000"/>
+                      <a:lumOff val="15000"/>
+                    </a:schemeClr>
+                  </a:solidFill>
+                  <a:latin typeface="a시월구일3" panose="02020600000000000000" pitchFamily="18" charset="-127"/>
+                  <a:ea typeface="a시월구일3" panose="02020600000000000000" pitchFamily="18" charset="-127"/>
+                  <a:cs typeface="Pretendard" panose="02000503000000020004" pitchFamily="2" charset="-127"/>
+                </a:rPr>
+                <a:t>분석</a:t>
+              </a:r>
+              <a:endParaRPr kumimoji="1" lang="en-US" altLang="ko-KR" sz="1400" dirty="0">
+                <a:ln w="12700">
+                  <a:solidFill>
+                    <a:schemeClr val="tx1">
+                      <a:alpha val="5000"/>
+                    </a:schemeClr>
+                  </a:solidFill>
+                </a:ln>
+                <a:solidFill>
+                  <a:schemeClr val="tx1">
+                    <a:lumMod val="85000"/>
+                    <a:lumOff val="15000"/>
+                  </a:schemeClr>
+                </a:solidFill>
+                <a:latin typeface="a시월구일3" panose="02020600000000000000" pitchFamily="18" charset="-127"/>
+                <a:ea typeface="a시월구일3" panose="02020600000000000000" pitchFamily="18" charset="-127"/>
+                <a:cs typeface="Pretendard" panose="02000503000000020004" pitchFamily="2" charset="-127"/>
+              </a:endParaRPr>
+            </a:p>
+            <a:p>
+              <a:pPr marL="85725" indent="-85725" latinLnBrk="0">
+                <a:lnSpc>
+                  <a:spcPct val="150000"/>
+                </a:lnSpc>
+                <a:buFont typeface="Arial" panose="020B0604020202020204" pitchFamily="34" charset="0"/>
+                <a:buChar char="•"/>
+              </a:pPr>
+              <a:r>
+                <a:rPr kumimoji="1" lang="ko-KR" altLang="en-US" sz="1400" dirty="0">
+                  <a:ln w="12700">
+                    <a:solidFill>
+                      <a:schemeClr val="tx1">
+                        <a:alpha val="5000"/>
+                      </a:schemeClr>
+                    </a:solidFill>
+                  </a:ln>
+                  <a:solidFill>
+                    <a:schemeClr val="tx1">
+                      <a:lumMod val="85000"/>
+                      <a:lumOff val="15000"/>
+                    </a:schemeClr>
+                  </a:solidFill>
+                  <a:latin typeface="a시월구일3" panose="02020600000000000000" pitchFamily="18" charset="-127"/>
+                  <a:ea typeface="a시월구일3" panose="02020600000000000000" pitchFamily="18" charset="-127"/>
+                  <a:cs typeface="Pretendard" panose="02000503000000020004" pitchFamily="2" charset="-127"/>
+                </a:rPr>
+                <a:t>위험도를 직관적으로 확인</a:t>
               </a:r>
               <a:r>
                 <a:rPr kumimoji="1" lang="ko-KR" altLang="en-US" sz="1400" dirty="0">
@@ -6193,7 +5862,7 @@
                   <a:ea typeface="a시월구일1" panose="02020600000000000000" pitchFamily="18" charset="-127"/>
                   <a:cs typeface="Pretendard" panose="02000503000000020004" pitchFamily="2" charset="-127"/>
                 </a:rPr>
-                <a:t>할 수 있는 시각화 제공</a:t>
+                <a:t>할 수 있는 서비스 제공 </a:t>
               </a:r>
               <a:endParaRPr kumimoji="1" lang="en-US" altLang="ko-KR" sz="1400" dirty="0">
                 <a:ln w="12700">
@@ -6237,74 +5906,11 @@
                       <a:lumOff val="15000"/>
                     </a:schemeClr>
                   </a:solidFill>
-                  <a:latin typeface="a시월구일3" panose="02020600000000000000" pitchFamily="18" charset="-127"/>
-                  <a:ea typeface="a시월구일3" panose="02020600000000000000" pitchFamily="18" charset="-127"/>
-                  <a:cs typeface="Pretendard" panose="02000503000000020004" pitchFamily="2" charset="-127"/>
-                </a:rPr>
-                <a:t>지역별 상세 분석 및 유형별 특성 정보</a:t>
-              </a:r>
-              <a:r>
-                <a:rPr kumimoji="1" lang="ko-KR" altLang="en-US" sz="1400" dirty="0">
-                  <a:ln w="12700">
-                    <a:solidFill>
-                      <a:schemeClr val="tx1">
-                        <a:alpha val="5000"/>
-                      </a:schemeClr>
-                    </a:solidFill>
-                  </a:ln>
-                  <a:solidFill>
-                    <a:schemeClr val="tx1">
-                      <a:lumMod val="85000"/>
-                      <a:lumOff val="15000"/>
-                    </a:schemeClr>
-                  </a:solidFill>
                   <a:latin typeface="a시월구일1" panose="02020600000000000000" pitchFamily="18" charset="-127"/>
                   <a:ea typeface="a시월구일1" panose="02020600000000000000" pitchFamily="18" charset="-127"/>
                   <a:cs typeface="Pretendard" panose="02000503000000020004" pitchFamily="2" charset="-127"/>
                 </a:rPr>
-                <a:t>를 사용자가 쉽게 탐색할 수 있는 </a:t>
-              </a:r>
-              <a:r>
-                <a:rPr kumimoji="1" lang="en-US" altLang="ko-KR" sz="1400" dirty="0">
-                  <a:ln w="12700">
-                    <a:solidFill>
-                      <a:schemeClr val="tx1">
-                        <a:alpha val="5000"/>
-                      </a:schemeClr>
-                    </a:solidFill>
-                  </a:ln>
-                  <a:solidFill>
-                    <a:schemeClr val="tx1">
-                      <a:lumMod val="85000"/>
-                      <a:lumOff val="15000"/>
-                    </a:schemeClr>
-                  </a:solidFill>
-                  <a:latin typeface="a시월구일1" panose="02020600000000000000" pitchFamily="18" charset="-127"/>
-                  <a:ea typeface="a시월구일1" panose="02020600000000000000" pitchFamily="18" charset="-127"/>
-                  <a:cs typeface="Pretendard" panose="02000503000000020004" pitchFamily="2" charset="-127"/>
-                </a:rPr>
-                <a:t>UI </a:t>
-              </a:r>
-              <a:r>
-                <a:rPr kumimoji="1" lang="ko-KR" altLang="en-US" sz="1400" dirty="0">
-                  <a:ln w="12700">
-                    <a:solidFill>
-                      <a:schemeClr val="tx1">
-                        <a:alpha val="5000"/>
-                      </a:schemeClr>
-                    </a:solidFill>
-                  </a:ln>
-                  <a:solidFill>
-                    <a:schemeClr val="tx1">
-                      <a:lumMod val="85000"/>
-                      <a:lumOff val="15000"/>
-                    </a:schemeClr>
-                  </a:solidFill>
-                  <a:latin typeface="a시월구일1" panose="02020600000000000000" pitchFamily="18" charset="-127"/>
-                  <a:ea typeface="a시월구일1" panose="02020600000000000000" pitchFamily="18" charset="-127"/>
-                  <a:cs typeface="Pretendard" panose="02000503000000020004" pitchFamily="2" charset="-127"/>
-                </a:rPr>
-                <a:t>구성</a:t>
+                <a:t>지역별 상세 분석 및 원인 정보를 사용자가 쉽게 탐색할 수 있는 서비스</a:t>
               </a:r>
               <a:endParaRPr kumimoji="1" lang="en-US" altLang="ko-KR" sz="1400" dirty="0">
                 <a:ln w="12700">
@@ -6330,10 +5936,10 @@
       </p:grpSp>
       <p:grpSp>
         <p:nvGrpSpPr>
-          <p:cNvPr id="18" name="그룹 17">
-            <a:extLst>
-              <a:ext uri="{FF2B5EF4-FFF2-40B4-BE49-F238E27FC236}">
-                <a16:creationId xmlns:a16="http://schemas.microsoft.com/office/drawing/2014/main" id="{A633CE7A-B7E1-8551-30E0-3E51F6EE17A5}"/>
+          <p:cNvPr id="26" name="그룹 25">
+            <a:extLst>
+              <a:ext uri="{FF2B5EF4-FFF2-40B4-BE49-F238E27FC236}">
+                <a16:creationId xmlns:a16="http://schemas.microsoft.com/office/drawing/2014/main" id="{53B2A28C-27B2-057E-872C-43F2942FC1B6}"/>
               </a:ext>
             </a:extLst>
           </p:cNvPr>
@@ -6342,18 +5948,18 @@
         </p:nvGrpSpPr>
         <p:grpSpPr>
           <a:xfrm>
-            <a:off x="227984" y="4630766"/>
-            <a:ext cx="6443550" cy="1371582"/>
-            <a:chOff x="137242" y="4728398"/>
-            <a:chExt cx="6443550" cy="1371582"/>
+            <a:off x="-6607749" y="901128"/>
+            <a:ext cx="6443550" cy="5034560"/>
+            <a:chOff x="137242" y="1065420"/>
+            <a:chExt cx="6443550" cy="5034560"/>
           </a:xfrm>
         </p:grpSpPr>
         <p:sp>
           <p:nvSpPr>
-            <p:cNvPr id="10" name="사각형: 둥근 모서리 9">
+            <p:cNvPr id="29" name="사각형: 둥근 모서리 28">
               <a:extLst>
                 <a:ext uri="{FF2B5EF4-FFF2-40B4-BE49-F238E27FC236}">
-                  <a16:creationId xmlns:a16="http://schemas.microsoft.com/office/drawing/2014/main" id="{DF39ADD6-B53C-92EB-752D-7252146F63ED}"/>
+                  <a16:creationId xmlns:a16="http://schemas.microsoft.com/office/drawing/2014/main" id="{13E709D8-BC38-95A1-55FB-BEBDCC8B6C6F}"/>
                 </a:ext>
               </a:extLst>
             </p:cNvPr>
@@ -6408,10 +6014,10 @@
         </p:sp>
         <p:sp>
           <p:nvSpPr>
-            <p:cNvPr id="11" name="사각형: 둥근 모서리 10">
+            <p:cNvPr id="31" name="사각형: 둥근 모서리 30">
               <a:extLst>
                 <a:ext uri="{FF2B5EF4-FFF2-40B4-BE49-F238E27FC236}">
-                  <a16:creationId xmlns:a16="http://schemas.microsoft.com/office/drawing/2014/main" id="{F6DB9FE3-1C9C-DCCB-88F9-E27ED60C28D6}"/>
+                  <a16:creationId xmlns:a16="http://schemas.microsoft.com/office/drawing/2014/main" id="{04DDC4BB-0D7C-EC42-0423-1AB27DDAF2CE}"/>
                 </a:ext>
               </a:extLst>
             </p:cNvPr>
@@ -6420,7 +6026,7 @@
           </p:nvSpPr>
           <p:spPr>
             <a:xfrm>
-              <a:off x="137243" y="4728398"/>
+              <a:off x="2954334" y="1065420"/>
               <a:ext cx="1643400" cy="377331"/>
             </a:xfrm>
             <a:prstGeom prst="roundRect">
@@ -6486,10 +6092,10 @@
         </p:sp>
         <p:sp>
           <p:nvSpPr>
-            <p:cNvPr id="30" name="TextBox 29">
+            <p:cNvPr id="32" name="TextBox 31">
               <a:extLst>
                 <a:ext uri="{FF2B5EF4-FFF2-40B4-BE49-F238E27FC236}">
-                  <a16:creationId xmlns:a16="http://schemas.microsoft.com/office/drawing/2014/main" id="{E992E3DE-9EFD-8C27-6FB7-FFA999B81E34}"/>
+                  <a16:creationId xmlns:a16="http://schemas.microsoft.com/office/drawing/2014/main" id="{6DFAA7C1-ED14-C505-0927-E64511B7F1EF}"/>
                 </a:ext>
               </a:extLst>
             </p:cNvPr>
@@ -6610,6 +6216,1222 @@
           </p:txBody>
         </p:sp>
       </p:grpSp>
+      <p:sp>
+        <p:nvSpPr>
+          <p:cNvPr id="6" name="사각형: 둥근 모서리 5">
+            <a:extLst>
+              <a:ext uri="{FF2B5EF4-FFF2-40B4-BE49-F238E27FC236}">
+                <a16:creationId xmlns:a16="http://schemas.microsoft.com/office/drawing/2014/main" id="{526F15C7-FC8C-6E3A-3AC1-44529CA09A18}"/>
+              </a:ext>
+            </a:extLst>
+          </p:cNvPr>
+          <p:cNvSpPr/>
+          <p:nvPr/>
+        </p:nvSpPr>
+        <p:spPr>
+          <a:xfrm>
+            <a:off x="186421" y="2752004"/>
+            <a:ext cx="5850000" cy="1528752"/>
+          </a:xfrm>
+          <a:prstGeom prst="roundRect">
+            <a:avLst>
+              <a:gd name="adj" fmla="val 6065"/>
+            </a:avLst>
+          </a:prstGeom>
+          <a:solidFill>
+            <a:schemeClr val="bg1"/>
+          </a:solidFill>
+          <a:ln>
+            <a:solidFill>
+              <a:schemeClr val="bg2">
+                <a:lumMod val="90000"/>
+              </a:schemeClr>
+            </a:solidFill>
+          </a:ln>
+        </p:spPr>
+        <p:style>
+          <a:lnRef idx="2">
+            <a:schemeClr val="accent1">
+              <a:shade val="15000"/>
+            </a:schemeClr>
+          </a:lnRef>
+          <a:fillRef idx="1">
+            <a:schemeClr val="accent1"/>
+          </a:fillRef>
+          <a:effectRef idx="0">
+            <a:schemeClr val="accent1"/>
+          </a:effectRef>
+          <a:fontRef idx="minor">
+            <a:schemeClr val="lt1"/>
+          </a:fontRef>
+        </p:style>
+        <p:txBody>
+          <a:bodyPr rtlCol="0" anchor="ctr"/>
+          <a:lstStyle/>
+          <a:p>
+            <a:pPr algn="ctr"/>
+            <a:endParaRPr lang="ko-KR" altLang="en-US" dirty="0"/>
+          </a:p>
+        </p:txBody>
+      </p:sp>
+      <p:sp>
+        <p:nvSpPr>
+          <p:cNvPr id="7" name="사각형: 둥근 모서리 6">
+            <a:extLst>
+              <a:ext uri="{FF2B5EF4-FFF2-40B4-BE49-F238E27FC236}">
+                <a16:creationId xmlns:a16="http://schemas.microsoft.com/office/drawing/2014/main" id="{4BF99FE8-A02D-11AE-E40C-DA29BF8B4CA4}"/>
+              </a:ext>
+            </a:extLst>
+          </p:cNvPr>
+          <p:cNvSpPr/>
+          <p:nvPr/>
+        </p:nvSpPr>
+        <p:spPr>
+          <a:xfrm>
+            <a:off x="186420" y="2511137"/>
+            <a:ext cx="1953717" cy="383569"/>
+          </a:xfrm>
+          <a:prstGeom prst="roundRect">
+            <a:avLst>
+              <a:gd name="adj" fmla="val 16564"/>
+            </a:avLst>
+          </a:prstGeom>
+          <a:solidFill>
+            <a:schemeClr val="bg1">
+              <a:lumMod val="95000"/>
+            </a:schemeClr>
+          </a:solidFill>
+          <a:ln>
+            <a:solidFill>
+              <a:schemeClr val="bg2">
+                <a:lumMod val="90000"/>
+              </a:schemeClr>
+            </a:solidFill>
+          </a:ln>
+        </p:spPr>
+        <p:style>
+          <a:lnRef idx="2">
+            <a:schemeClr val="accent1">
+              <a:shade val="15000"/>
+            </a:schemeClr>
+          </a:lnRef>
+          <a:fillRef idx="1">
+            <a:schemeClr val="accent1"/>
+          </a:fillRef>
+          <a:effectRef idx="0">
+            <a:schemeClr val="accent1"/>
+          </a:effectRef>
+          <a:fontRef idx="minor">
+            <a:schemeClr val="lt1"/>
+          </a:fontRef>
+        </p:style>
+        <p:txBody>
+          <a:bodyPr rtlCol="0" anchor="ctr"/>
+          <a:lstStyle/>
+          <a:p>
+            <a:pPr algn="ctr"/>
+            <a:r>
+              <a:rPr lang="en-US" altLang="ko-KR" sz="2000" dirty="0">
+                <a:solidFill>
+                  <a:schemeClr val="tx1"/>
+                </a:solidFill>
+                <a:latin typeface="a시월구일3" panose="02020600000000000000" pitchFamily="18" charset="-127"/>
+                <a:ea typeface="a시월구일3" panose="02020600000000000000" pitchFamily="18" charset="-127"/>
+                <a:cs typeface="Noto Sans Disp ExtBd" panose="020B0902040504020204" pitchFamily="34"/>
+              </a:rPr>
+              <a:t>Modeling(ML)</a:t>
+            </a:r>
+            <a:endParaRPr lang="ko-KR" altLang="en-US" sz="2000" dirty="0">
+              <a:solidFill>
+                <a:schemeClr val="tx1"/>
+              </a:solidFill>
+              <a:latin typeface="a시월구일3" panose="02020600000000000000" pitchFamily="18" charset="-127"/>
+              <a:ea typeface="a시월구일3" panose="02020600000000000000" pitchFamily="18" charset="-127"/>
+              <a:cs typeface="Noto Sans Disp ExtBd" panose="020B0902040504020204" pitchFamily="34"/>
+            </a:endParaRPr>
+          </a:p>
+        </p:txBody>
+      </p:sp>
+      <p:sp>
+        <p:nvSpPr>
+          <p:cNvPr id="33" name="TextBox 32">
+            <a:extLst>
+              <a:ext uri="{FF2B5EF4-FFF2-40B4-BE49-F238E27FC236}">
+                <a16:creationId xmlns:a16="http://schemas.microsoft.com/office/drawing/2014/main" id="{94C8AC2A-0665-706E-362A-04FB222F17C9}"/>
+              </a:ext>
+            </a:extLst>
+          </p:cNvPr>
+          <p:cNvSpPr txBox="1"/>
+          <p:nvPr/>
+        </p:nvSpPr>
+        <p:spPr>
+          <a:xfrm>
+            <a:off x="509769" y="411763"/>
+            <a:ext cx="1671933" cy="489365"/>
+          </a:xfrm>
+          <a:prstGeom prst="rect">
+            <a:avLst/>
+          </a:prstGeom>
+          <a:noFill/>
+        </p:spPr>
+        <p:txBody>
+          <a:bodyPr wrap="none" lIns="0" tIns="0" rIns="0" bIns="0" rtlCol="0" anchor="t">
+            <a:spAutoFit/>
+          </a:bodyPr>
+          <a:lstStyle/>
+          <a:p>
+            <a:pPr>
+              <a:lnSpc>
+                <a:spcPct val="150000"/>
+              </a:lnSpc>
+            </a:pPr>
+            <a:r>
+              <a:rPr lang="en-US" altLang="ko-KR" sz="2400" dirty="0">
+                <a:latin typeface="a시월구일3" panose="02020600000000000000" pitchFamily="18" charset="-127"/>
+                <a:ea typeface="a시월구일3" panose="02020600000000000000" pitchFamily="18" charset="-127"/>
+                <a:cs typeface="+mj-cs"/>
+              </a:rPr>
+              <a:t>3. </a:t>
+            </a:r>
+            <a:r>
+              <a:rPr lang="ko-KR" altLang="en-US" sz="2400" dirty="0">
+                <a:latin typeface="a시월구일3" panose="02020600000000000000" pitchFamily="18" charset="-127"/>
+                <a:ea typeface="a시월구일3" panose="02020600000000000000" pitchFamily="18" charset="-127"/>
+                <a:cs typeface="+mj-cs"/>
+              </a:rPr>
+              <a:t>개발 목표</a:t>
+            </a:r>
+            <a:endParaRPr lang="en-US" altLang="ko-KR" sz="2400" dirty="0">
+              <a:latin typeface="a시월구일3" panose="02020600000000000000" pitchFamily="18" charset="-127"/>
+              <a:ea typeface="a시월구일3" panose="02020600000000000000" pitchFamily="18" charset="-127"/>
+              <a:cs typeface="+mj-cs"/>
+            </a:endParaRPr>
+          </a:p>
+        </p:txBody>
+      </p:sp>
+      <p:sp>
+        <p:nvSpPr>
+          <p:cNvPr id="27" name="TextBox 26">
+            <a:extLst>
+              <a:ext uri="{FF2B5EF4-FFF2-40B4-BE49-F238E27FC236}">
+                <a16:creationId xmlns:a16="http://schemas.microsoft.com/office/drawing/2014/main" id="{63224FB8-B737-D457-16C7-5E3F5EA31015}"/>
+              </a:ext>
+            </a:extLst>
+          </p:cNvPr>
+          <p:cNvSpPr txBox="1"/>
+          <p:nvPr/>
+        </p:nvSpPr>
+        <p:spPr>
+          <a:xfrm>
+            <a:off x="278994" y="3129335"/>
+            <a:ext cx="5255532" cy="533223"/>
+          </a:xfrm>
+          <a:prstGeom prst="rect">
+            <a:avLst/>
+          </a:prstGeom>
+          <a:noFill/>
+        </p:spPr>
+        <p:txBody>
+          <a:bodyPr wrap="square" lIns="0" tIns="0" rIns="0" bIns="0" rtlCol="0" anchor="t">
+            <a:spAutoFit/>
+          </a:bodyPr>
+          <a:lstStyle/>
+          <a:p>
+            <a:pPr marL="85725" indent="-85725" latinLnBrk="0">
+              <a:lnSpc>
+                <a:spcPct val="130000"/>
+              </a:lnSpc>
+              <a:buFont typeface="Arial" panose="020B0604020202020204" pitchFamily="34" charset="0"/>
+              <a:buChar char="•"/>
+            </a:pPr>
+            <a:r>
+              <a:rPr kumimoji="1" lang="en-US" altLang="ko-KR" sz="1400" dirty="0">
+                <a:ln w="12700">
+                  <a:solidFill>
+                    <a:schemeClr val="tx1">
+                      <a:alpha val="5000"/>
+                    </a:schemeClr>
+                  </a:solidFill>
+                </a:ln>
+                <a:solidFill>
+                  <a:schemeClr val="tx1">
+                    <a:lumMod val="85000"/>
+                    <a:lumOff val="15000"/>
+                  </a:schemeClr>
+                </a:solidFill>
+                <a:latin typeface="a시월구일3" panose="02020600000000000000" pitchFamily="18" charset="-127"/>
+                <a:ea typeface="a시월구일3" panose="02020600000000000000" pitchFamily="18" charset="-127"/>
+                <a:cs typeface="Pretendard" panose="02000503000000020004" pitchFamily="2" charset="-127"/>
+              </a:rPr>
+              <a:t>K-Means </a:t>
+            </a:r>
+            <a:r>
+              <a:rPr kumimoji="1" lang="ko-KR" altLang="en-US" sz="1400" dirty="0">
+                <a:ln w="12700">
+                  <a:solidFill>
+                    <a:schemeClr val="tx1">
+                      <a:alpha val="5000"/>
+                    </a:schemeClr>
+                  </a:solidFill>
+                </a:ln>
+                <a:solidFill>
+                  <a:schemeClr val="tx1">
+                    <a:lumMod val="85000"/>
+                    <a:lumOff val="15000"/>
+                  </a:schemeClr>
+                </a:solidFill>
+                <a:latin typeface="a시월구일3" panose="02020600000000000000" pitchFamily="18" charset="-127"/>
+                <a:ea typeface="a시월구일3" panose="02020600000000000000" pitchFamily="18" charset="-127"/>
+                <a:cs typeface="Pretendard" panose="02000503000000020004" pitchFamily="2" charset="-127"/>
+              </a:rPr>
+              <a:t>군집화를 적용</a:t>
+            </a:r>
+            <a:r>
+              <a:rPr kumimoji="1" lang="ko-KR" altLang="en-US" sz="1400" dirty="0">
+                <a:ln w="12700">
+                  <a:solidFill>
+                    <a:schemeClr val="tx1">
+                      <a:alpha val="5000"/>
+                    </a:schemeClr>
+                  </a:solidFill>
+                </a:ln>
+                <a:solidFill>
+                  <a:schemeClr val="tx1">
+                    <a:lumMod val="85000"/>
+                    <a:lumOff val="15000"/>
+                  </a:schemeClr>
+                </a:solidFill>
+                <a:latin typeface="a시월구일1" panose="02020600000000000000" pitchFamily="18" charset="-127"/>
+                <a:ea typeface="a시월구일1" panose="02020600000000000000" pitchFamily="18" charset="-127"/>
+                <a:cs typeface="Pretendard" panose="02000503000000020004" pitchFamily="2" charset="-127"/>
+              </a:rPr>
+              <a:t>하여 자치구별 보건 취약 유형을 분류</a:t>
+            </a:r>
+            <a:endParaRPr kumimoji="1" lang="en-US" altLang="ko-KR" sz="1400" dirty="0">
+              <a:ln w="12700">
+                <a:solidFill>
+                  <a:schemeClr val="tx1">
+                    <a:alpha val="5000"/>
+                  </a:schemeClr>
+                </a:solidFill>
+              </a:ln>
+              <a:solidFill>
+                <a:schemeClr val="tx1">
+                  <a:lumMod val="85000"/>
+                  <a:lumOff val="15000"/>
+                </a:schemeClr>
+              </a:solidFill>
+              <a:latin typeface="a시월구일1" panose="02020600000000000000" pitchFamily="18" charset="-127"/>
+              <a:ea typeface="a시월구일1" panose="02020600000000000000" pitchFamily="18" charset="-127"/>
+              <a:cs typeface="Pretendard" panose="02000503000000020004" pitchFamily="2" charset="-127"/>
+            </a:endParaRPr>
+          </a:p>
+          <a:p>
+            <a:pPr marL="85725" indent="-85725" latinLnBrk="0">
+              <a:lnSpc>
+                <a:spcPct val="130000"/>
+              </a:lnSpc>
+              <a:buFont typeface="Arial" panose="020B0604020202020204" pitchFamily="34" charset="0"/>
+              <a:buChar char="•"/>
+            </a:pPr>
+            <a:r>
+              <a:rPr kumimoji="1" lang="ko-KR" altLang="en-US" sz="1400" dirty="0">
+                <a:ln w="12700">
+                  <a:solidFill>
+                    <a:schemeClr val="tx1">
+                      <a:alpha val="5000"/>
+                    </a:schemeClr>
+                  </a:solidFill>
+                </a:ln>
+                <a:solidFill>
+                  <a:schemeClr val="tx1">
+                    <a:lumMod val="85000"/>
+                    <a:lumOff val="15000"/>
+                  </a:schemeClr>
+                </a:solidFill>
+                <a:latin typeface="a시월구일1" panose="02020600000000000000" pitchFamily="18" charset="-127"/>
+                <a:ea typeface="a시월구일1" panose="02020600000000000000" pitchFamily="18" charset="-127"/>
+                <a:cs typeface="Pretendard" panose="02000503000000020004" pitchFamily="2" charset="-127"/>
+              </a:rPr>
+              <a:t>군집 결과 평가 지표 기반 모델 성능 검증</a:t>
+            </a:r>
+            <a:endParaRPr kumimoji="1" lang="en-US" altLang="ko-KR" sz="1400" dirty="0">
+              <a:ln w="12700">
+                <a:solidFill>
+                  <a:schemeClr val="tx1">
+                    <a:alpha val="5000"/>
+                  </a:schemeClr>
+                </a:solidFill>
+              </a:ln>
+              <a:solidFill>
+                <a:schemeClr val="tx1">
+                  <a:lumMod val="85000"/>
+                  <a:lumOff val="15000"/>
+                </a:schemeClr>
+              </a:solidFill>
+              <a:latin typeface="a시월구일1" panose="02020600000000000000" pitchFamily="18" charset="-127"/>
+              <a:ea typeface="a시월구일1" panose="02020600000000000000" pitchFamily="18" charset="-127"/>
+              <a:cs typeface="Pretendard" panose="02000503000000020004" pitchFamily="2" charset="-127"/>
+            </a:endParaRPr>
+          </a:p>
+        </p:txBody>
+      </p:sp>
+      <p:sp>
+        <p:nvSpPr>
+          <p:cNvPr id="14" name="사각형: 둥근 모서리 13">
+            <a:extLst>
+              <a:ext uri="{FF2B5EF4-FFF2-40B4-BE49-F238E27FC236}">
+                <a16:creationId xmlns:a16="http://schemas.microsoft.com/office/drawing/2014/main" id="{DBE9AFA4-325B-7375-3CE1-5582B581B2C9}"/>
+              </a:ext>
+            </a:extLst>
+          </p:cNvPr>
+          <p:cNvSpPr/>
+          <p:nvPr/>
+        </p:nvSpPr>
+        <p:spPr>
+          <a:xfrm>
+            <a:off x="126842" y="5160963"/>
+            <a:ext cx="11819158" cy="1285274"/>
+          </a:xfrm>
+          <a:prstGeom prst="roundRect">
+            <a:avLst>
+              <a:gd name="adj" fmla="val 50000"/>
+            </a:avLst>
+          </a:prstGeom>
+          <a:solidFill>
+            <a:schemeClr val="bg1"/>
+          </a:solidFill>
+          <a:ln>
+            <a:solidFill>
+              <a:schemeClr val="bg2">
+                <a:lumMod val="90000"/>
+              </a:schemeClr>
+            </a:solidFill>
+          </a:ln>
+        </p:spPr>
+        <p:style>
+          <a:lnRef idx="2">
+            <a:schemeClr val="accent1">
+              <a:shade val="15000"/>
+            </a:schemeClr>
+          </a:lnRef>
+          <a:fillRef idx="1">
+            <a:schemeClr val="accent1"/>
+          </a:fillRef>
+          <a:effectRef idx="0">
+            <a:schemeClr val="accent1"/>
+          </a:effectRef>
+          <a:fontRef idx="minor">
+            <a:schemeClr val="lt1"/>
+          </a:fontRef>
+        </p:style>
+        <p:txBody>
+          <a:bodyPr rtlCol="0" anchor="ctr"/>
+          <a:lstStyle/>
+          <a:p>
+            <a:pPr algn="ctr"/>
+            <a:endParaRPr lang="ko-KR" altLang="en-US" dirty="0"/>
+          </a:p>
+        </p:txBody>
+      </p:sp>
+      <p:sp>
+        <p:nvSpPr>
+          <p:cNvPr id="34" name="TextBox 33">
+            <a:extLst>
+              <a:ext uri="{FF2B5EF4-FFF2-40B4-BE49-F238E27FC236}">
+                <a16:creationId xmlns:a16="http://schemas.microsoft.com/office/drawing/2014/main" id="{63C4746A-D0C8-C495-1420-FBD9C2E9D18A}"/>
+              </a:ext>
+            </a:extLst>
+          </p:cNvPr>
+          <p:cNvSpPr txBox="1"/>
+          <p:nvPr/>
+        </p:nvSpPr>
+        <p:spPr>
+          <a:xfrm>
+            <a:off x="876087" y="1128668"/>
+            <a:ext cx="10587780" cy="914096"/>
+          </a:xfrm>
+          <a:prstGeom prst="rect">
+            <a:avLst/>
+          </a:prstGeom>
+          <a:noFill/>
+        </p:spPr>
+        <p:txBody>
+          <a:bodyPr wrap="square" lIns="0" tIns="0" rIns="0" bIns="0" rtlCol="0" anchor="t">
+            <a:spAutoFit/>
+          </a:bodyPr>
+          <a:lstStyle/>
+          <a:p>
+            <a:pPr algn="ctr" latinLnBrk="0">
+              <a:lnSpc>
+                <a:spcPct val="130000"/>
+              </a:lnSpc>
+            </a:pPr>
+            <a:r>
+              <a:rPr kumimoji="1" lang="ko-KR" altLang="en-US" dirty="0">
+                <a:ln w="12700">
+                  <a:solidFill>
+                    <a:schemeClr val="tx1">
+                      <a:alpha val="5000"/>
+                    </a:schemeClr>
+                  </a:solidFill>
+                </a:ln>
+                <a:solidFill>
+                  <a:schemeClr val="tx1">
+                    <a:lumMod val="85000"/>
+                    <a:lumOff val="15000"/>
+                  </a:schemeClr>
+                </a:solidFill>
+                <a:latin typeface="a시월구일3" panose="02020600000000000000" pitchFamily="18" charset="-127"/>
+                <a:ea typeface="a시월구일3" panose="02020600000000000000" pitchFamily="18" charset="-127"/>
+                <a:cs typeface="Pretendard" panose="02000503000000020004" pitchFamily="2" charset="-127"/>
+              </a:rPr>
+              <a:t>데이터 기반 분석을 통해 </a:t>
+            </a:r>
+            <a:r>
+              <a:rPr kumimoji="1" lang="ko-KR" altLang="en-US" sz="2400" dirty="0">
+                <a:ln w="12700">
+                  <a:solidFill>
+                    <a:schemeClr val="tx1">
+                      <a:alpha val="5000"/>
+                    </a:schemeClr>
+                  </a:solidFill>
+                </a:ln>
+                <a:solidFill>
+                  <a:srgbClr val="0070C0"/>
+                </a:solidFill>
+                <a:latin typeface="a시월구일3" panose="02020600000000000000" pitchFamily="18" charset="-127"/>
+                <a:ea typeface="a시월구일3" panose="02020600000000000000" pitchFamily="18" charset="-127"/>
+                <a:cs typeface="Pretendard" panose="02000503000000020004" pitchFamily="2" charset="-127"/>
+              </a:rPr>
+              <a:t>자치구별 보건 취약 유형을 도출</a:t>
+            </a:r>
+            <a:r>
+              <a:rPr kumimoji="1" lang="ko-KR" altLang="en-US" dirty="0">
+                <a:ln w="12700">
+                  <a:solidFill>
+                    <a:schemeClr val="tx1">
+                      <a:alpha val="5000"/>
+                    </a:schemeClr>
+                  </a:solidFill>
+                </a:ln>
+                <a:solidFill>
+                  <a:schemeClr val="tx1">
+                    <a:lumMod val="85000"/>
+                    <a:lumOff val="15000"/>
+                  </a:schemeClr>
+                </a:solidFill>
+                <a:latin typeface="a시월구일3" panose="02020600000000000000" pitchFamily="18" charset="-127"/>
+                <a:ea typeface="a시월구일3" panose="02020600000000000000" pitchFamily="18" charset="-127"/>
+                <a:cs typeface="Pretendard" panose="02000503000000020004" pitchFamily="2" charset="-127"/>
+              </a:rPr>
+              <a:t>하고</a:t>
+            </a:r>
+            <a:r>
+              <a:rPr kumimoji="1" lang="en-US" altLang="ko-KR" dirty="0">
+                <a:ln w="12700">
+                  <a:solidFill>
+                    <a:schemeClr val="tx1">
+                      <a:alpha val="5000"/>
+                    </a:schemeClr>
+                  </a:solidFill>
+                </a:ln>
+                <a:solidFill>
+                  <a:schemeClr val="tx1">
+                    <a:lumMod val="85000"/>
+                    <a:lumOff val="15000"/>
+                  </a:schemeClr>
+                </a:solidFill>
+                <a:latin typeface="a시월구일3" panose="02020600000000000000" pitchFamily="18" charset="-127"/>
+                <a:ea typeface="a시월구일3" panose="02020600000000000000" pitchFamily="18" charset="-127"/>
+                <a:cs typeface="Pretendard" panose="02000503000000020004" pitchFamily="2" charset="-127"/>
+              </a:rPr>
+              <a:t>, </a:t>
+            </a:r>
+          </a:p>
+          <a:p>
+            <a:pPr algn="ctr" latinLnBrk="0">
+              <a:lnSpc>
+                <a:spcPct val="130000"/>
+              </a:lnSpc>
+            </a:pPr>
+            <a:r>
+              <a:rPr kumimoji="1" lang="ko-KR" altLang="en-US" sz="2400" dirty="0">
+                <a:ln w="12700">
+                  <a:solidFill>
+                    <a:schemeClr val="tx1">
+                      <a:alpha val="5000"/>
+                    </a:schemeClr>
+                  </a:solidFill>
+                </a:ln>
+                <a:solidFill>
+                  <a:srgbClr val="0070C0"/>
+                </a:solidFill>
+                <a:latin typeface="a시월구일3" panose="02020600000000000000" pitchFamily="18" charset="-127"/>
+                <a:ea typeface="a시월구일3" panose="02020600000000000000" pitchFamily="18" charset="-127"/>
+                <a:cs typeface="Pretendard" panose="02000503000000020004" pitchFamily="2" charset="-127"/>
+              </a:rPr>
+              <a:t>정책 의사결정을 지원 하는 서비스</a:t>
+            </a:r>
+            <a:r>
+              <a:rPr kumimoji="1" lang="ko-KR" altLang="en-US" sz="2400" dirty="0">
+                <a:ln w="12700">
+                  <a:solidFill>
+                    <a:schemeClr val="tx1">
+                      <a:alpha val="5000"/>
+                    </a:schemeClr>
+                  </a:solidFill>
+                </a:ln>
+                <a:solidFill>
+                  <a:schemeClr val="tx1">
+                    <a:lumMod val="85000"/>
+                    <a:lumOff val="15000"/>
+                  </a:schemeClr>
+                </a:solidFill>
+                <a:latin typeface="a시월구일3" panose="02020600000000000000" pitchFamily="18" charset="-127"/>
+                <a:ea typeface="a시월구일3" panose="02020600000000000000" pitchFamily="18" charset="-127"/>
+                <a:cs typeface="Pretendard" panose="02000503000000020004" pitchFamily="2" charset="-127"/>
+              </a:rPr>
+              <a:t> </a:t>
+            </a:r>
+            <a:r>
+              <a:rPr kumimoji="1" lang="ko-KR" altLang="en-US" dirty="0">
+                <a:ln w="12700">
+                  <a:solidFill>
+                    <a:schemeClr val="tx1">
+                      <a:alpha val="5000"/>
+                    </a:schemeClr>
+                  </a:solidFill>
+                </a:ln>
+                <a:solidFill>
+                  <a:schemeClr val="tx1">
+                    <a:lumMod val="85000"/>
+                    <a:lumOff val="15000"/>
+                  </a:schemeClr>
+                </a:solidFill>
+                <a:latin typeface="a시월구일3" panose="02020600000000000000" pitchFamily="18" charset="-127"/>
+                <a:ea typeface="a시월구일3" panose="02020600000000000000" pitchFamily="18" charset="-127"/>
+                <a:cs typeface="Pretendard" panose="02000503000000020004" pitchFamily="2" charset="-127"/>
+              </a:rPr>
+              <a:t>제공</a:t>
+            </a:r>
+            <a:endParaRPr kumimoji="1" lang="en-US" altLang="ko-KR" dirty="0">
+              <a:ln w="12700">
+                <a:solidFill>
+                  <a:schemeClr val="tx1">
+                    <a:alpha val="5000"/>
+                  </a:schemeClr>
+                </a:solidFill>
+              </a:ln>
+              <a:solidFill>
+                <a:schemeClr val="tx1">
+                  <a:lumMod val="85000"/>
+                  <a:lumOff val="15000"/>
+                </a:schemeClr>
+              </a:solidFill>
+              <a:latin typeface="a시월구일3" panose="02020600000000000000" pitchFamily="18" charset="-127"/>
+              <a:ea typeface="a시월구일3" panose="02020600000000000000" pitchFamily="18" charset="-127"/>
+              <a:cs typeface="Pretendard" panose="02000503000000020004" pitchFamily="2" charset="-127"/>
+            </a:endParaRPr>
+          </a:p>
+        </p:txBody>
+      </p:sp>
+      <p:sp>
+        <p:nvSpPr>
+          <p:cNvPr id="38" name="사각형: 둥근 모서리 37">
+            <a:extLst>
+              <a:ext uri="{FF2B5EF4-FFF2-40B4-BE49-F238E27FC236}">
+                <a16:creationId xmlns:a16="http://schemas.microsoft.com/office/drawing/2014/main" id="{30F34EB7-4480-D167-A449-09B324D8B2A5}"/>
+              </a:ext>
+            </a:extLst>
+          </p:cNvPr>
+          <p:cNvSpPr/>
+          <p:nvPr/>
+        </p:nvSpPr>
+        <p:spPr>
+          <a:xfrm>
+            <a:off x="6157435" y="2752004"/>
+            <a:ext cx="5848143" cy="1528752"/>
+          </a:xfrm>
+          <a:prstGeom prst="roundRect">
+            <a:avLst>
+              <a:gd name="adj" fmla="val 6065"/>
+            </a:avLst>
+          </a:prstGeom>
+          <a:solidFill>
+            <a:schemeClr val="bg1"/>
+          </a:solidFill>
+          <a:ln>
+            <a:solidFill>
+              <a:schemeClr val="bg2">
+                <a:lumMod val="90000"/>
+              </a:schemeClr>
+            </a:solidFill>
+          </a:ln>
+        </p:spPr>
+        <p:style>
+          <a:lnRef idx="2">
+            <a:schemeClr val="accent1">
+              <a:shade val="15000"/>
+            </a:schemeClr>
+          </a:lnRef>
+          <a:fillRef idx="1">
+            <a:schemeClr val="accent1"/>
+          </a:fillRef>
+          <a:effectRef idx="0">
+            <a:schemeClr val="accent1"/>
+          </a:effectRef>
+          <a:fontRef idx="minor">
+            <a:schemeClr val="lt1"/>
+          </a:fontRef>
+        </p:style>
+        <p:txBody>
+          <a:bodyPr rtlCol="0" anchor="ctr"/>
+          <a:lstStyle/>
+          <a:p>
+            <a:pPr algn="ctr"/>
+            <a:endParaRPr lang="ko-KR" altLang="en-US" dirty="0"/>
+          </a:p>
+        </p:txBody>
+      </p:sp>
+      <p:sp>
+        <p:nvSpPr>
+          <p:cNvPr id="39" name="사각형: 둥근 모서리 38">
+            <a:extLst>
+              <a:ext uri="{FF2B5EF4-FFF2-40B4-BE49-F238E27FC236}">
+                <a16:creationId xmlns:a16="http://schemas.microsoft.com/office/drawing/2014/main" id="{F05573C4-86BD-0B8B-C30F-FD0C277AB349}"/>
+              </a:ext>
+            </a:extLst>
+          </p:cNvPr>
+          <p:cNvSpPr/>
+          <p:nvPr/>
+        </p:nvSpPr>
+        <p:spPr>
+          <a:xfrm>
+            <a:off x="6157435" y="2517375"/>
+            <a:ext cx="1953717" cy="377331"/>
+          </a:xfrm>
+          <a:prstGeom prst="roundRect">
+            <a:avLst>
+              <a:gd name="adj" fmla="val 16564"/>
+            </a:avLst>
+          </a:prstGeom>
+          <a:solidFill>
+            <a:schemeClr val="bg1">
+              <a:lumMod val="95000"/>
+            </a:schemeClr>
+          </a:solidFill>
+          <a:ln>
+            <a:solidFill>
+              <a:schemeClr val="bg2">
+                <a:lumMod val="90000"/>
+              </a:schemeClr>
+            </a:solidFill>
+          </a:ln>
+        </p:spPr>
+        <p:style>
+          <a:lnRef idx="2">
+            <a:schemeClr val="accent1">
+              <a:shade val="15000"/>
+            </a:schemeClr>
+          </a:lnRef>
+          <a:fillRef idx="1">
+            <a:schemeClr val="accent1"/>
+          </a:fillRef>
+          <a:effectRef idx="0">
+            <a:schemeClr val="accent1"/>
+          </a:effectRef>
+          <a:fontRef idx="minor">
+            <a:schemeClr val="lt1"/>
+          </a:fontRef>
+        </p:style>
+        <p:txBody>
+          <a:bodyPr rtlCol="0" anchor="ctr"/>
+          <a:lstStyle/>
+          <a:p>
+            <a:pPr algn="ctr"/>
+            <a:r>
+              <a:rPr lang="en-US" altLang="ko-KR" sz="2000" dirty="0">
+                <a:solidFill>
+                  <a:schemeClr val="tx1"/>
+                </a:solidFill>
+                <a:latin typeface="a시월구일3" panose="02020600000000000000" pitchFamily="18" charset="-127"/>
+                <a:ea typeface="a시월구일3" panose="02020600000000000000" pitchFamily="18" charset="-127"/>
+                <a:cs typeface="Noto Sans Disp ExtBd" panose="020B0902040504020204" pitchFamily="34"/>
+              </a:rPr>
+              <a:t>Service</a:t>
+            </a:r>
+            <a:endParaRPr lang="ko-KR" altLang="en-US" sz="2000" dirty="0">
+              <a:solidFill>
+                <a:schemeClr val="tx1"/>
+              </a:solidFill>
+              <a:latin typeface="a시월구일3" panose="02020600000000000000" pitchFamily="18" charset="-127"/>
+              <a:ea typeface="a시월구일3" panose="02020600000000000000" pitchFamily="18" charset="-127"/>
+              <a:cs typeface="Noto Sans Disp ExtBd" panose="020B0902040504020204" pitchFamily="34"/>
+            </a:endParaRPr>
+          </a:p>
+        </p:txBody>
+      </p:sp>
+      <p:sp>
+        <p:nvSpPr>
+          <p:cNvPr id="40" name="TextBox 39">
+            <a:extLst>
+              <a:ext uri="{FF2B5EF4-FFF2-40B4-BE49-F238E27FC236}">
+                <a16:creationId xmlns:a16="http://schemas.microsoft.com/office/drawing/2014/main" id="{F86B8AC5-B36E-63D2-174F-4DCC8D9E3A82}"/>
+              </a:ext>
+            </a:extLst>
+          </p:cNvPr>
+          <p:cNvSpPr txBox="1"/>
+          <p:nvPr/>
+        </p:nvSpPr>
+        <p:spPr>
+          <a:xfrm>
+            <a:off x="6250008" y="3013907"/>
+            <a:ext cx="5755571" cy="931794"/>
+          </a:xfrm>
+          <a:prstGeom prst="rect">
+            <a:avLst/>
+          </a:prstGeom>
+          <a:noFill/>
+        </p:spPr>
+        <p:txBody>
+          <a:bodyPr wrap="square" lIns="0" tIns="0" rIns="0" bIns="0" rtlCol="0" anchor="t">
+            <a:spAutoFit/>
+          </a:bodyPr>
+          <a:lstStyle/>
+          <a:p>
+            <a:pPr marL="85725" indent="-85725" latinLnBrk="0">
+              <a:lnSpc>
+                <a:spcPct val="150000"/>
+              </a:lnSpc>
+              <a:buFont typeface="Arial" panose="020B0604020202020204" pitchFamily="34" charset="0"/>
+              <a:buChar char="•"/>
+            </a:pPr>
+            <a:r>
+              <a:rPr kumimoji="1" lang="ko-KR" altLang="en-US" sz="1400" dirty="0">
+                <a:ln w="12700">
+                  <a:solidFill>
+                    <a:schemeClr val="tx1">
+                      <a:alpha val="5000"/>
+                    </a:schemeClr>
+                  </a:solidFill>
+                </a:ln>
+                <a:solidFill>
+                  <a:schemeClr val="tx1">
+                    <a:lumMod val="85000"/>
+                    <a:lumOff val="15000"/>
+                  </a:schemeClr>
+                </a:solidFill>
+                <a:latin typeface="a시월구일1" panose="02020600000000000000" pitchFamily="18" charset="-127"/>
+                <a:ea typeface="a시월구일1" panose="02020600000000000000" pitchFamily="18" charset="-127"/>
+                <a:cs typeface="Pretendard" panose="02000503000000020004" pitchFamily="2" charset="-127"/>
+              </a:rPr>
+              <a:t>자치구별 보건 </a:t>
+            </a:r>
+            <a:r>
+              <a:rPr kumimoji="1" lang="ko-KR" altLang="en-US" sz="1400" dirty="0">
+                <a:ln w="12700">
+                  <a:solidFill>
+                    <a:schemeClr val="tx1">
+                      <a:alpha val="5000"/>
+                    </a:schemeClr>
+                  </a:solidFill>
+                </a:ln>
+                <a:solidFill>
+                  <a:schemeClr val="tx1">
+                    <a:lumMod val="85000"/>
+                    <a:lumOff val="15000"/>
+                  </a:schemeClr>
+                </a:solidFill>
+                <a:latin typeface="a시월구일3" panose="02020600000000000000" pitchFamily="18" charset="-127"/>
+                <a:ea typeface="a시월구일3" panose="02020600000000000000" pitchFamily="18" charset="-127"/>
+                <a:cs typeface="Pretendard" panose="02000503000000020004" pitchFamily="2" charset="-127"/>
+              </a:rPr>
+              <a:t>취약 유형도</a:t>
+            </a:r>
+            <a:r>
+              <a:rPr kumimoji="1" lang="en-US" altLang="ko-KR" sz="1400" dirty="0">
+                <a:ln w="12700">
+                  <a:solidFill>
+                    <a:schemeClr val="tx1">
+                      <a:alpha val="5000"/>
+                    </a:schemeClr>
+                  </a:solidFill>
+                </a:ln>
+                <a:solidFill>
+                  <a:schemeClr val="tx1">
+                    <a:lumMod val="85000"/>
+                    <a:lumOff val="15000"/>
+                  </a:schemeClr>
+                </a:solidFill>
+                <a:latin typeface="a시월구일3" panose="02020600000000000000" pitchFamily="18" charset="-127"/>
+                <a:ea typeface="a시월구일3" panose="02020600000000000000" pitchFamily="18" charset="-127"/>
+                <a:cs typeface="Pretendard" panose="02000503000000020004" pitchFamily="2" charset="-127"/>
+              </a:rPr>
+              <a:t> </a:t>
+            </a:r>
+            <a:r>
+              <a:rPr kumimoji="1" lang="ko-KR" altLang="en-US" sz="1400" dirty="0">
+                <a:ln w="12700">
+                  <a:solidFill>
+                    <a:schemeClr val="tx1">
+                      <a:alpha val="5000"/>
+                    </a:schemeClr>
+                  </a:solidFill>
+                </a:ln>
+                <a:solidFill>
+                  <a:schemeClr val="tx1">
+                    <a:lumMod val="85000"/>
+                    <a:lumOff val="15000"/>
+                  </a:schemeClr>
+                </a:solidFill>
+                <a:latin typeface="a시월구일3" panose="02020600000000000000" pitchFamily="18" charset="-127"/>
+                <a:ea typeface="a시월구일3" panose="02020600000000000000" pitchFamily="18" charset="-127"/>
+                <a:cs typeface="Pretendard" panose="02000503000000020004" pitchFamily="2" charset="-127"/>
+              </a:rPr>
+              <a:t>분석</a:t>
+            </a:r>
+            <a:endParaRPr kumimoji="1" lang="en-US" altLang="ko-KR" sz="1400" dirty="0">
+              <a:ln w="12700">
+                <a:solidFill>
+                  <a:schemeClr val="tx1">
+                    <a:alpha val="5000"/>
+                  </a:schemeClr>
+                </a:solidFill>
+              </a:ln>
+              <a:solidFill>
+                <a:schemeClr val="tx1">
+                  <a:lumMod val="85000"/>
+                  <a:lumOff val="15000"/>
+                </a:schemeClr>
+              </a:solidFill>
+              <a:latin typeface="a시월구일3" panose="02020600000000000000" pitchFamily="18" charset="-127"/>
+              <a:ea typeface="a시월구일3" panose="02020600000000000000" pitchFamily="18" charset="-127"/>
+              <a:cs typeface="Pretendard" panose="02000503000000020004" pitchFamily="2" charset="-127"/>
+            </a:endParaRPr>
+          </a:p>
+          <a:p>
+            <a:pPr marL="85725" indent="-85725" latinLnBrk="0">
+              <a:lnSpc>
+                <a:spcPct val="150000"/>
+              </a:lnSpc>
+              <a:buFont typeface="Arial" panose="020B0604020202020204" pitchFamily="34" charset="0"/>
+              <a:buChar char="•"/>
+            </a:pPr>
+            <a:r>
+              <a:rPr kumimoji="1" lang="ko-KR" altLang="en-US" sz="1400" dirty="0">
+                <a:ln w="12700">
+                  <a:solidFill>
+                    <a:schemeClr val="tx1">
+                      <a:alpha val="5000"/>
+                    </a:schemeClr>
+                  </a:solidFill>
+                </a:ln>
+                <a:solidFill>
+                  <a:schemeClr val="tx1">
+                    <a:lumMod val="85000"/>
+                    <a:lumOff val="15000"/>
+                  </a:schemeClr>
+                </a:solidFill>
+                <a:latin typeface="a시월구일3" panose="02020600000000000000" pitchFamily="18" charset="-127"/>
+                <a:ea typeface="a시월구일3" panose="02020600000000000000" pitchFamily="18" charset="-127"/>
+                <a:cs typeface="Pretendard" panose="02000503000000020004" pitchFamily="2" charset="-127"/>
+              </a:rPr>
+              <a:t>위험도를 직관적으로 확인</a:t>
+            </a:r>
+            <a:r>
+              <a:rPr kumimoji="1" lang="ko-KR" altLang="en-US" sz="1400" dirty="0">
+                <a:ln w="12700">
+                  <a:solidFill>
+                    <a:schemeClr val="tx1">
+                      <a:alpha val="5000"/>
+                    </a:schemeClr>
+                  </a:solidFill>
+                </a:ln>
+                <a:solidFill>
+                  <a:schemeClr val="tx1">
+                    <a:lumMod val="85000"/>
+                    <a:lumOff val="15000"/>
+                  </a:schemeClr>
+                </a:solidFill>
+                <a:latin typeface="a시월구일1" panose="02020600000000000000" pitchFamily="18" charset="-127"/>
+                <a:ea typeface="a시월구일1" panose="02020600000000000000" pitchFamily="18" charset="-127"/>
+                <a:cs typeface="Pretendard" panose="02000503000000020004" pitchFamily="2" charset="-127"/>
+              </a:rPr>
+              <a:t>할 수 있는 서비스 제공 </a:t>
+            </a:r>
+            <a:endParaRPr kumimoji="1" lang="en-US" altLang="ko-KR" sz="1400" dirty="0">
+              <a:ln w="12700">
+                <a:solidFill>
+                  <a:schemeClr val="tx1">
+                    <a:alpha val="5000"/>
+                  </a:schemeClr>
+                </a:solidFill>
+              </a:ln>
+              <a:solidFill>
+                <a:schemeClr val="tx1">
+                  <a:lumMod val="85000"/>
+                  <a:lumOff val="15000"/>
+                </a:schemeClr>
+              </a:solidFill>
+              <a:latin typeface="a시월구일1" panose="02020600000000000000" pitchFamily="18" charset="-127"/>
+              <a:ea typeface="a시월구일1" panose="02020600000000000000" pitchFamily="18" charset="-127"/>
+              <a:cs typeface="Pretendard" panose="02000503000000020004" pitchFamily="2" charset="-127"/>
+            </a:endParaRPr>
+          </a:p>
+          <a:p>
+            <a:pPr marL="85725" indent="-85725" latinLnBrk="0">
+              <a:lnSpc>
+                <a:spcPct val="150000"/>
+              </a:lnSpc>
+              <a:buFont typeface="Arial" panose="020B0604020202020204" pitchFamily="34" charset="0"/>
+              <a:buChar char="•"/>
+            </a:pPr>
+            <a:r>
+              <a:rPr kumimoji="1" lang="ko-KR" altLang="en-US" sz="1400" dirty="0">
+                <a:ln w="12700">
+                  <a:solidFill>
+                    <a:schemeClr val="tx1">
+                      <a:alpha val="5000"/>
+                    </a:schemeClr>
+                  </a:solidFill>
+                </a:ln>
+                <a:solidFill>
+                  <a:schemeClr val="tx1">
+                    <a:lumMod val="85000"/>
+                    <a:lumOff val="15000"/>
+                  </a:schemeClr>
+                </a:solidFill>
+                <a:latin typeface="a시월구일1" panose="02020600000000000000" pitchFamily="18" charset="-127"/>
+                <a:ea typeface="a시월구일1" panose="02020600000000000000" pitchFamily="18" charset="-127"/>
+                <a:cs typeface="Pretendard" panose="02000503000000020004" pitchFamily="2" charset="-127"/>
+              </a:rPr>
+              <a:t>지역별 상세 분석 및 원인 정보를 사용자가 쉽게 탐색할 수 있는 서비스</a:t>
+            </a:r>
+            <a:endParaRPr kumimoji="1" lang="en-US" altLang="ko-KR" sz="1400" dirty="0">
+              <a:ln w="12700">
+                <a:solidFill>
+                  <a:schemeClr val="tx1">
+                    <a:alpha val="5000"/>
+                  </a:schemeClr>
+                </a:solidFill>
+              </a:ln>
+              <a:solidFill>
+                <a:schemeClr val="tx1">
+                  <a:lumMod val="85000"/>
+                  <a:lumOff val="15000"/>
+                </a:schemeClr>
+              </a:solidFill>
+              <a:latin typeface="a시월구일1" panose="02020600000000000000" pitchFamily="18" charset="-127"/>
+              <a:ea typeface="a시월구일1" panose="02020600000000000000" pitchFamily="18" charset="-127"/>
+              <a:cs typeface="Pretendard" panose="02000503000000020004" pitchFamily="2" charset="-127"/>
+            </a:endParaRPr>
+          </a:p>
+        </p:txBody>
+      </p:sp>
+      <p:sp>
+        <p:nvSpPr>
+          <p:cNvPr id="30" name="TextBox 29">
+            <a:extLst>
+              <a:ext uri="{FF2B5EF4-FFF2-40B4-BE49-F238E27FC236}">
+                <a16:creationId xmlns:a16="http://schemas.microsoft.com/office/drawing/2014/main" id="{E992E3DE-9EFD-8C27-6FB7-FFA999B81E34}"/>
+              </a:ext>
+            </a:extLst>
+          </p:cNvPr>
+          <p:cNvSpPr txBox="1"/>
+          <p:nvPr/>
+        </p:nvSpPr>
+        <p:spPr>
+          <a:xfrm>
+            <a:off x="446532" y="5548764"/>
+            <a:ext cx="6321157" cy="608628"/>
+          </a:xfrm>
+          <a:prstGeom prst="rect">
+            <a:avLst/>
+          </a:prstGeom>
+          <a:noFill/>
+        </p:spPr>
+        <p:txBody>
+          <a:bodyPr wrap="square" lIns="0" tIns="0" rIns="0" bIns="0" rtlCol="0" anchor="t">
+            <a:spAutoFit/>
+          </a:bodyPr>
+          <a:lstStyle/>
+          <a:p>
+            <a:pPr marL="85725" indent="-85725" latinLnBrk="0">
+              <a:lnSpc>
+                <a:spcPct val="150000"/>
+              </a:lnSpc>
+              <a:buFont typeface="Arial" panose="020B0604020202020204" pitchFamily="34" charset="0"/>
+              <a:buChar char="•"/>
+            </a:pPr>
+            <a:r>
+              <a:rPr kumimoji="1" lang="ko-KR" altLang="en-US" sz="1400" dirty="0">
+                <a:ln w="12700">
+                  <a:solidFill>
+                    <a:schemeClr val="tx1">
+                      <a:alpha val="5000"/>
+                    </a:schemeClr>
+                  </a:solidFill>
+                </a:ln>
+                <a:solidFill>
+                  <a:schemeClr val="tx1">
+                    <a:lumMod val="85000"/>
+                    <a:lumOff val="15000"/>
+                  </a:schemeClr>
+                </a:solidFill>
+                <a:latin typeface="a시월구일1" panose="02020600000000000000" pitchFamily="18" charset="-127"/>
+                <a:ea typeface="a시월구일1" panose="02020600000000000000" pitchFamily="18" charset="-127"/>
+                <a:cs typeface="Pretendard" panose="02000503000000020004" pitchFamily="2" charset="-127"/>
+              </a:rPr>
+              <a:t>분석 결과를 기반으로 자치구별 보건 정책 의사결정을 지원하는 시스템 구현</a:t>
+            </a:r>
+            <a:endParaRPr kumimoji="1" lang="en-US" altLang="ko-KR" sz="1400" dirty="0">
+              <a:ln w="12700">
+                <a:solidFill>
+                  <a:schemeClr val="tx1">
+                    <a:alpha val="5000"/>
+                  </a:schemeClr>
+                </a:solidFill>
+              </a:ln>
+              <a:solidFill>
+                <a:schemeClr val="tx1">
+                  <a:lumMod val="85000"/>
+                  <a:lumOff val="15000"/>
+                </a:schemeClr>
+              </a:solidFill>
+              <a:latin typeface="a시월구일1" panose="02020600000000000000" pitchFamily="18" charset="-127"/>
+              <a:ea typeface="a시월구일1" panose="02020600000000000000" pitchFamily="18" charset="-127"/>
+              <a:cs typeface="Pretendard" panose="02000503000000020004" pitchFamily="2" charset="-127"/>
+            </a:endParaRPr>
+          </a:p>
+          <a:p>
+            <a:pPr marL="85725" indent="-85725" latinLnBrk="0">
+              <a:lnSpc>
+                <a:spcPct val="150000"/>
+              </a:lnSpc>
+              <a:buFont typeface="Arial" panose="020B0604020202020204" pitchFamily="34" charset="0"/>
+              <a:buChar char="•"/>
+            </a:pPr>
+            <a:r>
+              <a:rPr kumimoji="1" lang="ko-KR" altLang="en-US" sz="1400" dirty="0">
+                <a:ln w="12700">
+                  <a:solidFill>
+                    <a:schemeClr val="tx1">
+                      <a:alpha val="5000"/>
+                    </a:schemeClr>
+                  </a:solidFill>
+                </a:ln>
+                <a:solidFill>
+                  <a:schemeClr val="tx1">
+                    <a:lumMod val="85000"/>
+                    <a:lumOff val="15000"/>
+                  </a:schemeClr>
+                </a:solidFill>
+                <a:latin typeface="a시월구일1" panose="02020600000000000000" pitchFamily="18" charset="-127"/>
+                <a:ea typeface="a시월구일1" panose="02020600000000000000" pitchFamily="18" charset="-127"/>
+                <a:cs typeface="Pretendard" panose="02000503000000020004" pitchFamily="2" charset="-127"/>
+              </a:rPr>
+              <a:t>지역 특성에 따른 맞춤형 정책 방향 제공</a:t>
+            </a:r>
+            <a:endParaRPr kumimoji="1" lang="en-US" altLang="ko-KR" sz="1400" dirty="0">
+              <a:ln w="12700">
+                <a:solidFill>
+                  <a:schemeClr val="tx1">
+                    <a:alpha val="5000"/>
+                  </a:schemeClr>
+                </a:solidFill>
+              </a:ln>
+              <a:solidFill>
+                <a:schemeClr val="tx1">
+                  <a:lumMod val="85000"/>
+                  <a:lumOff val="15000"/>
+                </a:schemeClr>
+              </a:solidFill>
+              <a:latin typeface="a시월구일1" panose="02020600000000000000" pitchFamily="18" charset="-127"/>
+              <a:ea typeface="a시월구일1" panose="02020600000000000000" pitchFamily="18" charset="-127"/>
+              <a:cs typeface="Pretendard" panose="02000503000000020004" pitchFamily="2" charset="-127"/>
+            </a:endParaRPr>
+          </a:p>
+        </p:txBody>
+      </p:sp>
+      <p:sp>
+        <p:nvSpPr>
+          <p:cNvPr id="43" name="사각형: 둥근 모서리 42">
+            <a:extLst>
+              <a:ext uri="{FF2B5EF4-FFF2-40B4-BE49-F238E27FC236}">
+                <a16:creationId xmlns:a16="http://schemas.microsoft.com/office/drawing/2014/main" id="{FA1D4FA5-10F6-175D-E0E2-FDC117A36B24}"/>
+              </a:ext>
+            </a:extLst>
+          </p:cNvPr>
+          <p:cNvSpPr/>
+          <p:nvPr/>
+        </p:nvSpPr>
+        <p:spPr>
+          <a:xfrm>
+            <a:off x="4896904" y="4997489"/>
+            <a:ext cx="2398191" cy="463174"/>
+          </a:xfrm>
+          <a:prstGeom prst="roundRect">
+            <a:avLst>
+              <a:gd name="adj" fmla="val 16564"/>
+            </a:avLst>
+          </a:prstGeom>
+          <a:solidFill>
+            <a:schemeClr val="bg1">
+              <a:lumMod val="95000"/>
+            </a:schemeClr>
+          </a:solidFill>
+          <a:ln>
+            <a:solidFill>
+              <a:schemeClr val="bg2">
+                <a:lumMod val="90000"/>
+              </a:schemeClr>
+            </a:solidFill>
+          </a:ln>
+        </p:spPr>
+        <p:style>
+          <a:lnRef idx="2">
+            <a:schemeClr val="accent1">
+              <a:shade val="15000"/>
+            </a:schemeClr>
+          </a:lnRef>
+          <a:fillRef idx="1">
+            <a:schemeClr val="accent1"/>
+          </a:fillRef>
+          <a:effectRef idx="0">
+            <a:schemeClr val="accent1"/>
+          </a:effectRef>
+          <a:fontRef idx="minor">
+            <a:schemeClr val="lt1"/>
+          </a:fontRef>
+        </p:style>
+        <p:txBody>
+          <a:bodyPr rtlCol="0" anchor="ctr"/>
+          <a:lstStyle/>
+          <a:p>
+            <a:pPr algn="ctr"/>
+            <a:r>
+              <a:rPr lang="en-US" altLang="ko-KR" sz="2000" dirty="0">
+                <a:solidFill>
+                  <a:schemeClr val="tx1"/>
+                </a:solidFill>
+                <a:latin typeface="a시월구일3" panose="02020600000000000000" pitchFamily="18" charset="-127"/>
+                <a:ea typeface="a시월구일3" panose="02020600000000000000" pitchFamily="18" charset="-127"/>
+                <a:cs typeface="Noto Sans Disp ExtBd" panose="020B0902040504020204" pitchFamily="34"/>
+              </a:rPr>
+              <a:t>System / Goal</a:t>
+            </a:r>
+            <a:endParaRPr lang="ko-KR" altLang="en-US" sz="2000" dirty="0">
+              <a:solidFill>
+                <a:schemeClr val="tx1"/>
+              </a:solidFill>
+              <a:latin typeface="a시월구일3" panose="02020600000000000000" pitchFamily="18" charset="-127"/>
+              <a:ea typeface="a시월구일3" panose="02020600000000000000" pitchFamily="18" charset="-127"/>
+              <a:cs typeface="Noto Sans Disp ExtBd" panose="020B0902040504020204" pitchFamily="34"/>
+            </a:endParaRPr>
+          </a:p>
+        </p:txBody>
+      </p:sp>
     </p:spTree>
     <p:extLst>
       <p:ext uri="{BB962C8B-B14F-4D97-AF65-F5344CB8AC3E}">
